--- a/docs/atn-trd-strategic-trading.pptx
+++ b/docs/atn-trd-strategic-trading.pptx
@@ -23,9 +23,10 @@
     <p:sldId id="271" r:id="rId17"/>
     <p:sldId id="272" r:id="rId18"/>
     <p:sldId id="273" r:id="rId19"/>
+    <p:sldId id="274" r:id="rId20"/>
   </p:sldIdLst>
   <p:notesMasterIdLst>
-    <p:notesMasterId r:id="rId20"/>
+    <p:notesMasterId r:id="rId21"/>
   </p:notesMasterIdLst>
   <p:sldSz cx="12192000" cy="6858000"/>
   <p:notesSz cx="6858000" cy="12192000"/>
@@ -1372,7 +1373,7 @@
           <a:p>
             <a:r>
               <a:rPr lang="en-US" dirty="0"/>
-              <a:t>Only one active plan per symbol per direction. Conflicting plans are blocked at creation rather than reconciled at execution.</a:t>
+              <a:t>Auto-TRIM is what closes the loop. Without it the system only ever adds, and every exit stays a manual decision.</a:t>
             </a:r>
             <a:endParaRPr lang="en-US" dirty="0"/>
           </a:p>
@@ -1988,7 +1989,7 @@
           <a:p>
             <a:r>
               <a:rPr lang="en-US" dirty="0"/>
-              <a:t>Phase 4 is the only irreversible-feeling step. Everything before it can be built, observed and abandoned at no cost to the running system.</a:t>
+              <a:t>Phase 3 is the only step that feels irreversible, and even it is a flag — the old cycle is skipped rather than deleted until phase 6 of the original migration note.</a:t>
             </a:r>
             <a:endParaRPr lang="en-US" dirty="0"/>
           </a:p>
@@ -2076,7 +2077,7 @@
           <a:p>
             <a:r>
               <a:rPr lang="en-US" dirty="0"/>
-              <a:t>The first criterion is the one to keep repeating: a quiet system is the design working, not the design failing.</a:t>
+              <a:t>The dashboard's mode badge matters more than it looks: it is the one place that answers 'which system actually placed that order'.</a:t>
             </a:r>
             <a:endParaRPr lang="en-US" dirty="0"/>
           </a:p>
@@ -2100,6 +2101,94 @@
             <a:fld id="{F7021451-1387-4CA6-816F-3879F97B5CBC}" type="slidenum">
               <a:rPr lang="en-US"/>
               <a:t>18</a:t>
+            </a:fld>
+            <a:endParaRPr lang="en-US"/>
+          </a:p>
+        </p:txBody>
+      </p:sp>
+    </p:spTree>
+    <p:extLst>
+      <p:ext uri="{BB962C8B-B14F-4D97-AF65-F5344CB8AC3E}">
+        <p14:creationId xmlns:p14="http://schemas.microsoft.com/office/powerpoint/2010/main" val="1024086991"/>
+      </p:ext>
+    </p:extLst>
+  </p:cSld>
+  <p:clrMapOvr>
+    <a:masterClrMapping/>
+  </p:clrMapOvr>
+</p:notes>
+</file>
+
+<file path=ppt/notesSlides/notesSlide19.xml><?xml version="1.0" encoding="utf-8"?>
+<p:notes xmlns:a="http://schemas.openxmlformats.org/drawingml/2006/main" xmlns:r="http://schemas.openxmlformats.org/officeDocument/2006/relationships" xmlns:p="http://schemas.openxmlformats.org/presentationml/2006/main">
+  <p:cSld>
+    <p:spTree>
+      <p:nvGrpSpPr>
+        <p:cNvPr id="1" name=""/>
+        <p:cNvGrpSpPr/>
+        <p:nvPr/>
+      </p:nvGrpSpPr>
+      <p:grpSpPr>
+        <a:xfrm>
+          <a:off x="0" y="0"/>
+          <a:ext cx="0" cy="0"/>
+          <a:chOff x="0" y="0"/>
+          <a:chExt cx="0" cy="0"/>
+        </a:xfrm>
+      </p:grpSpPr>
+      <p:sp>
+        <p:nvSpPr>
+          <p:cNvPr id="2" name="Slide Image Placeholder 1"/>
+          <p:cNvSpPr>
+            <a:spLocks noGrp="1" noRot="1" noChangeAspect="1"/>
+          </p:cNvSpPr>
+          <p:nvPr>
+            <p:ph type="sldImg"/>
+          </p:nvPr>
+        </p:nvSpPr>
+        <p:spPr/>
+      </p:sp>
+      <p:sp>
+        <p:nvSpPr>
+          <p:cNvPr id="3" name="Notes Placeholder 2"/>
+          <p:cNvSpPr>
+            <a:spLocks noGrp="1"/>
+          </p:cNvSpPr>
+          <p:nvPr>
+            <p:ph type="body" idx="1"/>
+          </p:nvPr>
+        </p:nvSpPr>
+        <p:spPr/>
+        <p:txBody>
+          <a:bodyPr/>
+          <a:lstStyle/>
+          <a:p>
+            <a:r>
+              <a:rPr lang="en-US" dirty="0"/>
+              <a:t>All ten criteria are checked off in the design doc. The open question is no longer whether it works as designed, but whether the thresholds are right — which needs the collected history to answer.</a:t>
+            </a:r>
+            <a:endParaRPr lang="en-US" dirty="0"/>
+          </a:p>
+        </p:txBody>
+      </p:sp>
+      <p:sp>
+        <p:nvSpPr>
+          <p:cNvPr id="4" name="Slide Number Placeholder 3"/>
+          <p:cNvSpPr>
+            <a:spLocks noGrp="1"/>
+          </p:cNvSpPr>
+          <p:nvPr>
+            <p:ph type="sldNum" sz="quarter" idx="10"/>
+          </p:nvPr>
+        </p:nvSpPr>
+        <p:spPr/>
+        <p:txBody>
+          <a:bodyPr/>
+          <a:lstStyle/>
+          <a:p>
+            <a:fld id="{F7021451-1387-4CA6-816F-3879F97B5CBC}" type="slidenum">
+              <a:rPr lang="en-US"/>
+              <a:t>19</a:t>
             </a:fld>
             <a:endParaRPr lang="en-US"/>
           </a:p>
@@ -3908,7 +3997,7 @@
                 <a:ea typeface="Cambria" pitchFamily="34" charset="-122"/>
                 <a:cs typeface="Cambria" pitchFamily="34" charset="-120"/>
               </a:rPr>
-              <a:t>6</a:t>
+              <a:t>4</a:t>
             </a:r>
             <a:endParaRPr lang="en-US" sz="2100" dirty="0"/>
           </a:p>
@@ -4110,12 +4199,12 @@
         </p:nvSpPr>
         <p:spPr>
           <a:xfrm>
-            <a:off x="566928" y="1481328"/>
-            <a:ext cx="3429000" cy="1874520"/>
+            <a:off x="566928" y="1463040"/>
+            <a:ext cx="3429000" cy="2157984"/>
           </a:xfrm>
           <a:prstGeom prst="roundRect">
             <a:avLst>
-              <a:gd name="adj" fmla="val 2927"/>
+              <a:gd name="adj" fmla="val 2542"/>
             </a:avLst>
           </a:prstGeom>
           <a:solidFill>
@@ -4137,7 +4226,7 @@
         </p:nvSpPr>
         <p:spPr>
           <a:xfrm>
-            <a:off x="859536" y="1737360"/>
+            <a:off x="859536" y="1682496"/>
             <a:ext cx="1737360" cy="310896"/>
           </a:xfrm>
           <a:prstGeom prst="roundRect">
@@ -4164,7 +4253,7 @@
         </p:nvSpPr>
         <p:spPr>
           <a:xfrm>
-            <a:off x="859536" y="1737360"/>
+            <a:off x="859536" y="1682496"/>
             <a:ext cx="1737360" cy="310896"/>
           </a:xfrm>
           <a:prstGeom prst="rect">
@@ -4203,7 +4292,46 @@
         </p:nvSpPr>
         <p:spPr>
           <a:xfrm>
-            <a:off x="859536" y="2194560"/>
+            <a:off x="859536" y="2066544"/>
+            <a:ext cx="2843784" cy="256032"/>
+          </a:xfrm>
+          <a:prstGeom prst="rect">
+            <a:avLst/>
+          </a:prstGeom>
+          <a:noFill/>
+          <a:ln/>
+        </p:spPr>
+        <p:txBody>
+          <a:bodyPr wrap="square" lIns="0" tIns="0" rIns="0" bIns="0" rtlCol="0" anchor="ctr"/>
+          <a:lstStyle/>
+          <a:p>
+            <a:pPr indent="0" marL="0">
+              <a:buNone/>
+            </a:pPr>
+            <a:r>
+              <a:rPr lang="en-US" sz="1000" dirty="0">
+                <a:solidFill>
+                  <a:srgbClr val="028090"/>
+                </a:solidFill>
+                <a:latin typeface="Courier New" pitchFamily="34" charset="0"/>
+                <a:ea typeface="Courier New" pitchFamily="34" charset="-122"/>
+                <a:cs typeface="Courier New" pitchFamily="34" charset="-120"/>
+              </a:rPr>
+              <a:t>opens when score ≥ 0.70</a:t>
+            </a:r>
+            <a:endParaRPr lang="en-US" sz="1000" dirty="0"/>
+          </a:p>
+        </p:txBody>
+      </p:sp>
+      <p:sp>
+        <p:nvSpPr>
+          <p:cNvPr id="8" name="Text 6"/>
+          <p:cNvSpPr txBox="1"/>
+          <p:nvPr/>
+        </p:nvSpPr>
+        <p:spPr>
+          <a:xfrm>
+            <a:off x="859536" y="2359152"/>
             <a:ext cx="2843784" cy="502920"/>
           </a:xfrm>
           <a:prstGeom prst="rect">
@@ -4239,13 +4367,13 @@
       </p:sp>
       <p:sp>
         <p:nvSpPr>
-          <p:cNvPr id="8" name="Text 6"/>
-          <p:cNvSpPr txBox="1"/>
-          <p:nvPr/>
-        </p:nvSpPr>
-        <p:spPr>
-          <a:xfrm>
-            <a:off x="859536" y="2724912"/>
+          <p:cNvPr id="9" name="Text 7"/>
+          <p:cNvSpPr txBox="1"/>
+          <p:nvPr/>
+        </p:nvSpPr>
+        <p:spPr>
+          <a:xfrm>
+            <a:off x="859536" y="2889504"/>
             <a:ext cx="2843784" cy="457200"/>
           </a:xfrm>
           <a:prstGeom prst="rect">
@@ -4281,18 +4409,18 @@
       </p:sp>
       <p:sp>
         <p:nvSpPr>
-          <p:cNvPr id="9" name="Shape 7"/>
+          <p:cNvPr id="10" name="Shape 8"/>
           <p:cNvSpPr/>
           <p:nvPr/>
         </p:nvSpPr>
         <p:spPr>
           <a:xfrm>
-            <a:off x="4270248" y="1481328"/>
-            <a:ext cx="3429000" cy="1874520"/>
+            <a:off x="4270248" y="1463040"/>
+            <a:ext cx="3429000" cy="2157984"/>
           </a:xfrm>
           <a:prstGeom prst="roundRect">
             <a:avLst>
-              <a:gd name="adj" fmla="val 2927"/>
+              <a:gd name="adj" fmla="val 2542"/>
             </a:avLst>
           </a:prstGeom>
           <a:solidFill>
@@ -4308,13 +4436,13 @@
       </p:sp>
       <p:sp>
         <p:nvSpPr>
-          <p:cNvPr id="10" name="Shape 8"/>
+          <p:cNvPr id="11" name="Shape 9"/>
           <p:cNvSpPr/>
           <p:nvPr/>
         </p:nvSpPr>
         <p:spPr>
           <a:xfrm>
-            <a:off x="4562856" y="1737360"/>
+            <a:off x="4562856" y="1682496"/>
             <a:ext cx="1737360" cy="310896"/>
           </a:xfrm>
           <a:prstGeom prst="roundRect">
@@ -4335,13 +4463,13 @@
       </p:sp>
       <p:sp>
         <p:nvSpPr>
-          <p:cNvPr id="11" name="Text 9"/>
-          <p:cNvSpPr txBox="1"/>
-          <p:nvPr/>
-        </p:nvSpPr>
-        <p:spPr>
-          <a:xfrm>
-            <a:off x="4562856" y="1737360"/>
+          <p:cNvPr id="12" name="Text 10"/>
+          <p:cNvSpPr txBox="1"/>
+          <p:nvPr/>
+        </p:nvSpPr>
+        <p:spPr>
+          <a:xfrm>
+            <a:off x="4562856" y="1682496"/>
             <a:ext cx="1737360" cy="310896"/>
           </a:xfrm>
           <a:prstGeom prst="rect">
@@ -4374,13 +4502,52 @@
       </p:sp>
       <p:sp>
         <p:nvSpPr>
-          <p:cNvPr id="12" name="Text 10"/>
-          <p:cNvSpPr txBox="1"/>
-          <p:nvPr/>
-        </p:nvSpPr>
-        <p:spPr>
-          <a:xfrm>
-            <a:off x="4562856" y="2194560"/>
+          <p:cNvPr id="13" name="Text 11"/>
+          <p:cNvSpPr txBox="1"/>
+          <p:nvPr/>
+        </p:nvSpPr>
+        <p:spPr>
+          <a:xfrm>
+            <a:off x="4562856" y="2066544"/>
+            <a:ext cx="2843784" cy="256032"/>
+          </a:xfrm>
+          <a:prstGeom prst="rect">
+            <a:avLst/>
+          </a:prstGeom>
+          <a:noFill/>
+          <a:ln/>
+        </p:spPr>
+        <p:txBody>
+          <a:bodyPr wrap="square" lIns="0" tIns="0" rIns="0" bIns="0" rtlCol="0" anchor="ctr"/>
+          <a:lstStyle/>
+          <a:p>
+            <a:pPr indent="0" marL="0">
+              <a:buNone/>
+            </a:pPr>
+            <a:r>
+              <a:rPr lang="en-US" sz="1000" dirty="0">
+                <a:solidFill>
+                  <a:srgbClr val="028090"/>
+                </a:solidFill>
+                <a:latin typeface="Courier New" pitchFamily="34" charset="0"/>
+                <a:ea typeface="Courier New" pitchFamily="34" charset="-122"/>
+                <a:cs typeface="Courier New" pitchFamily="34" charset="-120"/>
+              </a:rPr>
+              <a:t>opens when score ≤ −0.50</a:t>
+            </a:r>
+            <a:endParaRPr lang="en-US" sz="1000" dirty="0"/>
+          </a:p>
+        </p:txBody>
+      </p:sp>
+      <p:sp>
+        <p:nvSpPr>
+          <p:cNvPr id="14" name="Text 12"/>
+          <p:cNvSpPr txBox="1"/>
+          <p:nvPr/>
+        </p:nvSpPr>
+        <p:spPr>
+          <a:xfrm>
+            <a:off x="4562856" y="2359152"/>
             <a:ext cx="2843784" cy="502920"/>
           </a:xfrm>
           <a:prstGeom prst="rect">
@@ -4416,13 +4583,13 @@
       </p:sp>
       <p:sp>
         <p:nvSpPr>
-          <p:cNvPr id="13" name="Text 11"/>
-          <p:cNvSpPr txBox="1"/>
-          <p:nvPr/>
-        </p:nvSpPr>
-        <p:spPr>
-          <a:xfrm>
-            <a:off x="4562856" y="2724912"/>
+          <p:cNvPr id="15" name="Text 13"/>
+          <p:cNvSpPr txBox="1"/>
+          <p:nvPr/>
+        </p:nvSpPr>
+        <p:spPr>
+          <a:xfrm>
+            <a:off x="4562856" y="2889504"/>
             <a:ext cx="2843784" cy="457200"/>
           </a:xfrm>
           <a:prstGeom prst="rect">
@@ -4458,18 +4625,18 @@
       </p:sp>
       <p:sp>
         <p:nvSpPr>
-          <p:cNvPr id="14" name="Shape 12"/>
+          <p:cNvPr id="16" name="Shape 14"/>
           <p:cNvSpPr/>
           <p:nvPr/>
         </p:nvSpPr>
         <p:spPr>
           <a:xfrm>
-            <a:off x="7973568" y="1481328"/>
-            <a:ext cx="3429000" cy="1874520"/>
+            <a:off x="7973568" y="1463040"/>
+            <a:ext cx="3429000" cy="2157984"/>
           </a:xfrm>
           <a:prstGeom prst="roundRect">
             <a:avLst>
-              <a:gd name="adj" fmla="val 2927"/>
+              <a:gd name="adj" fmla="val 2542"/>
             </a:avLst>
           </a:prstGeom>
           <a:solidFill>
@@ -4485,13 +4652,13 @@
       </p:sp>
       <p:sp>
         <p:nvSpPr>
-          <p:cNvPr id="15" name="Shape 13"/>
+          <p:cNvPr id="17" name="Shape 15"/>
           <p:cNvSpPr/>
           <p:nvPr/>
         </p:nvSpPr>
         <p:spPr>
           <a:xfrm>
-            <a:off x="8266176" y="1737360"/>
+            <a:off x="8266176" y="1682496"/>
             <a:ext cx="1737360" cy="310896"/>
           </a:xfrm>
           <a:prstGeom prst="roundRect">
@@ -4512,13 +4679,13 @@
       </p:sp>
       <p:sp>
         <p:nvSpPr>
-          <p:cNvPr id="16" name="Text 14"/>
-          <p:cNvSpPr txBox="1"/>
-          <p:nvPr/>
-        </p:nvSpPr>
-        <p:spPr>
-          <a:xfrm>
-            <a:off x="8266176" y="1737360"/>
+          <p:cNvPr id="18" name="Text 16"/>
+          <p:cNvSpPr txBox="1"/>
+          <p:nvPr/>
+        </p:nvSpPr>
+        <p:spPr>
+          <a:xfrm>
+            <a:off x="8266176" y="1682496"/>
             <a:ext cx="1737360" cy="310896"/>
           </a:xfrm>
           <a:prstGeom prst="rect">
@@ -4551,13 +4718,52 @@
       </p:sp>
       <p:sp>
         <p:nvSpPr>
-          <p:cNvPr id="17" name="Text 15"/>
-          <p:cNvSpPr txBox="1"/>
-          <p:nvPr/>
-        </p:nvSpPr>
-        <p:spPr>
-          <a:xfrm>
-            <a:off x="8266176" y="2194560"/>
+          <p:cNvPr id="19" name="Text 17"/>
+          <p:cNvSpPr txBox="1"/>
+          <p:nvPr/>
+        </p:nvSpPr>
+        <p:spPr>
+          <a:xfrm>
+            <a:off x="8266176" y="2066544"/>
+            <a:ext cx="2843784" cy="256032"/>
+          </a:xfrm>
+          <a:prstGeom prst="rect">
+            <a:avLst/>
+          </a:prstGeom>
+          <a:noFill/>
+          <a:ln/>
+        </p:spPr>
+        <p:txBody>
+          <a:bodyPr wrap="square" lIns="0" tIns="0" rIns="0" bIns="0" rtlCol="0" anchor="ctr"/>
+          <a:lstStyle/>
+          <a:p>
+            <a:pPr indent="0" marL="0">
+              <a:buNone/>
+            </a:pPr>
+            <a:r>
+              <a:rPr lang="en-US" sz="1000" dirty="0">
+                <a:solidFill>
+                  <a:srgbClr val="028090"/>
+                </a:solidFill>
+                <a:latin typeface="Courier New" pitchFamily="34" charset="0"/>
+                <a:ea typeface="Courier New" pitchFamily="34" charset="-122"/>
+                <a:cs typeface="Courier New" pitchFamily="34" charset="-120"/>
+              </a:rPr>
+              <a:t>opens when regime = RISK_OFF</a:t>
+            </a:r>
+            <a:endParaRPr lang="en-US" sz="1000" dirty="0"/>
+          </a:p>
+        </p:txBody>
+      </p:sp>
+      <p:sp>
+        <p:nvSpPr>
+          <p:cNvPr id="20" name="Text 18"/>
+          <p:cNvSpPr txBox="1"/>
+          <p:nvPr/>
+        </p:nvSpPr>
+        <p:spPr>
+          <a:xfrm>
+            <a:off x="8266176" y="2359152"/>
             <a:ext cx="2843784" cy="502920"/>
           </a:xfrm>
           <a:prstGeom prst="rect">
@@ -4593,13 +4799,13 @@
       </p:sp>
       <p:sp>
         <p:nvSpPr>
-          <p:cNvPr id="18" name="Text 16"/>
-          <p:cNvSpPr txBox="1"/>
-          <p:nvPr/>
-        </p:nvSpPr>
-        <p:spPr>
-          <a:xfrm>
-            <a:off x="8266176" y="2724912"/>
+          <p:cNvPr id="21" name="Text 19"/>
+          <p:cNvSpPr txBox="1"/>
+          <p:nvPr/>
+        </p:nvSpPr>
+        <p:spPr>
+          <a:xfrm>
+            <a:off x="8266176" y="2889504"/>
             <a:ext cx="2843784" cy="457200"/>
           </a:xfrm>
           <a:prstGeom prst="rect">
@@ -4635,13 +4841,13 @@
       </p:sp>
       <p:sp>
         <p:nvSpPr>
-          <p:cNvPr id="19" name="Text 17"/>
-          <p:cNvSpPr txBox="1"/>
-          <p:nvPr/>
-        </p:nvSpPr>
-        <p:spPr>
-          <a:xfrm>
-            <a:off x="566928" y="3621024"/>
+          <p:cNvPr id="22" name="Text 20"/>
+          <p:cNvSpPr txBox="1"/>
+          <p:nvPr/>
+        </p:nvSpPr>
+        <p:spPr>
+          <a:xfrm>
+            <a:off x="566928" y="3785616"/>
             <a:ext cx="4572000" cy="274320"/>
           </a:xfrm>
           <a:prstGeom prst="rect">
@@ -4674,13 +4880,13 @@
       </p:sp>
       <p:sp>
         <p:nvSpPr>
-          <p:cNvPr id="20" name="Shape 18"/>
+          <p:cNvPr id="23" name="Shape 21"/>
           <p:cNvSpPr/>
           <p:nvPr/>
         </p:nvSpPr>
         <p:spPr>
           <a:xfrm>
-            <a:off x="566928" y="3986784"/>
+            <a:off x="566928" y="4114800"/>
             <a:ext cx="1965960" cy="566928"/>
           </a:xfrm>
           <a:prstGeom prst="roundRect">
@@ -4701,13 +4907,13 @@
       </p:sp>
       <p:sp>
         <p:nvSpPr>
-          <p:cNvPr id="21" name="Text 19"/>
-          <p:cNvSpPr txBox="1"/>
-          <p:nvPr/>
-        </p:nvSpPr>
-        <p:spPr>
-          <a:xfrm>
-            <a:off x="566928" y="3986784"/>
+          <p:cNvPr id="24" name="Text 22"/>
+          <p:cNvSpPr txBox="1"/>
+          <p:nvPr/>
+        </p:nvSpPr>
+        <p:spPr>
+          <a:xfrm>
+            <a:off x="566928" y="4114800"/>
             <a:ext cx="1965960" cy="566928"/>
           </a:xfrm>
           <a:prstGeom prst="rect">
@@ -4740,13 +4946,13 @@
       </p:sp>
       <p:sp>
         <p:nvSpPr>
-          <p:cNvPr id="22" name="Text 20"/>
-          <p:cNvSpPr txBox="1"/>
-          <p:nvPr/>
-        </p:nvSpPr>
-        <p:spPr>
-          <a:xfrm>
-            <a:off x="2551176" y="3986784"/>
+          <p:cNvPr id="25" name="Text 23"/>
+          <p:cNvSpPr txBox="1"/>
+          <p:nvPr/>
+        </p:nvSpPr>
+        <p:spPr>
+          <a:xfrm>
+            <a:off x="2551176" y="4114800"/>
             <a:ext cx="329184" cy="566928"/>
           </a:xfrm>
           <a:prstGeom prst="rect">
@@ -4779,13 +4985,13 @@
       </p:sp>
       <p:sp>
         <p:nvSpPr>
-          <p:cNvPr id="23" name="Shape 21"/>
+          <p:cNvPr id="26" name="Shape 24"/>
           <p:cNvSpPr/>
           <p:nvPr/>
         </p:nvSpPr>
         <p:spPr>
           <a:xfrm>
-            <a:off x="2898648" y="3986784"/>
+            <a:off x="2898648" y="4114800"/>
             <a:ext cx="1965960" cy="566928"/>
           </a:xfrm>
           <a:prstGeom prst="roundRect">
@@ -4806,13 +5012,13 @@
       </p:sp>
       <p:sp>
         <p:nvSpPr>
-          <p:cNvPr id="24" name="Text 22"/>
-          <p:cNvSpPr txBox="1"/>
-          <p:nvPr/>
-        </p:nvSpPr>
-        <p:spPr>
-          <a:xfrm>
-            <a:off x="2898648" y="3986784"/>
+          <p:cNvPr id="27" name="Text 25"/>
+          <p:cNvSpPr txBox="1"/>
+          <p:nvPr/>
+        </p:nvSpPr>
+        <p:spPr>
+          <a:xfrm>
+            <a:off x="2898648" y="4114800"/>
             <a:ext cx="1965960" cy="566928"/>
           </a:xfrm>
           <a:prstGeom prst="rect">
@@ -4845,13 +5051,13 @@
       </p:sp>
       <p:sp>
         <p:nvSpPr>
-          <p:cNvPr id="25" name="Text 23"/>
-          <p:cNvSpPr txBox="1"/>
-          <p:nvPr/>
-        </p:nvSpPr>
-        <p:spPr>
-          <a:xfrm>
-            <a:off x="4882896" y="3986784"/>
+          <p:cNvPr id="28" name="Text 26"/>
+          <p:cNvSpPr txBox="1"/>
+          <p:nvPr/>
+        </p:nvSpPr>
+        <p:spPr>
+          <a:xfrm>
+            <a:off x="4882896" y="4114800"/>
             <a:ext cx="329184" cy="566928"/>
           </a:xfrm>
           <a:prstGeom prst="rect">
@@ -4884,13 +5090,13 @@
       </p:sp>
       <p:sp>
         <p:nvSpPr>
-          <p:cNvPr id="26" name="Shape 24"/>
+          <p:cNvPr id="29" name="Shape 27"/>
           <p:cNvSpPr/>
           <p:nvPr/>
         </p:nvSpPr>
         <p:spPr>
           <a:xfrm>
-            <a:off x="5230368" y="3986784"/>
+            <a:off x="5230368" y="4114800"/>
             <a:ext cx="1965960" cy="566928"/>
           </a:xfrm>
           <a:prstGeom prst="roundRect">
@@ -4911,13 +5117,13 @@
       </p:sp>
       <p:sp>
         <p:nvSpPr>
-          <p:cNvPr id="27" name="Text 25"/>
-          <p:cNvSpPr txBox="1"/>
-          <p:nvPr/>
-        </p:nvSpPr>
-        <p:spPr>
-          <a:xfrm>
-            <a:off x="5230368" y="3986784"/>
+          <p:cNvPr id="30" name="Text 28"/>
+          <p:cNvSpPr txBox="1"/>
+          <p:nvPr/>
+        </p:nvSpPr>
+        <p:spPr>
+          <a:xfrm>
+            <a:off x="5230368" y="4114800"/>
             <a:ext cx="1965960" cy="566928"/>
           </a:xfrm>
           <a:prstGeom prst="rect">
@@ -4950,13 +5156,13 @@
       </p:sp>
       <p:sp>
         <p:nvSpPr>
-          <p:cNvPr id="28" name="Text 26"/>
-          <p:cNvSpPr txBox="1"/>
-          <p:nvPr/>
-        </p:nvSpPr>
-        <p:spPr>
-          <a:xfrm>
-            <a:off x="7214616" y="3986784"/>
+          <p:cNvPr id="31" name="Text 29"/>
+          <p:cNvSpPr txBox="1"/>
+          <p:nvPr/>
+        </p:nvSpPr>
+        <p:spPr>
+          <a:xfrm>
+            <a:off x="7214616" y="4114800"/>
             <a:ext cx="329184" cy="566928"/>
           </a:xfrm>
           <a:prstGeom prst="rect">
@@ -4989,13 +5195,13 @@
       </p:sp>
       <p:sp>
         <p:nvSpPr>
-          <p:cNvPr id="29" name="Shape 27"/>
+          <p:cNvPr id="32" name="Shape 30"/>
           <p:cNvSpPr/>
           <p:nvPr/>
         </p:nvSpPr>
         <p:spPr>
           <a:xfrm>
-            <a:off x="7562088" y="3986784"/>
+            <a:off x="7562088" y="4114800"/>
             <a:ext cx="1965960" cy="566928"/>
           </a:xfrm>
           <a:prstGeom prst="roundRect">
@@ -5016,13 +5222,13 @@
       </p:sp>
       <p:sp>
         <p:nvSpPr>
-          <p:cNvPr id="30" name="Text 28"/>
-          <p:cNvSpPr txBox="1"/>
-          <p:nvPr/>
-        </p:nvSpPr>
-        <p:spPr>
-          <a:xfrm>
-            <a:off x="7562088" y="3986784"/>
+          <p:cNvPr id="33" name="Text 31"/>
+          <p:cNvSpPr txBox="1"/>
+          <p:nvPr/>
+        </p:nvSpPr>
+        <p:spPr>
+          <a:xfrm>
+            <a:off x="7562088" y="4114800"/>
             <a:ext cx="1965960" cy="566928"/>
           </a:xfrm>
           <a:prstGeom prst="rect">
@@ -5055,13 +5261,13 @@
       </p:sp>
       <p:sp>
         <p:nvSpPr>
-          <p:cNvPr id="31" name="Shape 29"/>
+          <p:cNvPr id="34" name="Shape 32"/>
           <p:cNvSpPr/>
           <p:nvPr/>
         </p:nvSpPr>
         <p:spPr>
           <a:xfrm>
-            <a:off x="7653528" y="3986784"/>
+            <a:off x="7653528" y="4114800"/>
             <a:ext cx="1965960" cy="566928"/>
           </a:xfrm>
           <a:prstGeom prst="roundRect">
@@ -5082,13 +5288,13 @@
       </p:sp>
       <p:sp>
         <p:nvSpPr>
-          <p:cNvPr id="32" name="Text 30"/>
-          <p:cNvSpPr txBox="1"/>
-          <p:nvPr/>
-        </p:nvSpPr>
-        <p:spPr>
-          <a:xfrm>
-            <a:off x="7653528" y="3986784"/>
+          <p:cNvPr id="35" name="Text 33"/>
+          <p:cNvSpPr txBox="1"/>
+          <p:nvPr/>
+        </p:nvSpPr>
+        <p:spPr>
+          <a:xfrm>
+            <a:off x="7653528" y="4114800"/>
             <a:ext cx="1965960" cy="566928"/>
           </a:xfrm>
           <a:prstGeom prst="rect">
@@ -5121,13 +5327,13 @@
       </p:sp>
       <p:sp>
         <p:nvSpPr>
-          <p:cNvPr id="33" name="Text 31"/>
-          <p:cNvSpPr txBox="1"/>
-          <p:nvPr/>
-        </p:nvSpPr>
-        <p:spPr>
-          <a:xfrm>
-            <a:off x="9802368" y="3986784"/>
+          <p:cNvPr id="36" name="Text 34"/>
+          <p:cNvSpPr txBox="1"/>
+          <p:nvPr/>
+        </p:nvSpPr>
+        <p:spPr>
+          <a:xfrm>
+            <a:off x="9802368" y="4114800"/>
             <a:ext cx="2377440" cy="566928"/>
           </a:xfrm>
           <a:prstGeom prst="rect">
@@ -5155,7 +5361,7 @@
                 <a:ea typeface="Calibri" pitchFamily="34" charset="-122"/>
                 <a:cs typeface="Calibri" pitchFamily="34" charset="-120"/>
               </a:rPr>
-              <a:t>PAUSED is reversible. CANCELLED is not — it means conviction collapsed, and may itself trigger a TRIM.</a:t>
+              <a:t>PAUSED is reversible. CANCELLED is not — conviction collapsed.</a:t>
             </a:r>
             <a:endParaRPr lang="en-US" sz="1050" dirty="0"/>
           </a:p>
@@ -5163,18 +5369,18 @@
       </p:sp>
       <p:sp>
         <p:nvSpPr>
-          <p:cNvPr id="34" name="Shape 32"/>
+          <p:cNvPr id="37" name="Shape 35"/>
           <p:cNvSpPr/>
           <p:nvPr/>
         </p:nvSpPr>
         <p:spPr>
           <a:xfrm>
-            <a:off x="566928" y="4828032"/>
-            <a:ext cx="11055096" cy="1298448"/>
+            <a:off x="566928" y="4937760"/>
+            <a:ext cx="11055096" cy="1188720"/>
           </a:xfrm>
           <a:prstGeom prst="roundRect">
             <a:avLst>
-              <a:gd name="adj" fmla="val 4225"/>
+              <a:gd name="adj" fmla="val 4615"/>
             </a:avLst>
           </a:prstGeom>
           <a:solidFill>
@@ -5190,14 +5396,14 @@
       </p:sp>
       <p:sp>
         <p:nvSpPr>
-          <p:cNvPr id="35" name="Text 33"/>
-          <p:cNvSpPr txBox="1"/>
-          <p:nvPr/>
-        </p:nvSpPr>
-        <p:spPr>
-          <a:xfrm>
-            <a:off x="950976" y="5029200"/>
-            <a:ext cx="7315200" cy="274320"/>
+          <p:cNvPr id="38" name="Text 36"/>
+          <p:cNvSpPr txBox="1"/>
+          <p:nvPr/>
+        </p:nvSpPr>
+        <p:spPr>
+          <a:xfrm>
+            <a:off x="950976" y="5120640"/>
+            <a:ext cx="4846320" cy="274320"/>
           </a:xfrm>
           <a:prstGeom prst="rect">
             <a:avLst/>
@@ -5221,7 +5427,7 @@
                 <a:ea typeface="Calibri" pitchFamily="34" charset="-122"/>
                 <a:cs typeface="Calibri" pitchFamily="34" charset="-120"/>
               </a:rPr>
-              <a:t>Direction is what the plan does. Category is what the holding is.</a:t>
+              <a:t>Direction is what the plan does; category is what the holding is</a:t>
             </a:r>
             <a:endParaRPr lang="en-US" sz="1250" dirty="0"/>
           </a:p>
@@ -5229,14 +5435,14 @@
       </p:sp>
       <p:sp>
         <p:nvSpPr>
-          <p:cNvPr id="36" name="Text 34"/>
-          <p:cNvSpPr txBox="1"/>
-          <p:nvPr/>
-        </p:nvSpPr>
-        <p:spPr>
-          <a:xfrm>
-            <a:off x="950976" y="5340096"/>
-            <a:ext cx="10287000" cy="640080"/>
+          <p:cNvPr id="39" name="Text 37"/>
+          <p:cNvSpPr txBox="1"/>
+          <p:nvPr/>
+        </p:nvSpPr>
+        <p:spPr>
+          <a:xfrm>
+            <a:off x="950976" y="5413248"/>
+            <a:ext cx="4892040" cy="603504"/>
           </a:xfrm>
           <a:prstGeom prst="rect">
             <a:avLst/>
@@ -5250,12 +5456,12 @@
           <a:p>
             <a:pPr indent="0" marL="0">
               <a:lnSpc>
-                <a:spcPts val="1800"/>
+                <a:spcPts val="1700"/>
               </a:lnSpc>
               <a:buNone/>
             </a:pPr>
             <a:r>
-              <a:rPr lang="en-US" sz="1250" dirty="0">
+              <a:rPr lang="en-US" sz="1200" dirty="0">
                 <a:solidFill>
                   <a:srgbClr val="9FB3C8"/>
                 </a:solidFill>
@@ -5263,9 +5469,90 @@
                 <a:ea typeface="Calibri" pitchFamily="34" charset="-122"/>
                 <a:cs typeface="Calibri" pitchFamily="34" charset="-120"/>
               </a:rPr>
-              <a:t>The two are independent: an ACCUMULATE plan on an income name behaves differently from an ACCUMULATE plan on a growth name. Creation notes record the thesis and the scores at the moment the plan opened, so “why are we still buying this?” has an answer that predates the position.</a:t>
+              <a:t>The two are independent. An ACCUMULATE plan on an income name behaves nothing like one on a growth name, and the creation notes record the thesis either way.</a:t>
+            </a:r>
+            <a:endParaRPr lang="en-US" sz="1200" dirty="0"/>
+          </a:p>
+        </p:txBody>
+      </p:sp>
+      <p:sp>
+        <p:nvSpPr>
+          <p:cNvPr id="40" name="Text 38"/>
+          <p:cNvSpPr txBox="1"/>
+          <p:nvPr/>
+        </p:nvSpPr>
+        <p:spPr>
+          <a:xfrm>
+            <a:off x="6327648" y="5120640"/>
+            <a:ext cx="4937760" cy="274320"/>
+          </a:xfrm>
+          <a:prstGeom prst="rect">
+            <a:avLst/>
+          </a:prstGeom>
+          <a:noFill/>
+          <a:ln/>
+        </p:spPr>
+        <p:txBody>
+          <a:bodyPr wrap="square" lIns="0" tIns="0" rIns="0" bIns="0" rtlCol="0" anchor="ctr"/>
+          <a:lstStyle/>
+          <a:p>
+            <a:pPr indent="0" marL="0">
+              <a:buNone/>
+            </a:pPr>
+            <a:r>
+              <a:rPr lang="en-US" sz="1250" b="1" dirty="0">
+                <a:solidFill>
+                  <a:srgbClr val="02C39A"/>
+                </a:solidFill>
+                <a:latin typeface="Calibri" pitchFamily="34" charset="0"/>
+                <a:ea typeface="Calibri" pitchFamily="34" charset="-122"/>
+                <a:cs typeface="Calibri" pitchFamily="34" charset="-120"/>
+              </a:rPr>
+              <a:t>TRIM plans are created for you</a:t>
             </a:r>
             <a:endParaRPr lang="en-US" sz="1250" dirty="0"/>
+          </a:p>
+        </p:txBody>
+      </p:sp>
+      <p:sp>
+        <p:nvSpPr>
+          <p:cNvPr id="41" name="Text 39"/>
+          <p:cNvSpPr txBox="1"/>
+          <p:nvPr/>
+        </p:nvSpPr>
+        <p:spPr>
+          <a:xfrm>
+            <a:off x="6327648" y="5413248"/>
+            <a:ext cx="4937760" cy="603504"/>
+          </a:xfrm>
+          <a:prstGeom prst="rect">
+            <a:avLst/>
+          </a:prstGeom>
+          <a:noFill/>
+          <a:ln/>
+        </p:spPr>
+        <p:txBody>
+          <a:bodyPr wrap="square" lIns="0" tIns="0" rIns="0" bIns="0" rtlCol="0" anchor="ctr"/>
+          <a:lstStyle/>
+          <a:p>
+            <a:pPr indent="0" marL="0">
+              <a:lnSpc>
+                <a:spcPts val="1700"/>
+              </a:lnSpc>
+              <a:buNone/>
+            </a:pPr>
+            <a:r>
+              <a:rPr lang="en-US" sz="1200" dirty="0">
+                <a:solidFill>
+                  <a:srgbClr val="9FB3C8"/>
+                </a:solidFill>
+                <a:latin typeface="Calibri" pitchFamily="34" charset="0"/>
+                <a:ea typeface="Calibri" pitchFamily="34" charset="-122"/>
+                <a:cs typeface="Calibri" pitchFamily="34" charset="-120"/>
+              </a:rPr>
+              <a:t>When a position's score falls below the sell threshold, the system opens a TRIM without being asked — so the portfolio can exit, not only accumulate.</a:t>
+            </a:r>
+            <a:endParaRPr lang="en-US" sz="1200" dirty="0"/>
           </a:p>
         </p:txBody>
       </p:sp>
@@ -12495,7 +12782,7 @@
                 <a:ea typeface="Calibri" pitchFamily="34" charset="-122"/>
                 <a:cs typeface="Calibri" pitchFamily="34" charset="-120"/>
               </a:rPr>
-              <a:t>GETTING THERE</a:t>
+              <a:t>THE WORK</a:t>
             </a:r>
             <a:endParaRPr lang="en-US" sz="1050" dirty="0"/>
           </a:p>
@@ -12534,7 +12821,7 @@
                 <a:ea typeface="Cambria" pitchFamily="34" charset="-122"/>
                 <a:cs typeface="Cambria" pitchFamily="34" charset="-120"/>
               </a:rPr>
-              <a:t>Six phases, additive until phase four</a:t>
+              <a:t>Four phases, in issue order</a:t>
             </a:r>
             <a:endParaRPr lang="en-US" sz="3000" dirty="0"/>
           </a:p>
@@ -12548,12 +12835,12 @@
         </p:nvSpPr>
         <p:spPr>
           <a:xfrm>
-            <a:off x="566928" y="1536192"/>
-            <a:ext cx="1700784" cy="2514600"/>
+            <a:off x="566928" y="1463040"/>
+            <a:ext cx="2560320" cy="3017520"/>
           </a:xfrm>
           <a:prstGeom prst="roundRect">
             <a:avLst>
-              <a:gd name="adj" fmla="val 3226"/>
+              <a:gd name="adj" fmla="val 2143"/>
             </a:avLst>
           </a:prstGeom>
           <a:solidFill>
@@ -12575,76 +12862,73 @@
         </p:nvSpPr>
         <p:spPr>
           <a:xfrm>
-            <a:off x="566928" y="1737360"/>
-            <a:ext cx="1700784" cy="457200"/>
-          </a:xfrm>
-          <a:prstGeom prst="rect">
-            <a:avLst/>
-          </a:prstGeom>
-          <a:noFill/>
-          <a:ln/>
-        </p:spPr>
-        <p:txBody>
-          <a:bodyPr wrap="square" lIns="0" tIns="0" rIns="0" bIns="0" rtlCol="0" anchor="ctr"/>
-          <a:lstStyle/>
-          <a:p>
-            <a:pPr algn="ctr" indent="0" marL="0">
-              <a:buNone/>
-            </a:pPr>
-            <a:r>
-              <a:rPr lang="en-US" sz="2600" b="1" dirty="0">
+            <a:off x="822960" y="1664208"/>
+            <a:ext cx="2048256" cy="237744"/>
+          </a:xfrm>
+          <a:prstGeom prst="rect">
+            <a:avLst/>
+          </a:prstGeom>
+          <a:noFill/>
+          <a:ln/>
+        </p:spPr>
+        <p:txBody>
+          <a:bodyPr wrap="square" lIns="0" tIns="0" rIns="0" bIns="0" rtlCol="0" anchor="ctr"/>
+          <a:lstStyle/>
+          <a:p>
+            <a:pPr indent="0" marL="0">
+              <a:buNone/>
+            </a:pPr>
+            <a:r>
+              <a:rPr lang="en-US" sz="1000" b="1" spc="160" kern="0" dirty="0">
                 <a:solidFill>
                   <a:srgbClr val="028090"/>
+                </a:solidFill>
+                <a:latin typeface="Calibri" pitchFamily="34" charset="0"/>
+                <a:ea typeface="Calibri" pitchFamily="34" charset="-122"/>
+                <a:cs typeface="Calibri" pitchFamily="34" charset="-120"/>
+              </a:rPr>
+              <a:t>PHASE 1</a:t>
+            </a:r>
+            <a:endParaRPr lang="en-US" sz="1000" dirty="0"/>
+          </a:p>
+        </p:txBody>
+      </p:sp>
+      <p:sp>
+        <p:nvSpPr>
+          <p:cNvPr id="6" name="Text 4"/>
+          <p:cNvSpPr txBox="1"/>
+          <p:nvPr/>
+        </p:nvSpPr>
+        <p:spPr>
+          <a:xfrm>
+            <a:off x="822960" y="1920240"/>
+            <a:ext cx="2048256" cy="420624"/>
+          </a:xfrm>
+          <a:prstGeom prst="rect">
+            <a:avLst/>
+          </a:prstGeom>
+          <a:noFill/>
+          <a:ln/>
+        </p:spPr>
+        <p:txBody>
+          <a:bodyPr wrap="square" lIns="0" tIns="0" rIns="0" bIns="0" rtlCol="0" anchor="ctr"/>
+          <a:lstStyle/>
+          <a:p>
+            <a:pPr indent="0" marL="0">
+              <a:buNone/>
+            </a:pPr>
+            <a:r>
+              <a:rPr lang="en-US" sz="1700" b="1" dirty="0">
+                <a:solidFill>
+                  <a:srgbClr val="16222F"/>
                 </a:solidFill>
                 <a:latin typeface="Cambria" pitchFamily="34" charset="0"/>
                 <a:ea typeface="Cambria" pitchFamily="34" charset="-122"/>
                 <a:cs typeface="Cambria" pitchFamily="34" charset="-120"/>
               </a:rPr>
-              <a:t>1</a:t>
-            </a:r>
-            <a:endParaRPr lang="en-US" sz="2600" dirty="0"/>
-          </a:p>
-        </p:txBody>
-      </p:sp>
-      <p:sp>
-        <p:nvSpPr>
-          <p:cNvPr id="6" name="Text 4"/>
-          <p:cNvSpPr txBox="1"/>
-          <p:nvPr/>
-        </p:nvSpPr>
-        <p:spPr>
-          <a:xfrm>
-            <a:off x="731520" y="2249424"/>
-            <a:ext cx="1371600" cy="566928"/>
-          </a:xfrm>
-          <a:prstGeom prst="rect">
-            <a:avLst/>
-          </a:prstGeom>
-          <a:noFill/>
-          <a:ln/>
-        </p:spPr>
-        <p:txBody>
-          <a:bodyPr wrap="square" lIns="0" tIns="0" rIns="0" bIns="0" rtlCol="0" anchor="ctr"/>
-          <a:lstStyle/>
-          <a:p>
-            <a:pPr algn="ctr" indent="0" marL="0">
-              <a:lnSpc>
-                <a:spcPts val="1700"/>
-              </a:lnSpc>
-              <a:buNone/>
-            </a:pPr>
-            <a:r>
-              <a:rPr lang="en-US" sz="1250" b="1" dirty="0">
-                <a:solidFill>
-                  <a:srgbClr val="16222F"/>
-                </a:solidFill>
-                <a:latin typeface="Calibri" pitchFamily="34" charset="0"/>
-                <a:ea typeface="Calibri" pitchFamily="34" charset="-122"/>
-                <a:cs typeface="Calibri" pitchFamily="34" charset="-120"/>
-              </a:rPr>
-              <a:t>Signal collection</a:t>
-            </a:r>
-            <a:endParaRPr lang="en-US" sz="1250" dirty="0"/>
+              <a:t>Foundation</a:t>
+            </a:r>
+            <a:endParaRPr lang="en-US" sz="1700" dirty="0"/>
           </a:p>
         </p:txBody>
       </p:sp>
@@ -12656,27 +12940,27 @@
         </p:nvSpPr>
         <p:spPr>
           <a:xfrm>
-            <a:off x="731520" y="2852928"/>
-            <a:ext cx="1371600" cy="1051560"/>
-          </a:xfrm>
-          <a:prstGeom prst="rect">
-            <a:avLst/>
-          </a:prstGeom>
-          <a:noFill/>
-          <a:ln/>
-        </p:spPr>
-        <p:txBody>
-          <a:bodyPr wrap="square" lIns="0" tIns="0" rIns="0" bIns="0" rtlCol="0" anchor="ctr"/>
-          <a:lstStyle/>
-          <a:p>
-            <a:pPr algn="ctr" indent="0" marL="0">
+            <a:off x="822960" y="2377440"/>
+            <a:ext cx="2048256" cy="530352"/>
+          </a:xfrm>
+          <a:prstGeom prst="rect">
+            <a:avLst/>
+          </a:prstGeom>
+          <a:noFill/>
+          <a:ln/>
+        </p:spPr>
+        <p:txBody>
+          <a:bodyPr wrap="square" lIns="0" tIns="0" rIns="0" bIns="0" rtlCol="0" anchor="ctr"/>
+          <a:lstStyle/>
+          <a:p>
+            <a:pPr indent="0" marL="0">
               <a:lnSpc>
                 <a:spcPts val="1500"/>
               </a:lnSpc>
               <a:buNone/>
             </a:pPr>
             <a:r>
-              <a:rPr lang="en-US" sz="1100" dirty="0">
+              <a:rPr lang="en-US" sz="1150" dirty="0">
                 <a:solidFill>
                   <a:srgbClr val="5E6E7E"/>
                 </a:solidFill>
@@ -12684,7 +12968,46 @@
                 <a:ea typeface="Calibri" pitchFamily="34" charset="-122"/>
                 <a:cs typeface="Calibri" pitchFamily="34" charset="-120"/>
               </a:rPr>
-              <a:t>Runs alongside the existing system, changing nothing</a:t>
+              <a:t>No trading changes — just start collecting</a:t>
+            </a:r>
+            <a:endParaRPr lang="en-US" sz="1150" dirty="0"/>
+          </a:p>
+        </p:txBody>
+      </p:sp>
+      <p:sp>
+        <p:nvSpPr>
+          <p:cNvPr id="8" name="Text 6"/>
+          <p:cNvSpPr txBox="1"/>
+          <p:nvPr/>
+        </p:nvSpPr>
+        <p:spPr>
+          <a:xfrm>
+            <a:off x="822960" y="2999232"/>
+            <a:ext cx="658368" cy="219456"/>
+          </a:xfrm>
+          <a:prstGeom prst="rect">
+            <a:avLst/>
+          </a:prstGeom>
+          <a:noFill/>
+          <a:ln/>
+        </p:spPr>
+        <p:txBody>
+          <a:bodyPr wrap="square" lIns="0" tIns="0" rIns="0" bIns="0" rtlCol="0" anchor="ctr"/>
+          <a:lstStyle/>
+          <a:p>
+            <a:pPr indent="0" marL="0">
+              <a:buNone/>
+            </a:pPr>
+            <a:r>
+              <a:rPr lang="en-US" sz="1100" b="1" dirty="0">
+                <a:solidFill>
+                  <a:srgbClr val="028090"/>
+                </a:solidFill>
+                <a:latin typeface="Courier New" pitchFamily="34" charset="0"/>
+                <a:ea typeface="Courier New" pitchFamily="34" charset="-122"/>
+                <a:cs typeface="Courier New" pitchFamily="34" charset="-120"/>
+              </a:rPr>
+              <a:t>#136</a:t>
             </a:r>
             <a:endParaRPr lang="en-US" sz="1100" dirty="0"/>
           </a:p>
@@ -12692,18 +13015,222 @@
       </p:sp>
       <p:sp>
         <p:nvSpPr>
-          <p:cNvPr id="8" name="Shape 6"/>
+          <p:cNvPr id="9" name="Text 7"/>
+          <p:cNvSpPr txBox="1"/>
+          <p:nvPr/>
+        </p:nvSpPr>
+        <p:spPr>
+          <a:xfrm>
+            <a:off x="1499616" y="2980944"/>
+            <a:ext cx="1371600" cy="420624"/>
+          </a:xfrm>
+          <a:prstGeom prst="rect">
+            <a:avLst/>
+          </a:prstGeom>
+          <a:noFill/>
+          <a:ln/>
+        </p:spPr>
+        <p:txBody>
+          <a:bodyPr wrap="square" lIns="0" tIns="0" rIns="0" bIns="0" rtlCol="0" anchor="ctr"/>
+          <a:lstStyle/>
+          <a:p>
+            <a:pPr indent="0" marL="0">
+              <a:lnSpc>
+                <a:spcPts val="1300"/>
+              </a:lnSpc>
+              <a:buNone/>
+            </a:pPr>
+            <a:r>
+              <a:rPr lang="en-US" sz="1050" dirty="0">
+                <a:solidFill>
+                  <a:srgbClr val="16222F"/>
+                </a:solidFill>
+                <a:latin typeface="Calibri" pitchFamily="34" charset="0"/>
+                <a:ea typeface="Calibri" pitchFamily="34" charset="-122"/>
+                <a:cs typeface="Calibri" pitchFamily="34" charset="-120"/>
+              </a:rPr>
+              <a:t>Strategic trading settings</a:t>
+            </a:r>
+            <a:endParaRPr lang="en-US" sz="1050" dirty="0"/>
+          </a:p>
+        </p:txBody>
+      </p:sp>
+      <p:sp>
+        <p:nvSpPr>
+          <p:cNvPr id="10" name="Text 8"/>
+          <p:cNvSpPr txBox="1"/>
+          <p:nvPr/>
+        </p:nvSpPr>
+        <p:spPr>
+          <a:xfrm>
+            <a:off x="822960" y="3456432"/>
+            <a:ext cx="658368" cy="219456"/>
+          </a:xfrm>
+          <a:prstGeom prst="rect">
+            <a:avLst/>
+          </a:prstGeom>
+          <a:noFill/>
+          <a:ln/>
+        </p:spPr>
+        <p:txBody>
+          <a:bodyPr wrap="square" lIns="0" tIns="0" rIns="0" bIns="0" rtlCol="0" anchor="ctr"/>
+          <a:lstStyle/>
+          <a:p>
+            <a:pPr indent="0" marL="0">
+              <a:buNone/>
+            </a:pPr>
+            <a:r>
+              <a:rPr lang="en-US" sz="1100" b="1" dirty="0">
+                <a:solidFill>
+                  <a:srgbClr val="028090"/>
+                </a:solidFill>
+                <a:latin typeface="Courier New" pitchFamily="34" charset="0"/>
+                <a:ea typeface="Courier New" pitchFamily="34" charset="-122"/>
+                <a:cs typeface="Courier New" pitchFamily="34" charset="-120"/>
+              </a:rPr>
+              <a:t>#132</a:t>
+            </a:r>
+            <a:endParaRPr lang="en-US" sz="1100" dirty="0"/>
+          </a:p>
+        </p:txBody>
+      </p:sp>
+      <p:sp>
+        <p:nvSpPr>
+          <p:cNvPr id="11" name="Text 9"/>
+          <p:cNvSpPr txBox="1"/>
+          <p:nvPr/>
+        </p:nvSpPr>
+        <p:spPr>
+          <a:xfrm>
+            <a:off x="1499616" y="3438144"/>
+            <a:ext cx="1371600" cy="420624"/>
+          </a:xfrm>
+          <a:prstGeom prst="rect">
+            <a:avLst/>
+          </a:prstGeom>
+          <a:noFill/>
+          <a:ln/>
+        </p:spPr>
+        <p:txBody>
+          <a:bodyPr wrap="square" lIns="0" tIns="0" rIns="0" bIns="0" rtlCol="0" anchor="ctr"/>
+          <a:lstStyle/>
+          <a:p>
+            <a:pPr indent="0" marL="0">
+              <a:lnSpc>
+                <a:spcPts val="1300"/>
+              </a:lnSpc>
+              <a:buNone/>
+            </a:pPr>
+            <a:r>
+              <a:rPr lang="en-US" sz="1050" dirty="0">
+                <a:solidFill>
+                  <a:srgbClr val="16222F"/>
+                </a:solidFill>
+                <a:latin typeface="Calibri" pitchFamily="34" charset="0"/>
+                <a:ea typeface="Calibri" pitchFamily="34" charset="-122"/>
+                <a:cs typeface="Calibri" pitchFamily="34" charset="-120"/>
+              </a:rPr>
+              <a:t>Signal accumulation layer</a:t>
+            </a:r>
+            <a:endParaRPr lang="en-US" sz="1050" dirty="0"/>
+          </a:p>
+        </p:txBody>
+      </p:sp>
+      <p:sp>
+        <p:nvSpPr>
+          <p:cNvPr id="12" name="Text 10"/>
+          <p:cNvSpPr txBox="1"/>
+          <p:nvPr/>
+        </p:nvSpPr>
+        <p:spPr>
+          <a:xfrm>
+            <a:off x="822960" y="3913632"/>
+            <a:ext cx="658368" cy="219456"/>
+          </a:xfrm>
+          <a:prstGeom prst="rect">
+            <a:avLst/>
+          </a:prstGeom>
+          <a:noFill/>
+          <a:ln/>
+        </p:spPr>
+        <p:txBody>
+          <a:bodyPr wrap="square" lIns="0" tIns="0" rIns="0" bIns="0" rtlCol="0" anchor="ctr"/>
+          <a:lstStyle/>
+          <a:p>
+            <a:pPr indent="0" marL="0">
+              <a:buNone/>
+            </a:pPr>
+            <a:r>
+              <a:rPr lang="en-US" sz="1100" b="1" dirty="0">
+                <a:solidFill>
+                  <a:srgbClr val="028090"/>
+                </a:solidFill>
+                <a:latin typeface="Courier New" pitchFamily="34" charset="0"/>
+                <a:ea typeface="Courier New" pitchFamily="34" charset="-122"/>
+                <a:cs typeface="Courier New" pitchFamily="34" charset="-120"/>
+              </a:rPr>
+              <a:t>#133</a:t>
+            </a:r>
+            <a:endParaRPr lang="en-US" sz="1100" dirty="0"/>
+          </a:p>
+        </p:txBody>
+      </p:sp>
+      <p:sp>
+        <p:nvSpPr>
+          <p:cNvPr id="13" name="Text 11"/>
+          <p:cNvSpPr txBox="1"/>
+          <p:nvPr/>
+        </p:nvSpPr>
+        <p:spPr>
+          <a:xfrm>
+            <a:off x="1499616" y="3895344"/>
+            <a:ext cx="1371600" cy="420624"/>
+          </a:xfrm>
+          <a:prstGeom prst="rect">
+            <a:avLst/>
+          </a:prstGeom>
+          <a:noFill/>
+          <a:ln/>
+        </p:spPr>
+        <p:txBody>
+          <a:bodyPr wrap="square" lIns="0" tIns="0" rIns="0" bIns="0" rtlCol="0" anchor="ctr"/>
+          <a:lstStyle/>
+          <a:p>
+            <a:pPr indent="0" marL="0">
+              <a:lnSpc>
+                <a:spcPts val="1300"/>
+              </a:lnSpc>
+              <a:buNone/>
+            </a:pPr>
+            <a:r>
+              <a:rPr lang="en-US" sz="1050" dirty="0">
+                <a:solidFill>
+                  <a:srgbClr val="16222F"/>
+                </a:solidFill>
+                <a:latin typeface="Calibri" pitchFamily="34" charset="0"/>
+                <a:ea typeface="Calibri" pitchFamily="34" charset="-122"/>
+                <a:cs typeface="Calibri" pitchFamily="34" charset="-120"/>
+              </a:rPr>
+              <a:t>Market regime detection</a:t>
+            </a:r>
+            <a:endParaRPr lang="en-US" sz="1050" dirty="0"/>
+          </a:p>
+        </p:txBody>
+      </p:sp>
+      <p:sp>
+        <p:nvSpPr>
+          <p:cNvPr id="14" name="Shape 12"/>
           <p:cNvSpPr/>
           <p:nvPr/>
         </p:nvSpPr>
         <p:spPr>
           <a:xfrm>
-            <a:off x="2414016" y="1536192"/>
-            <a:ext cx="1700784" cy="2514600"/>
+            <a:off x="3346704" y="1463040"/>
+            <a:ext cx="2560320" cy="3017520"/>
           </a:xfrm>
           <a:prstGeom prst="roundRect">
             <a:avLst>
-              <a:gd name="adj" fmla="val 3226"/>
+              <a:gd name="adj" fmla="val 2143"/>
             </a:avLst>
           </a:prstGeom>
           <a:solidFill>
@@ -12719,114 +13246,111 @@
       </p:sp>
       <p:sp>
         <p:nvSpPr>
-          <p:cNvPr id="9" name="Text 7"/>
-          <p:cNvSpPr txBox="1"/>
-          <p:nvPr/>
-        </p:nvSpPr>
-        <p:spPr>
-          <a:xfrm>
-            <a:off x="2414016" y="1737360"/>
-            <a:ext cx="1700784" cy="457200"/>
-          </a:xfrm>
-          <a:prstGeom prst="rect">
-            <a:avLst/>
-          </a:prstGeom>
-          <a:noFill/>
-          <a:ln/>
-        </p:spPr>
-        <p:txBody>
-          <a:bodyPr wrap="square" lIns="0" tIns="0" rIns="0" bIns="0" rtlCol="0" anchor="ctr"/>
-          <a:lstStyle/>
-          <a:p>
-            <a:pPr algn="ctr" indent="0" marL="0">
-              <a:buNone/>
-            </a:pPr>
-            <a:r>
-              <a:rPr lang="en-US" sz="2600" b="1" dirty="0">
+          <p:cNvPr id="15" name="Text 13"/>
+          <p:cNvSpPr txBox="1"/>
+          <p:nvPr/>
+        </p:nvSpPr>
+        <p:spPr>
+          <a:xfrm>
+            <a:off x="3602736" y="1664208"/>
+            <a:ext cx="2048256" cy="237744"/>
+          </a:xfrm>
+          <a:prstGeom prst="rect">
+            <a:avLst/>
+          </a:prstGeom>
+          <a:noFill/>
+          <a:ln/>
+        </p:spPr>
+        <p:txBody>
+          <a:bodyPr wrap="square" lIns="0" tIns="0" rIns="0" bIns="0" rtlCol="0" anchor="ctr"/>
+          <a:lstStyle/>
+          <a:p>
+            <a:pPr indent="0" marL="0">
+              <a:buNone/>
+            </a:pPr>
+            <a:r>
+              <a:rPr lang="en-US" sz="1000" b="1" spc="160" kern="0" dirty="0">
                 <a:solidFill>
                   <a:srgbClr val="028090"/>
+                </a:solidFill>
+                <a:latin typeface="Calibri" pitchFamily="34" charset="0"/>
+                <a:ea typeface="Calibri" pitchFamily="34" charset="-122"/>
+                <a:cs typeface="Calibri" pitchFamily="34" charset="-120"/>
+              </a:rPr>
+              <a:t>PHASE 2</a:t>
+            </a:r>
+            <a:endParaRPr lang="en-US" sz="1000" dirty="0"/>
+          </a:p>
+        </p:txBody>
+      </p:sp>
+      <p:sp>
+        <p:nvSpPr>
+          <p:cNvPr id="16" name="Text 14"/>
+          <p:cNvSpPr txBox="1"/>
+          <p:nvPr/>
+        </p:nvSpPr>
+        <p:spPr>
+          <a:xfrm>
+            <a:off x="3602736" y="1920240"/>
+            <a:ext cx="2048256" cy="420624"/>
+          </a:xfrm>
+          <a:prstGeom prst="rect">
+            <a:avLst/>
+          </a:prstGeom>
+          <a:noFill/>
+          <a:ln/>
+        </p:spPr>
+        <p:txBody>
+          <a:bodyPr wrap="square" lIns="0" tIns="0" rIns="0" bIns="0" rtlCol="0" anchor="ctr"/>
+          <a:lstStyle/>
+          <a:p>
+            <a:pPr indent="0" marL="0">
+              <a:buNone/>
+            </a:pPr>
+            <a:r>
+              <a:rPr lang="en-US" sz="1700" b="1" dirty="0">
+                <a:solidFill>
+                  <a:srgbClr val="16222F"/>
                 </a:solidFill>
                 <a:latin typeface="Cambria" pitchFamily="34" charset="0"/>
                 <a:ea typeface="Cambria" pitchFamily="34" charset="-122"/>
                 <a:cs typeface="Cambria" pitchFamily="34" charset="-120"/>
               </a:rPr>
-              <a:t>2</a:t>
-            </a:r>
-            <a:endParaRPr lang="en-US" sz="2600" dirty="0"/>
-          </a:p>
-        </p:txBody>
-      </p:sp>
-      <p:sp>
-        <p:nvSpPr>
-          <p:cNvPr id="10" name="Text 8"/>
-          <p:cNvSpPr txBox="1"/>
-          <p:nvPr/>
-        </p:nvSpPr>
-        <p:spPr>
-          <a:xfrm>
-            <a:off x="2578608" y="2249424"/>
-            <a:ext cx="1371600" cy="566928"/>
-          </a:xfrm>
-          <a:prstGeom prst="rect">
-            <a:avLst/>
-          </a:prstGeom>
-          <a:noFill/>
-          <a:ln/>
-        </p:spPr>
-        <p:txBody>
-          <a:bodyPr wrap="square" lIns="0" tIns="0" rIns="0" bIns="0" rtlCol="0" anchor="ctr"/>
-          <a:lstStyle/>
-          <a:p>
-            <a:pPr algn="ctr" indent="0" marL="0">
-              <a:lnSpc>
-                <a:spcPts val="1700"/>
-              </a:lnSpc>
-              <a:buNone/>
-            </a:pPr>
-            <a:r>
-              <a:rPr lang="en-US" sz="1250" b="1" dirty="0">
-                <a:solidFill>
-                  <a:srgbClr val="16222F"/>
-                </a:solidFill>
-                <a:latin typeface="Calibri" pitchFamily="34" charset="0"/>
-                <a:ea typeface="Calibri" pitchFamily="34" charset="-122"/>
-                <a:cs typeface="Calibri" pitchFamily="34" charset="-120"/>
-              </a:rPr>
-              <a:t>Regime detection</a:t>
-            </a:r>
-            <a:endParaRPr lang="en-US" sz="1250" dirty="0"/>
-          </a:p>
-        </p:txBody>
-      </p:sp>
-      <p:sp>
-        <p:nvSpPr>
-          <p:cNvPr id="11" name="Text 9"/>
-          <p:cNvSpPr txBox="1"/>
-          <p:nvPr/>
-        </p:nvSpPr>
-        <p:spPr>
-          <a:xfrm>
-            <a:off x="2578608" y="2852928"/>
-            <a:ext cx="1371600" cy="1051560"/>
-          </a:xfrm>
-          <a:prstGeom prst="rect">
-            <a:avLst/>
-          </a:prstGeom>
-          <a:noFill/>
-          <a:ln/>
-        </p:spPr>
-        <p:txBody>
-          <a:bodyPr wrap="square" lIns="0" tIns="0" rIns="0" bIns="0" rtlCol="0" anchor="ctr"/>
-          <a:lstStyle/>
-          <a:p>
-            <a:pPr algn="ctr" indent="0" marL="0">
+              <a:t>Plan infrastructure</a:t>
+            </a:r>
+            <a:endParaRPr lang="en-US" sz="1700" dirty="0"/>
+          </a:p>
+        </p:txBody>
+      </p:sp>
+      <p:sp>
+        <p:nvSpPr>
+          <p:cNvPr id="17" name="Text 15"/>
+          <p:cNvSpPr txBox="1"/>
+          <p:nvPr/>
+        </p:nvSpPr>
+        <p:spPr>
+          <a:xfrm>
+            <a:off x="3602736" y="2377440"/>
+            <a:ext cx="2048256" cy="530352"/>
+          </a:xfrm>
+          <a:prstGeom prst="rect">
+            <a:avLst/>
+          </a:prstGeom>
+          <a:noFill/>
+          <a:ln/>
+        </p:spPr>
+        <p:txBody>
+          <a:bodyPr wrap="square" lIns="0" tIns="0" rIns="0" bIns="0" rtlCol="0" anchor="ctr"/>
+          <a:lstStyle/>
+          <a:p>
+            <a:pPr indent="0" marL="0">
               <a:lnSpc>
                 <a:spcPts val="1500"/>
               </a:lnSpc>
               <a:buNone/>
             </a:pPr>
             <a:r>
-              <a:rPr lang="en-US" sz="1100" dirty="0">
+              <a:rPr lang="en-US" sz="1150" dirty="0">
                 <a:solidFill>
                   <a:srgbClr val="5E6E7E"/>
                 </a:solidFill>
@@ -12834,7 +13358,46 @@
                 <a:ea typeface="Calibri" pitchFamily="34" charset="-122"/>
                 <a:cs typeface="Calibri" pitchFamily="34" charset="-120"/>
               </a:rPr>
-              <a:t>Recorded daily, consulted by nothing yet</a:t>
+              <a:t>Plans exist, but drive nothing yet</a:t>
+            </a:r>
+            <a:endParaRPr lang="en-US" sz="1150" dirty="0"/>
+          </a:p>
+        </p:txBody>
+      </p:sp>
+      <p:sp>
+        <p:nvSpPr>
+          <p:cNvPr id="18" name="Text 16"/>
+          <p:cNvSpPr txBox="1"/>
+          <p:nvPr/>
+        </p:nvSpPr>
+        <p:spPr>
+          <a:xfrm>
+            <a:off x="3602736" y="2999232"/>
+            <a:ext cx="658368" cy="219456"/>
+          </a:xfrm>
+          <a:prstGeom prst="rect">
+            <a:avLst/>
+          </a:prstGeom>
+          <a:noFill/>
+          <a:ln/>
+        </p:spPr>
+        <p:txBody>
+          <a:bodyPr wrap="square" lIns="0" tIns="0" rIns="0" bIns="0" rtlCol="0" anchor="ctr"/>
+          <a:lstStyle/>
+          <a:p>
+            <a:pPr indent="0" marL="0">
+              <a:buNone/>
+            </a:pPr>
+            <a:r>
+              <a:rPr lang="en-US" sz="1100" b="1" dirty="0">
+                <a:solidFill>
+                  <a:srgbClr val="028090"/>
+                </a:solidFill>
+                <a:latin typeface="Courier New" pitchFamily="34" charset="0"/>
+                <a:ea typeface="Courier New" pitchFamily="34" charset="-122"/>
+                <a:cs typeface="Courier New" pitchFamily="34" charset="-120"/>
+              </a:rPr>
+              <a:t>#134</a:t>
             </a:r>
             <a:endParaRPr lang="en-US" sz="1100" dirty="0"/>
           </a:p>
@@ -12842,18 +13405,450 @@
       </p:sp>
       <p:sp>
         <p:nvSpPr>
-          <p:cNvPr id="12" name="Shape 10"/>
+          <p:cNvPr id="19" name="Text 17"/>
+          <p:cNvSpPr txBox="1"/>
+          <p:nvPr/>
+        </p:nvSpPr>
+        <p:spPr>
+          <a:xfrm>
+            <a:off x="4279392" y="2980944"/>
+            <a:ext cx="1371600" cy="420624"/>
+          </a:xfrm>
+          <a:prstGeom prst="rect">
+            <a:avLst/>
+          </a:prstGeom>
+          <a:noFill/>
+          <a:ln/>
+        </p:spPr>
+        <p:txBody>
+          <a:bodyPr wrap="square" lIns="0" tIns="0" rIns="0" bIns="0" rtlCol="0" anchor="ctr"/>
+          <a:lstStyle/>
+          <a:p>
+            <a:pPr indent="0" marL="0">
+              <a:lnSpc>
+                <a:spcPts val="1300"/>
+              </a:lnSpc>
+              <a:buNone/>
+            </a:pPr>
+            <a:r>
+              <a:rPr lang="en-US" sz="1050" dirty="0">
+                <a:solidFill>
+                  <a:srgbClr val="16222F"/>
+                </a:solidFill>
+                <a:latin typeface="Calibri" pitchFamily="34" charset="0"/>
+                <a:ea typeface="Calibri" pitchFamily="34" charset="-122"/>
+                <a:cs typeface="Calibri" pitchFamily="34" charset="-120"/>
+              </a:rPr>
+              <a:t>Strategic plans and tranched execution</a:t>
+            </a:r>
+            <a:endParaRPr lang="en-US" sz="1050" dirty="0"/>
+          </a:p>
+        </p:txBody>
+      </p:sp>
+      <p:sp>
+        <p:nvSpPr>
+          <p:cNvPr id="20" name="Text 18"/>
+          <p:cNvSpPr txBox="1"/>
+          <p:nvPr/>
+        </p:nvSpPr>
+        <p:spPr>
+          <a:xfrm>
+            <a:off x="3602736" y="3456432"/>
+            <a:ext cx="658368" cy="219456"/>
+          </a:xfrm>
+          <a:prstGeom prst="rect">
+            <a:avLst/>
+          </a:prstGeom>
+          <a:noFill/>
+          <a:ln/>
+        </p:spPr>
+        <p:txBody>
+          <a:bodyPr wrap="square" lIns="0" tIns="0" rIns="0" bIns="0" rtlCol="0" anchor="ctr"/>
+          <a:lstStyle/>
+          <a:p>
+            <a:pPr indent="0" marL="0">
+              <a:buNone/>
+            </a:pPr>
+            <a:r>
+              <a:rPr lang="en-US" sz="1100" b="1" dirty="0">
+                <a:solidFill>
+                  <a:srgbClr val="028090"/>
+                </a:solidFill>
+                <a:latin typeface="Courier New" pitchFamily="34" charset="0"/>
+                <a:ea typeface="Courier New" pitchFamily="34" charset="-122"/>
+                <a:cs typeface="Courier New" pitchFamily="34" charset="-120"/>
+              </a:rPr>
+              <a:t>#138</a:t>
+            </a:r>
+            <a:endParaRPr lang="en-US" sz="1100" dirty="0"/>
+          </a:p>
+        </p:txBody>
+      </p:sp>
+      <p:sp>
+        <p:nvSpPr>
+          <p:cNvPr id="21" name="Text 19"/>
+          <p:cNvSpPr txBox="1"/>
+          <p:nvPr/>
+        </p:nvSpPr>
+        <p:spPr>
+          <a:xfrm>
+            <a:off x="4279392" y="3438144"/>
+            <a:ext cx="1371600" cy="420624"/>
+          </a:xfrm>
+          <a:prstGeom prst="rect">
+            <a:avLst/>
+          </a:prstGeom>
+          <a:noFill/>
+          <a:ln/>
+        </p:spPr>
+        <p:txBody>
+          <a:bodyPr wrap="square" lIns="0" tIns="0" rIns="0" bIns="0" rtlCol="0" anchor="ctr"/>
+          <a:lstStyle/>
+          <a:p>
+            <a:pPr indent="0" marL="0">
+              <a:lnSpc>
+                <a:spcPts val="1300"/>
+              </a:lnSpc>
+              <a:buNone/>
+            </a:pPr>
+            <a:r>
+              <a:rPr lang="en-US" sz="1050" dirty="0">
+                <a:solidFill>
+                  <a:srgbClr val="16222F"/>
+                </a:solidFill>
+                <a:latin typeface="Calibri" pitchFamily="34" charset="0"/>
+                <a:ea typeface="Calibri" pitchFamily="34" charset="-122"/>
+                <a:cs typeface="Calibri" pitchFamily="34" charset="-120"/>
+              </a:rPr>
+              <a:t>Chunky stocks, hysteresis, partial fills</a:t>
+            </a:r>
+            <a:endParaRPr lang="en-US" sz="1050" dirty="0"/>
+          </a:p>
+        </p:txBody>
+      </p:sp>
+      <p:sp>
+        <p:nvSpPr>
+          <p:cNvPr id="22" name="Shape 20"/>
           <p:cNvSpPr/>
           <p:nvPr/>
         </p:nvSpPr>
         <p:spPr>
           <a:xfrm>
-            <a:off x="4261104" y="1536192"/>
-            <a:ext cx="1700784" cy="2514600"/>
+            <a:off x="6126480" y="1463040"/>
+            <a:ext cx="2560320" cy="3017520"/>
           </a:xfrm>
           <a:prstGeom prst="roundRect">
             <a:avLst>
-              <a:gd name="adj" fmla="val 3226"/>
+              <a:gd name="adj" fmla="val 2143"/>
+            </a:avLst>
+          </a:prstGeom>
+          <a:solidFill>
+            <a:srgbClr val="0F1B2D"/>
+          </a:solidFill>
+          <a:ln w="12700">
+            <a:solidFill>
+              <a:srgbClr val="0F1B2D"/>
+            </a:solidFill>
+            <a:prstDash val="solid"/>
+          </a:ln>
+        </p:spPr>
+      </p:sp>
+      <p:sp>
+        <p:nvSpPr>
+          <p:cNvPr id="23" name="Text 21"/>
+          <p:cNvSpPr txBox="1"/>
+          <p:nvPr/>
+        </p:nvSpPr>
+        <p:spPr>
+          <a:xfrm>
+            <a:off x="6382512" y="1664208"/>
+            <a:ext cx="2048256" cy="237744"/>
+          </a:xfrm>
+          <a:prstGeom prst="rect">
+            <a:avLst/>
+          </a:prstGeom>
+          <a:noFill/>
+          <a:ln/>
+        </p:spPr>
+        <p:txBody>
+          <a:bodyPr wrap="square" lIns="0" tIns="0" rIns="0" bIns="0" rtlCol="0" anchor="ctr"/>
+          <a:lstStyle/>
+          <a:p>
+            <a:pPr indent="0" marL="0">
+              <a:buNone/>
+            </a:pPr>
+            <a:r>
+              <a:rPr lang="en-US" sz="1000" b="1" spc="160" kern="0" dirty="0">
+                <a:solidFill>
+                  <a:srgbClr val="02C39A"/>
+                </a:solidFill>
+                <a:latin typeface="Calibri" pitchFamily="34" charset="0"/>
+                <a:ea typeface="Calibri" pitchFamily="34" charset="-122"/>
+                <a:cs typeface="Calibri" pitchFamily="34" charset="-120"/>
+              </a:rPr>
+              <a:t>PHASE 3</a:t>
+            </a:r>
+            <a:endParaRPr lang="en-US" sz="1000" dirty="0"/>
+          </a:p>
+        </p:txBody>
+      </p:sp>
+      <p:sp>
+        <p:nvSpPr>
+          <p:cNvPr id="24" name="Text 22"/>
+          <p:cNvSpPr txBox="1"/>
+          <p:nvPr/>
+        </p:nvSpPr>
+        <p:spPr>
+          <a:xfrm>
+            <a:off x="6382512" y="1920240"/>
+            <a:ext cx="2048256" cy="420624"/>
+          </a:xfrm>
+          <a:prstGeom prst="rect">
+            <a:avLst/>
+          </a:prstGeom>
+          <a:noFill/>
+          <a:ln/>
+        </p:spPr>
+        <p:txBody>
+          <a:bodyPr wrap="square" lIns="0" tIns="0" rIns="0" bIns="0" rtlCol="0" anchor="ctr"/>
+          <a:lstStyle/>
+          <a:p>
+            <a:pPr indent="0" marL="0">
+              <a:buNone/>
+            </a:pPr>
+            <a:r>
+              <a:rPr lang="en-US" sz="1700" b="1" dirty="0">
+                <a:solidFill>
+                  <a:srgbClr val="FFFFFF"/>
+                </a:solidFill>
+                <a:latin typeface="Cambria" pitchFamily="34" charset="0"/>
+                <a:ea typeface="Cambria" pitchFamily="34" charset="-122"/>
+                <a:cs typeface="Cambria" pitchFamily="34" charset="-120"/>
+              </a:rPr>
+              <a:t>Cut over</a:t>
+            </a:r>
+            <a:endParaRPr lang="en-US" sz="1700" dirty="0"/>
+          </a:p>
+        </p:txBody>
+      </p:sp>
+      <p:sp>
+        <p:nvSpPr>
+          <p:cNvPr id="25" name="Text 23"/>
+          <p:cNvSpPr txBox="1"/>
+          <p:nvPr/>
+        </p:nvSpPr>
+        <p:spPr>
+          <a:xfrm>
+            <a:off x="6382512" y="2377440"/>
+            <a:ext cx="2048256" cy="530352"/>
+          </a:xfrm>
+          <a:prstGeom prst="rect">
+            <a:avLst/>
+          </a:prstGeom>
+          <a:noFill/>
+          <a:ln/>
+        </p:spPr>
+        <p:txBody>
+          <a:bodyPr wrap="square" lIns="0" tIns="0" rIns="0" bIns="0" rtlCol="0" anchor="ctr"/>
+          <a:lstStyle/>
+          <a:p>
+            <a:pPr indent="0" marL="0">
+              <a:lnSpc>
+                <a:spcPts val="1500"/>
+              </a:lnSpc>
+              <a:buNone/>
+            </a:pPr>
+            <a:r>
+              <a:rPr lang="en-US" sz="1150" dirty="0">
+                <a:solidFill>
+                  <a:srgbClr val="9FB3C8"/>
+                </a:solidFill>
+                <a:latin typeface="Calibri" pitchFamily="34" charset="0"/>
+                <a:ea typeface="Calibri" pitchFamily="34" charset="-122"/>
+                <a:cs typeface="Calibri" pitchFamily="34" charset="-120"/>
+              </a:rPr>
+              <a:t>The reactive cycle steps aside</a:t>
+            </a:r>
+            <a:endParaRPr lang="en-US" sz="1150" dirty="0"/>
+          </a:p>
+        </p:txBody>
+      </p:sp>
+      <p:sp>
+        <p:nvSpPr>
+          <p:cNvPr id="26" name="Text 24"/>
+          <p:cNvSpPr txBox="1"/>
+          <p:nvPr/>
+        </p:nvSpPr>
+        <p:spPr>
+          <a:xfrm>
+            <a:off x="6382512" y="2999232"/>
+            <a:ext cx="658368" cy="219456"/>
+          </a:xfrm>
+          <a:prstGeom prst="rect">
+            <a:avLst/>
+          </a:prstGeom>
+          <a:noFill/>
+          <a:ln/>
+        </p:spPr>
+        <p:txBody>
+          <a:bodyPr wrap="square" lIns="0" tIns="0" rIns="0" bIns="0" rtlCol="0" anchor="ctr"/>
+          <a:lstStyle/>
+          <a:p>
+            <a:pPr indent="0" marL="0">
+              <a:buNone/>
+            </a:pPr>
+            <a:r>
+              <a:rPr lang="en-US" sz="1100" b="1" dirty="0">
+                <a:solidFill>
+                  <a:srgbClr val="02C39A"/>
+                </a:solidFill>
+                <a:latin typeface="Courier New" pitchFamily="34" charset="0"/>
+                <a:ea typeface="Courier New" pitchFamily="34" charset="-122"/>
+                <a:cs typeface="Courier New" pitchFamily="34" charset="-120"/>
+              </a:rPr>
+              <a:t>#135</a:t>
+            </a:r>
+            <a:endParaRPr lang="en-US" sz="1100" dirty="0"/>
+          </a:p>
+        </p:txBody>
+      </p:sp>
+      <p:sp>
+        <p:nvSpPr>
+          <p:cNvPr id="27" name="Text 25"/>
+          <p:cNvSpPr txBox="1"/>
+          <p:nvPr/>
+        </p:nvSpPr>
+        <p:spPr>
+          <a:xfrm>
+            <a:off x="7059168" y="2980944"/>
+            <a:ext cx="1371600" cy="420624"/>
+          </a:xfrm>
+          <a:prstGeom prst="rect">
+            <a:avLst/>
+          </a:prstGeom>
+          <a:noFill/>
+          <a:ln/>
+        </p:spPr>
+        <p:txBody>
+          <a:bodyPr wrap="square" lIns="0" tIns="0" rIns="0" bIns="0" rtlCol="0" anchor="ctr"/>
+          <a:lstStyle/>
+          <a:p>
+            <a:pPr indent="0" marL="0">
+              <a:lnSpc>
+                <a:spcPts val="1300"/>
+              </a:lnSpc>
+              <a:buNone/>
+            </a:pPr>
+            <a:r>
+              <a:rPr lang="en-US" sz="1050" dirty="0">
+                <a:solidFill>
+                  <a:srgbClr val="CADCFC"/>
+                </a:solidFill>
+                <a:latin typeface="Calibri" pitchFamily="34" charset="0"/>
+                <a:ea typeface="Calibri" pitchFamily="34" charset="-122"/>
+                <a:cs typeface="Calibri" pitchFamily="34" charset="-120"/>
+              </a:rPr>
+              <a:t>Refactor trading cycle to plan-driven</a:t>
+            </a:r>
+            <a:endParaRPr lang="en-US" sz="1050" dirty="0"/>
+          </a:p>
+        </p:txBody>
+      </p:sp>
+      <p:sp>
+        <p:nvSpPr>
+          <p:cNvPr id="28" name="Text 26"/>
+          <p:cNvSpPr txBox="1"/>
+          <p:nvPr/>
+        </p:nvSpPr>
+        <p:spPr>
+          <a:xfrm>
+            <a:off x="6382512" y="3456432"/>
+            <a:ext cx="658368" cy="219456"/>
+          </a:xfrm>
+          <a:prstGeom prst="rect">
+            <a:avLst/>
+          </a:prstGeom>
+          <a:noFill/>
+          <a:ln/>
+        </p:spPr>
+        <p:txBody>
+          <a:bodyPr wrap="square" lIns="0" tIns="0" rIns="0" bIns="0" rtlCol="0" anchor="ctr"/>
+          <a:lstStyle/>
+          <a:p>
+            <a:pPr indent="0" marL="0">
+              <a:buNone/>
+            </a:pPr>
+            <a:r>
+              <a:rPr lang="en-US" sz="1100" b="1" dirty="0">
+                <a:solidFill>
+                  <a:srgbClr val="02C39A"/>
+                </a:solidFill>
+                <a:latin typeface="Courier New" pitchFamily="34" charset="0"/>
+                <a:ea typeface="Courier New" pitchFamily="34" charset="-122"/>
+                <a:cs typeface="Courier New" pitchFamily="34" charset="-120"/>
+              </a:rPr>
+              <a:t>#139</a:t>
+            </a:r>
+            <a:endParaRPr lang="en-US" sz="1100" dirty="0"/>
+          </a:p>
+        </p:txBody>
+      </p:sp>
+      <p:sp>
+        <p:nvSpPr>
+          <p:cNvPr id="29" name="Text 27"/>
+          <p:cNvSpPr txBox="1"/>
+          <p:nvPr/>
+        </p:nvSpPr>
+        <p:spPr>
+          <a:xfrm>
+            <a:off x="7059168" y="3438144"/>
+            <a:ext cx="1371600" cy="420624"/>
+          </a:xfrm>
+          <a:prstGeom prst="rect">
+            <a:avLst/>
+          </a:prstGeom>
+          <a:noFill/>
+          <a:ln/>
+        </p:spPr>
+        <p:txBody>
+          <a:bodyPr wrap="square" lIns="0" tIns="0" rIns="0" bIns="0" rtlCol="0" anchor="ctr"/>
+          <a:lstStyle/>
+          <a:p>
+            <a:pPr indent="0" marL="0">
+              <a:lnSpc>
+                <a:spcPts val="1300"/>
+              </a:lnSpc>
+              <a:buNone/>
+            </a:pPr>
+            <a:r>
+              <a:rPr lang="en-US" sz="1050" dirty="0">
+                <a:solidFill>
+                  <a:srgbClr val="CADCFC"/>
+                </a:solidFill>
+                <a:latin typeface="Calibri" pitchFamily="34" charset="0"/>
+                <a:ea typeface="Calibri" pitchFamily="34" charset="-122"/>
+                <a:cs typeface="Calibri" pitchFamily="34" charset="-120"/>
+              </a:rPr>
+              <a:t>Decay, regime delay, sector caps, alerts</a:t>
+            </a:r>
+            <a:endParaRPr lang="en-US" sz="1050" dirty="0"/>
+          </a:p>
+        </p:txBody>
+      </p:sp>
+      <p:sp>
+        <p:nvSpPr>
+          <p:cNvPr id="30" name="Shape 28"/>
+          <p:cNvSpPr/>
+          <p:nvPr/>
+        </p:nvSpPr>
+        <p:spPr>
+          <a:xfrm>
+            <a:off x="8906256" y="1463040"/>
+            <a:ext cx="2560320" cy="3017520"/>
+          </a:xfrm>
+          <a:prstGeom prst="roundRect">
+            <a:avLst>
+              <a:gd name="adj" fmla="val 2143"/>
             </a:avLst>
           </a:prstGeom>
           <a:solidFill>
@@ -12869,114 +13864,111 @@
       </p:sp>
       <p:sp>
         <p:nvSpPr>
-          <p:cNvPr id="13" name="Text 11"/>
-          <p:cNvSpPr txBox="1"/>
-          <p:nvPr/>
-        </p:nvSpPr>
-        <p:spPr>
-          <a:xfrm>
-            <a:off x="4261104" y="1737360"/>
-            <a:ext cx="1700784" cy="457200"/>
-          </a:xfrm>
-          <a:prstGeom prst="rect">
-            <a:avLst/>
-          </a:prstGeom>
-          <a:noFill/>
-          <a:ln/>
-        </p:spPr>
-        <p:txBody>
-          <a:bodyPr wrap="square" lIns="0" tIns="0" rIns="0" bIns="0" rtlCol="0" anchor="ctr"/>
-          <a:lstStyle/>
-          <a:p>
-            <a:pPr algn="ctr" indent="0" marL="0">
-              <a:buNone/>
-            </a:pPr>
-            <a:r>
-              <a:rPr lang="en-US" sz="2600" b="1" dirty="0">
+          <p:cNvPr id="31" name="Text 29"/>
+          <p:cNvSpPr txBox="1"/>
+          <p:nvPr/>
+        </p:nvSpPr>
+        <p:spPr>
+          <a:xfrm>
+            <a:off x="9162288" y="1664208"/>
+            <a:ext cx="2048256" cy="237744"/>
+          </a:xfrm>
+          <a:prstGeom prst="rect">
+            <a:avLst/>
+          </a:prstGeom>
+          <a:noFill/>
+          <a:ln/>
+        </p:spPr>
+        <p:txBody>
+          <a:bodyPr wrap="square" lIns="0" tIns="0" rIns="0" bIns="0" rtlCol="0" anchor="ctr"/>
+          <a:lstStyle/>
+          <a:p>
+            <a:pPr indent="0" marL="0">
+              <a:buNone/>
+            </a:pPr>
+            <a:r>
+              <a:rPr lang="en-US" sz="1000" b="1" spc="160" kern="0" dirty="0">
                 <a:solidFill>
                   <a:srgbClr val="028090"/>
+                </a:solidFill>
+                <a:latin typeface="Calibri" pitchFamily="34" charset="0"/>
+                <a:ea typeface="Calibri" pitchFamily="34" charset="-122"/>
+                <a:cs typeface="Calibri" pitchFamily="34" charset="-120"/>
+              </a:rPr>
+              <a:t>PHASE 4</a:t>
+            </a:r>
+            <a:endParaRPr lang="en-US" sz="1000" dirty="0"/>
+          </a:p>
+        </p:txBody>
+      </p:sp>
+      <p:sp>
+        <p:nvSpPr>
+          <p:cNvPr id="32" name="Text 30"/>
+          <p:cNvSpPr txBox="1"/>
+          <p:nvPr/>
+        </p:nvSpPr>
+        <p:spPr>
+          <a:xfrm>
+            <a:off x="9162288" y="1920240"/>
+            <a:ext cx="2048256" cy="420624"/>
+          </a:xfrm>
+          <a:prstGeom prst="rect">
+            <a:avLst/>
+          </a:prstGeom>
+          <a:noFill/>
+          <a:ln/>
+        </p:spPr>
+        <p:txBody>
+          <a:bodyPr wrap="square" lIns="0" tIns="0" rIns="0" bIns="0" rtlCol="0" anchor="ctr"/>
+          <a:lstStyle/>
+          <a:p>
+            <a:pPr indent="0" marL="0">
+              <a:buNone/>
+            </a:pPr>
+            <a:r>
+              <a:rPr lang="en-US" sz="1700" b="1" dirty="0">
+                <a:solidFill>
+                  <a:srgbClr val="16222F"/>
                 </a:solidFill>
                 <a:latin typeface="Cambria" pitchFamily="34" charset="0"/>
                 <a:ea typeface="Cambria" pitchFamily="34" charset="-122"/>
                 <a:cs typeface="Cambria" pitchFamily="34" charset="-120"/>
               </a:rPr>
-              <a:t>3</a:t>
-            </a:r>
-            <a:endParaRPr lang="en-US" sz="2600" dirty="0"/>
-          </a:p>
-        </p:txBody>
-      </p:sp>
-      <p:sp>
-        <p:nvSpPr>
-          <p:cNvPr id="14" name="Text 12"/>
-          <p:cNvSpPr txBox="1"/>
-          <p:nvPr/>
-        </p:nvSpPr>
-        <p:spPr>
-          <a:xfrm>
-            <a:off x="4425696" y="2249424"/>
-            <a:ext cx="1371600" cy="566928"/>
-          </a:xfrm>
-          <a:prstGeom prst="rect">
-            <a:avLst/>
-          </a:prstGeom>
-          <a:noFill/>
-          <a:ln/>
-        </p:spPr>
-        <p:txBody>
-          <a:bodyPr wrap="square" lIns="0" tIns="0" rIns="0" bIns="0" rtlCol="0" anchor="ctr"/>
-          <a:lstStyle/>
-          <a:p>
-            <a:pPr algn="ctr" indent="0" marL="0">
-              <a:lnSpc>
-                <a:spcPts val="1700"/>
-              </a:lnSpc>
-              <a:buNone/>
-            </a:pPr>
-            <a:r>
-              <a:rPr lang="en-US" sz="1250" b="1" dirty="0">
-                <a:solidFill>
-                  <a:srgbClr val="16222F"/>
-                </a:solidFill>
-                <a:latin typeface="Calibri" pitchFamily="34" charset="0"/>
-                <a:ea typeface="Calibri" pitchFamily="34" charset="-122"/>
-                <a:cs typeface="Calibri" pitchFamily="34" charset="-120"/>
-              </a:rPr>
-              <a:t>Strategic plans</a:t>
-            </a:r>
-            <a:endParaRPr lang="en-US" sz="1250" dirty="0"/>
-          </a:p>
-        </p:txBody>
-      </p:sp>
-      <p:sp>
-        <p:nvSpPr>
-          <p:cNvPr id="15" name="Text 13"/>
-          <p:cNvSpPr txBox="1"/>
-          <p:nvPr/>
-        </p:nvSpPr>
-        <p:spPr>
-          <a:xfrm>
-            <a:off x="4425696" y="2852928"/>
-            <a:ext cx="1371600" cy="1051560"/>
-          </a:xfrm>
-          <a:prstGeom prst="rect">
-            <a:avLst/>
-          </a:prstGeom>
-          <a:noFill/>
-          <a:ln/>
-        </p:spPr>
-        <p:txBody>
-          <a:bodyPr wrap="square" lIns="0" tIns="0" rIns="0" bIns="0" rtlCol="0" anchor="ctr"/>
-          <a:lstStyle/>
-          <a:p>
-            <a:pPr algn="ctr" indent="0" marL="0">
+              <a:t>Visibility</a:t>
+            </a:r>
+            <a:endParaRPr lang="en-US" sz="1700" dirty="0"/>
+          </a:p>
+        </p:txBody>
+      </p:sp>
+      <p:sp>
+        <p:nvSpPr>
+          <p:cNvPr id="33" name="Text 31"/>
+          <p:cNvSpPr txBox="1"/>
+          <p:nvPr/>
+        </p:nvSpPr>
+        <p:spPr>
+          <a:xfrm>
+            <a:off x="9162288" y="2377440"/>
+            <a:ext cx="2048256" cy="530352"/>
+          </a:xfrm>
+          <a:prstGeom prst="rect">
+            <a:avLst/>
+          </a:prstGeom>
+          <a:noFill/>
+          <a:ln/>
+        </p:spPr>
+        <p:txBody>
+          <a:bodyPr wrap="square" lIns="0" tIns="0" rIns="0" bIns="0" rtlCol="0" anchor="ctr"/>
+          <a:lstStyle/>
+          <a:p>
+            <a:pPr indent="0" marL="0">
               <a:lnSpc>
                 <a:spcPts val="1500"/>
               </a:lnSpc>
               <a:buNone/>
             </a:pPr>
             <a:r>
-              <a:rPr lang="en-US" sz="1100" dirty="0">
+              <a:rPr lang="en-US" sz="1150" dirty="0">
                 <a:solidFill>
                   <a:srgbClr val="5E6E7E"/>
                 </a:solidFill>
@@ -12984,7 +13976,46 @@
                 <a:ea typeface="Calibri" pitchFamily="34" charset="-122"/>
                 <a:cs typeface="Calibri" pitchFamily="34" charset="-120"/>
               </a:rPr>
-              <a:t>The plan and category layer exists but drives no trades</a:t>
+              <a:t>Make it inspectable and steerable</a:t>
+            </a:r>
+            <a:endParaRPr lang="en-US" sz="1150" dirty="0"/>
+          </a:p>
+        </p:txBody>
+      </p:sp>
+      <p:sp>
+        <p:nvSpPr>
+          <p:cNvPr id="34" name="Text 32"/>
+          <p:cNvSpPr txBox="1"/>
+          <p:nvPr/>
+        </p:nvSpPr>
+        <p:spPr>
+          <a:xfrm>
+            <a:off x="9162288" y="2999232"/>
+            <a:ext cx="658368" cy="219456"/>
+          </a:xfrm>
+          <a:prstGeom prst="rect">
+            <a:avLst/>
+          </a:prstGeom>
+          <a:noFill/>
+          <a:ln/>
+        </p:spPr>
+        <p:txBody>
+          <a:bodyPr wrap="square" lIns="0" tIns="0" rIns="0" bIns="0" rtlCol="0" anchor="ctr"/>
+          <a:lstStyle/>
+          <a:p>
+            <a:pPr indent="0" marL="0">
+              <a:buNone/>
+            </a:pPr>
+            <a:r>
+              <a:rPr lang="en-US" sz="1100" b="1" dirty="0">
+                <a:solidFill>
+                  <a:srgbClr val="028090"/>
+                </a:solidFill>
+                <a:latin typeface="Courier New" pitchFamily="34" charset="0"/>
+                <a:ea typeface="Courier New" pitchFamily="34" charset="-122"/>
+                <a:cs typeface="Courier New" pitchFamily="34" charset="-120"/>
+              </a:rPr>
+              <a:t>#145</a:t>
             </a:r>
             <a:endParaRPr lang="en-US" sz="1100" dirty="0"/>
           </a:p>
@@ -12992,18 +14023,249 @@
       </p:sp>
       <p:sp>
         <p:nvSpPr>
-          <p:cNvPr id="16" name="Shape 14"/>
+          <p:cNvPr id="35" name="Text 33"/>
+          <p:cNvSpPr txBox="1"/>
+          <p:nvPr/>
+        </p:nvSpPr>
+        <p:spPr>
+          <a:xfrm>
+            <a:off x="9838944" y="2980944"/>
+            <a:ext cx="1371600" cy="420624"/>
+          </a:xfrm>
+          <a:prstGeom prst="rect">
+            <a:avLst/>
+          </a:prstGeom>
+          <a:noFill/>
+          <a:ln/>
+        </p:spPr>
+        <p:txBody>
+          <a:bodyPr wrap="square" lIns="0" tIns="0" rIns="0" bIns="0" rtlCol="0" anchor="ctr"/>
+          <a:lstStyle/>
+          <a:p>
+            <a:pPr indent="0" marL="0">
+              <a:lnSpc>
+                <a:spcPts val="1300"/>
+              </a:lnSpc>
+              <a:buNone/>
+            </a:pPr>
+            <a:r>
+              <a:rPr lang="en-US" sz="1050" dirty="0">
+                <a:solidFill>
+                  <a:srgbClr val="16222F"/>
+                </a:solidFill>
+                <a:latin typeface="Calibri" pitchFamily="34" charset="0"/>
+                <a:ea typeface="Calibri" pitchFamily="34" charset="-122"/>
+                <a:cs typeface="Calibri" pitchFamily="34" charset="-120"/>
+              </a:rPr>
+              <a:t>Portfolio reset and manual trading</a:t>
+            </a:r>
+            <a:endParaRPr lang="en-US" sz="1050" dirty="0"/>
+          </a:p>
+        </p:txBody>
+      </p:sp>
+      <p:sp>
+        <p:nvSpPr>
+          <p:cNvPr id="36" name="Text 34"/>
+          <p:cNvSpPr txBox="1"/>
+          <p:nvPr/>
+        </p:nvSpPr>
+        <p:spPr>
+          <a:xfrm>
+            <a:off x="9162288" y="3456432"/>
+            <a:ext cx="658368" cy="219456"/>
+          </a:xfrm>
+          <a:prstGeom prst="rect">
+            <a:avLst/>
+          </a:prstGeom>
+          <a:noFill/>
+          <a:ln/>
+        </p:spPr>
+        <p:txBody>
+          <a:bodyPr wrap="square" lIns="0" tIns="0" rIns="0" bIns="0" rtlCol="0" anchor="ctr"/>
+          <a:lstStyle/>
+          <a:p>
+            <a:pPr indent="0" marL="0">
+              <a:buNone/>
+            </a:pPr>
+            <a:r>
+              <a:rPr lang="en-US" sz="1100" b="1" dirty="0">
+                <a:solidFill>
+                  <a:srgbClr val="028090"/>
+                </a:solidFill>
+                <a:latin typeface="Courier New" pitchFamily="34" charset="0"/>
+                <a:ea typeface="Courier New" pitchFamily="34" charset="-122"/>
+                <a:cs typeface="Courier New" pitchFamily="34" charset="-120"/>
+              </a:rPr>
+              <a:t>#137</a:t>
+            </a:r>
+            <a:endParaRPr lang="en-US" sz="1100" dirty="0"/>
+          </a:p>
+        </p:txBody>
+      </p:sp>
+      <p:sp>
+        <p:nvSpPr>
+          <p:cNvPr id="37" name="Text 35"/>
+          <p:cNvSpPr txBox="1"/>
+          <p:nvPr/>
+        </p:nvSpPr>
+        <p:spPr>
+          <a:xfrm>
+            <a:off x="9838944" y="3438144"/>
+            <a:ext cx="1371600" cy="420624"/>
+          </a:xfrm>
+          <a:prstGeom prst="rect">
+            <a:avLst/>
+          </a:prstGeom>
+          <a:noFill/>
+          <a:ln/>
+        </p:spPr>
+        <p:txBody>
+          <a:bodyPr wrap="square" lIns="0" tIns="0" rIns="0" bIns="0" rtlCol="0" anchor="ctr"/>
+          <a:lstStyle/>
+          <a:p>
+            <a:pPr indent="0" marL="0">
+              <a:lnSpc>
+                <a:spcPts val="1300"/>
+              </a:lnSpc>
+              <a:buNone/>
+            </a:pPr>
+            <a:r>
+              <a:rPr lang="en-US" sz="1050" dirty="0">
+                <a:solidFill>
+                  <a:srgbClr val="16222F"/>
+                </a:solidFill>
+                <a:latin typeface="Calibri" pitchFamily="34" charset="0"/>
+                <a:ea typeface="Calibri" pitchFamily="34" charset="-122"/>
+                <a:cs typeface="Calibri" pitchFamily="34" charset="-120"/>
+              </a:rPr>
+              <a:t>Strategic plans UI</a:t>
+            </a:r>
+            <a:endParaRPr lang="en-US" sz="1050" dirty="0"/>
+          </a:p>
+        </p:txBody>
+      </p:sp>
+      <p:sp>
+        <p:nvSpPr>
+          <p:cNvPr id="38" name="Shape 36"/>
           <p:cNvSpPr/>
           <p:nvPr/>
         </p:nvSpPr>
         <p:spPr>
           <a:xfrm>
-            <a:off x="6108192" y="1536192"/>
-            <a:ext cx="1700784" cy="2514600"/>
+            <a:off x="566928" y="4663440"/>
+            <a:ext cx="5394960" cy="1463040"/>
           </a:xfrm>
           <a:prstGeom prst="roundRect">
             <a:avLst>
-              <a:gd name="adj" fmla="val 3226"/>
+              <a:gd name="adj" fmla="val 3750"/>
+            </a:avLst>
+          </a:prstGeom>
+          <a:solidFill>
+            <a:srgbClr val="E3F2EE"/>
+          </a:solidFill>
+          <a:ln w="12700">
+            <a:solidFill>
+              <a:srgbClr val="B9DED2"/>
+            </a:solidFill>
+            <a:prstDash val="solid"/>
+          </a:ln>
+        </p:spPr>
+      </p:sp>
+      <p:sp>
+        <p:nvSpPr>
+          <p:cNvPr id="39" name="Text 37"/>
+          <p:cNvSpPr txBox="1"/>
+          <p:nvPr/>
+        </p:nvSpPr>
+        <p:spPr>
+          <a:xfrm>
+            <a:off x="932688" y="4864608"/>
+            <a:ext cx="4663440" cy="292608"/>
+          </a:xfrm>
+          <a:prstGeom prst="rect">
+            <a:avLst/>
+          </a:prstGeom>
+          <a:noFill/>
+          <a:ln/>
+        </p:spPr>
+        <p:txBody>
+          <a:bodyPr wrap="square" lIns="0" tIns="0" rIns="0" bIns="0" rtlCol="0" anchor="ctr"/>
+          <a:lstStyle/>
+          <a:p>
+            <a:pPr indent="0" marL="0">
+              <a:buNone/>
+            </a:pPr>
+            <a:r>
+              <a:rPr lang="en-US" sz="1350" b="1" dirty="0">
+                <a:solidFill>
+                  <a:srgbClr val="028090"/>
+                </a:solidFill>
+                <a:latin typeface="Calibri" pitchFamily="34" charset="0"/>
+                <a:ea typeface="Calibri" pitchFamily="34" charset="-122"/>
+                <a:cs typeface="Calibri" pitchFamily="34" charset="-120"/>
+              </a:rPr>
+              <a:t>Additive until the cut over</a:t>
+            </a:r>
+            <a:endParaRPr lang="en-US" sz="1350" dirty="0"/>
+          </a:p>
+        </p:txBody>
+      </p:sp>
+      <p:sp>
+        <p:nvSpPr>
+          <p:cNvPr id="40" name="Text 38"/>
+          <p:cNvSpPr txBox="1"/>
+          <p:nvPr/>
+        </p:nvSpPr>
+        <p:spPr>
+          <a:xfrm>
+            <a:off x="932688" y="5193792"/>
+            <a:ext cx="4709160" cy="777240"/>
+          </a:xfrm>
+          <a:prstGeom prst="rect">
+            <a:avLst/>
+          </a:prstGeom>
+          <a:noFill/>
+          <a:ln/>
+        </p:spPr>
+        <p:txBody>
+          <a:bodyPr wrap="square" lIns="0" tIns="0" rIns="0" bIns="0" rtlCol="0" anchor="ctr"/>
+          <a:lstStyle/>
+          <a:p>
+            <a:pPr indent="0" marL="0">
+              <a:lnSpc>
+                <a:spcPts val="1800"/>
+              </a:lnSpc>
+              <a:buNone/>
+            </a:pPr>
+            <a:r>
+              <a:rPr lang="en-US" sz="1250" dirty="0">
+                <a:solidFill>
+                  <a:srgbClr val="16222F"/>
+                </a:solidFill>
+                <a:latin typeface="Calibri" pitchFamily="34" charset="0"/>
+                <a:ea typeface="Calibri" pitchFamily="34" charset="-122"/>
+                <a:cs typeface="Calibri" pitchFamily="34" charset="-120"/>
+              </a:rPr>
+              <a:t>Phases 1 and 2 add tables and jobs without changing how a single trade is decided. The existing daily cycle keeps running the whole time.</a:t>
+            </a:r>
+            <a:endParaRPr lang="en-US" sz="1250" dirty="0"/>
+          </a:p>
+        </p:txBody>
+      </p:sp>
+      <p:sp>
+        <p:nvSpPr>
+          <p:cNvPr id="41" name="Shape 39"/>
+          <p:cNvSpPr/>
+          <p:nvPr/>
+        </p:nvSpPr>
+        <p:spPr>
+          <a:xfrm>
+            <a:off x="6236208" y="4663440"/>
+            <a:ext cx="5394960" cy="1463040"/>
+          </a:xfrm>
+          <a:prstGeom prst="roundRect">
+            <a:avLst>
+              <a:gd name="adj" fmla="val 3750"/>
             </a:avLst>
           </a:prstGeom>
           <a:solidFill>
@@ -13019,80 +14281,80 @@
       </p:sp>
       <p:sp>
         <p:nvSpPr>
-          <p:cNvPr id="17" name="Text 15"/>
-          <p:cNvSpPr txBox="1"/>
-          <p:nvPr/>
-        </p:nvSpPr>
-        <p:spPr>
-          <a:xfrm>
-            <a:off x="6108192" y="1737360"/>
-            <a:ext cx="1700784" cy="457200"/>
-          </a:xfrm>
-          <a:prstGeom prst="rect">
-            <a:avLst/>
-          </a:prstGeom>
-          <a:noFill/>
-          <a:ln/>
-        </p:spPr>
-        <p:txBody>
-          <a:bodyPr wrap="square" lIns="0" tIns="0" rIns="0" bIns="0" rtlCol="0" anchor="ctr"/>
-          <a:lstStyle/>
-          <a:p>
-            <a:pPr algn="ctr" indent="0" marL="0">
-              <a:buNone/>
-            </a:pPr>
-            <a:r>
-              <a:rPr lang="en-US" sz="2600" b="1" dirty="0">
+          <p:cNvPr id="42" name="Text 40"/>
+          <p:cNvSpPr txBox="1"/>
+          <p:nvPr/>
+        </p:nvSpPr>
+        <p:spPr>
+          <a:xfrm>
+            <a:off x="6601968" y="4864608"/>
+            <a:ext cx="4663440" cy="292608"/>
+          </a:xfrm>
+          <a:prstGeom prst="rect">
+            <a:avLst/>
+          </a:prstGeom>
+          <a:noFill/>
+          <a:ln/>
+        </p:spPr>
+        <p:txBody>
+          <a:bodyPr wrap="square" lIns="0" tIns="0" rIns="0" bIns="0" rtlCol="0" anchor="ctr"/>
+          <a:lstStyle/>
+          <a:p>
+            <a:pPr indent="0" marL="0">
+              <a:buNone/>
+            </a:pPr>
+            <a:r>
+              <a:rPr lang="en-US" sz="1350" b="1" dirty="0">
                 <a:solidFill>
                   <a:srgbClr val="02C39A"/>
                 </a:solidFill>
-                <a:latin typeface="Cambria" pitchFamily="34" charset="0"/>
-                <a:ea typeface="Cambria" pitchFamily="34" charset="-122"/>
-                <a:cs typeface="Cambria" pitchFamily="34" charset="-120"/>
-              </a:rPr>
-              <a:t>4</a:t>
-            </a:r>
-            <a:endParaRPr lang="en-US" sz="2600" dirty="0"/>
-          </a:p>
-        </p:txBody>
-      </p:sp>
-      <p:sp>
-        <p:nvSpPr>
-          <p:cNvPr id="18" name="Text 16"/>
-          <p:cNvSpPr txBox="1"/>
-          <p:nvPr/>
-        </p:nvSpPr>
-        <p:spPr>
-          <a:xfrm>
-            <a:off x="6272784" y="2249424"/>
-            <a:ext cx="1371600" cy="566928"/>
-          </a:xfrm>
-          <a:prstGeom prst="rect">
-            <a:avLst/>
-          </a:prstGeom>
-          <a:noFill/>
-          <a:ln/>
-        </p:spPr>
-        <p:txBody>
-          <a:bodyPr wrap="square" lIns="0" tIns="0" rIns="0" bIns="0" rtlCol="0" anchor="ctr"/>
-          <a:lstStyle/>
-          <a:p>
-            <a:pPr algn="ctr" indent="0" marL="0">
+                <a:latin typeface="Calibri" pitchFamily="34" charset="0"/>
+                <a:ea typeface="Calibri" pitchFamily="34" charset="-122"/>
+                <a:cs typeface="Calibri" pitchFamily="34" charset="-120"/>
+              </a:rPr>
+              <a:t>The cut over is a setting, not a rewrite</a:t>
+            </a:r>
+            <a:endParaRPr lang="en-US" sz="1350" dirty="0"/>
+          </a:p>
+        </p:txBody>
+      </p:sp>
+      <p:sp>
+        <p:nvSpPr>
+          <p:cNvPr id="43" name="Text 41"/>
+          <p:cNvSpPr txBox="1"/>
+          <p:nvPr/>
+        </p:nvSpPr>
+        <p:spPr>
+          <a:xfrm>
+            <a:off x="6601968" y="5193792"/>
+            <a:ext cx="4709160" cy="475488"/>
+          </a:xfrm>
+          <a:prstGeom prst="rect">
+            <a:avLst/>
+          </a:prstGeom>
+          <a:noFill/>
+          <a:ln/>
+        </p:spPr>
+        <p:txBody>
+          <a:bodyPr wrap="square" lIns="0" tIns="0" rIns="0" bIns="0" rtlCol="0" anchor="ctr"/>
+          <a:lstStyle/>
+          <a:p>
+            <a:pPr indent="0" marL="0">
               <a:lnSpc>
                 <a:spcPts val="1700"/>
               </a:lnSpc>
               <a:buNone/>
             </a:pPr>
             <a:r>
-              <a:rPr lang="en-US" sz="1250" b="1" dirty="0">
-                <a:solidFill>
-                  <a:srgbClr val="FFFFFF"/>
-                </a:solidFill>
-                <a:latin typeface="Calibri" pitchFamily="34" charset="0"/>
-                <a:ea typeface="Calibri" pitchFamily="34" charset="-122"/>
-                <a:cs typeface="Calibri" pitchFamily="34" charset="-120"/>
-              </a:rPr>
-              <a:t>Plan-driven cycle</a:t>
+              <a:rPr lang="en-US" sz="1250" dirty="0">
+                <a:solidFill>
+                  <a:srgbClr val="9FB3C8"/>
+                </a:solidFill>
+                <a:latin typeface="Calibri" pitchFamily="34" charset="0"/>
+                <a:ea typeface="Calibri" pitchFamily="34" charset="-122"/>
+                <a:cs typeface="Calibri" pitchFamily="34" charset="-120"/>
+              </a:rPr>
+              <a:t>Turn execution.enabled on and the old trading cycle is skipped automatically. The scheduler says so out loud:</a:t>
             </a:r>
             <a:endParaRPr lang="en-US" sz="1250" dirty="0"/>
           </a:p>
@@ -13100,608 +14362,40 @@
       </p:sp>
       <p:sp>
         <p:nvSpPr>
-          <p:cNvPr id="19" name="Text 17"/>
-          <p:cNvSpPr txBox="1"/>
-          <p:nvPr/>
-        </p:nvSpPr>
-        <p:spPr>
-          <a:xfrm>
-            <a:off x="6272784" y="2852928"/>
-            <a:ext cx="1371600" cy="1051560"/>
-          </a:xfrm>
-          <a:prstGeom prst="rect">
-            <a:avLst/>
-          </a:prstGeom>
-          <a:noFill/>
-          <a:ln/>
-        </p:spPr>
-        <p:txBody>
-          <a:bodyPr wrap="square" lIns="0" tIns="0" rIns="0" bIns="0" rtlCol="0" anchor="ctr"/>
-          <a:lstStyle/>
-          <a:p>
-            <a:pPr algn="ctr" indent="0" marL="0">
-              <a:lnSpc>
-                <a:spcPts val="1500"/>
-              </a:lnSpc>
+          <p:cNvPr id="44" name="Text 42"/>
+          <p:cNvSpPr txBox="1"/>
+          <p:nvPr/>
+        </p:nvSpPr>
+        <p:spPr>
+          <a:xfrm>
+            <a:off x="6601968" y="5687568"/>
+            <a:ext cx="4709160" cy="274320"/>
+          </a:xfrm>
+          <a:prstGeom prst="rect">
+            <a:avLst/>
+          </a:prstGeom>
+          <a:noFill/>
+          <a:ln/>
+        </p:spPr>
+        <p:txBody>
+          <a:bodyPr wrap="square" lIns="0" tIns="0" rIns="0" bIns="0" rtlCol="0" anchor="ctr"/>
+          <a:lstStyle/>
+          <a:p>
+            <a:pPr indent="0" marL="0">
               <a:buNone/>
             </a:pPr>
             <a:r>
               <a:rPr lang="en-US" sz="1100" dirty="0">
                 <a:solidFill>
-                  <a:srgbClr val="9FB3C8"/>
-                </a:solidFill>
-                <a:latin typeface="Calibri" pitchFamily="34" charset="0"/>
-                <a:ea typeface="Calibri" pitchFamily="34" charset="-122"/>
-                <a:cs typeface="Calibri" pitchFamily="34" charset="-120"/>
-              </a:rPr>
-              <a:t>The trading cycle is refactored — this is the switch</a:t>
+                  <a:srgbClr val="CADCFC"/>
+                </a:solidFill>
+                <a:latin typeface="Courier New" pitchFamily="34" charset="0"/>
+                <a:ea typeface="Courier New" pitchFamily="34" charset="-122"/>
+                <a:cs typeface="Courier New" pitchFamily="34" charset="-120"/>
+              </a:rPr>
+              <a:t>Trading Cycle: disabled (strategic plans active)</a:t>
             </a:r>
             <a:endParaRPr lang="en-US" sz="1100" dirty="0"/>
-          </a:p>
-        </p:txBody>
-      </p:sp>
-      <p:sp>
-        <p:nvSpPr>
-          <p:cNvPr id="20" name="Shape 18"/>
-          <p:cNvSpPr/>
-          <p:nvPr/>
-        </p:nvSpPr>
-        <p:spPr>
-          <a:xfrm>
-            <a:off x="7955280" y="1536192"/>
-            <a:ext cx="1700784" cy="2514600"/>
-          </a:xfrm>
-          <a:prstGeom prst="roundRect">
-            <a:avLst>
-              <a:gd name="adj" fmla="val 3226"/>
-            </a:avLst>
-          </a:prstGeom>
-          <a:solidFill>
-            <a:srgbClr val="EEF4F7"/>
-          </a:solidFill>
-          <a:ln w="12700">
-            <a:solidFill>
-              <a:srgbClr val="C9DAE2"/>
-            </a:solidFill>
-            <a:prstDash val="solid"/>
-          </a:ln>
-        </p:spPr>
-      </p:sp>
-      <p:sp>
-        <p:nvSpPr>
-          <p:cNvPr id="21" name="Text 19"/>
-          <p:cNvSpPr txBox="1"/>
-          <p:nvPr/>
-        </p:nvSpPr>
-        <p:spPr>
-          <a:xfrm>
-            <a:off x="7955280" y="1737360"/>
-            <a:ext cx="1700784" cy="457200"/>
-          </a:xfrm>
-          <a:prstGeom prst="rect">
-            <a:avLst/>
-          </a:prstGeom>
-          <a:noFill/>
-          <a:ln/>
-        </p:spPr>
-        <p:txBody>
-          <a:bodyPr wrap="square" lIns="0" tIns="0" rIns="0" bIns="0" rtlCol="0" anchor="ctr"/>
-          <a:lstStyle/>
-          <a:p>
-            <a:pPr algn="ctr" indent="0" marL="0">
-              <a:buNone/>
-            </a:pPr>
-            <a:r>
-              <a:rPr lang="en-US" sz="2600" b="1" dirty="0">
-                <a:solidFill>
-                  <a:srgbClr val="028090"/>
-                </a:solidFill>
-                <a:latin typeface="Cambria" pitchFamily="34" charset="0"/>
-                <a:ea typeface="Cambria" pitchFamily="34" charset="-122"/>
-                <a:cs typeface="Cambria" pitchFamily="34" charset="-120"/>
-              </a:rPr>
-              <a:t>5</a:t>
-            </a:r>
-            <a:endParaRPr lang="en-US" sz="2600" dirty="0"/>
-          </a:p>
-        </p:txBody>
-      </p:sp>
-      <p:sp>
-        <p:nvSpPr>
-          <p:cNvPr id="22" name="Text 20"/>
-          <p:cNvSpPr txBox="1"/>
-          <p:nvPr/>
-        </p:nvSpPr>
-        <p:spPr>
-          <a:xfrm>
-            <a:off x="8119872" y="2249424"/>
-            <a:ext cx="1371600" cy="566928"/>
-          </a:xfrm>
-          <a:prstGeom prst="rect">
-            <a:avLst/>
-          </a:prstGeom>
-          <a:noFill/>
-          <a:ln/>
-        </p:spPr>
-        <p:txBody>
-          <a:bodyPr wrap="square" lIns="0" tIns="0" rIns="0" bIns="0" rtlCol="0" anchor="ctr"/>
-          <a:lstStyle/>
-          <a:p>
-            <a:pPr algn="ctr" indent="0" marL="0">
-              <a:lnSpc>
-                <a:spcPts val="1700"/>
-              </a:lnSpc>
-              <a:buNone/>
-            </a:pPr>
-            <a:r>
-              <a:rPr lang="en-US" sz="1250" b="1" dirty="0">
-                <a:solidFill>
-                  <a:srgbClr val="16222F"/>
-                </a:solidFill>
-                <a:latin typeface="Calibri" pitchFamily="34" charset="0"/>
-                <a:ea typeface="Calibri" pitchFamily="34" charset="-122"/>
-                <a:cs typeface="Calibri" pitchFamily="34" charset="-120"/>
-              </a:rPr>
-              <a:t>UI</a:t>
-            </a:r>
-            <a:endParaRPr lang="en-US" sz="1250" dirty="0"/>
-          </a:p>
-        </p:txBody>
-      </p:sp>
-      <p:sp>
-        <p:nvSpPr>
-          <p:cNvPr id="23" name="Text 21"/>
-          <p:cNvSpPr txBox="1"/>
-          <p:nvPr/>
-        </p:nvSpPr>
-        <p:spPr>
-          <a:xfrm>
-            <a:off x="8119872" y="2852928"/>
-            <a:ext cx="1371600" cy="1051560"/>
-          </a:xfrm>
-          <a:prstGeom prst="rect">
-            <a:avLst/>
-          </a:prstGeom>
-          <a:noFill/>
-          <a:ln/>
-        </p:spPr>
-        <p:txBody>
-          <a:bodyPr wrap="square" lIns="0" tIns="0" rIns="0" bIns="0" rtlCol="0" anchor="ctr"/>
-          <a:lstStyle/>
-          <a:p>
-            <a:pPr algn="ctr" indent="0" marL="0">
-              <a:lnSpc>
-                <a:spcPts val="1500"/>
-              </a:lnSpc>
-              <a:buNone/>
-            </a:pPr>
-            <a:r>
-              <a:rPr lang="en-US" sz="1100" dirty="0">
-                <a:solidFill>
-                  <a:srgbClr val="5E6E7E"/>
-                </a:solidFill>
-                <a:latin typeface="Calibri" pitchFamily="34" charset="0"/>
-                <a:ea typeface="Calibri" pitchFamily="34" charset="-122"/>
-                <a:cs typeface="Calibri" pitchFamily="34" charset="-120"/>
-              </a:rPr>
-              <a:t>Plans, signals and regime become visible and editable</a:t>
-            </a:r>
-            <a:endParaRPr lang="en-US" sz="1100" dirty="0"/>
-          </a:p>
-        </p:txBody>
-      </p:sp>
-      <p:sp>
-        <p:nvSpPr>
-          <p:cNvPr id="24" name="Shape 22"/>
-          <p:cNvSpPr/>
-          <p:nvPr/>
-        </p:nvSpPr>
-        <p:spPr>
-          <a:xfrm>
-            <a:off x="9802368" y="1536192"/>
-            <a:ext cx="1700784" cy="2514600"/>
-          </a:xfrm>
-          <a:prstGeom prst="roundRect">
-            <a:avLst>
-              <a:gd name="adj" fmla="val 3226"/>
-            </a:avLst>
-          </a:prstGeom>
-          <a:solidFill>
-            <a:srgbClr val="EEF4F7"/>
-          </a:solidFill>
-          <a:ln w="12700">
-            <a:solidFill>
-              <a:srgbClr val="C9DAE2"/>
-            </a:solidFill>
-            <a:prstDash val="solid"/>
-          </a:ln>
-        </p:spPr>
-      </p:sp>
-      <p:sp>
-        <p:nvSpPr>
-          <p:cNvPr id="25" name="Text 23"/>
-          <p:cNvSpPr txBox="1"/>
-          <p:nvPr/>
-        </p:nvSpPr>
-        <p:spPr>
-          <a:xfrm>
-            <a:off x="9802368" y="1737360"/>
-            <a:ext cx="1700784" cy="457200"/>
-          </a:xfrm>
-          <a:prstGeom prst="rect">
-            <a:avLst/>
-          </a:prstGeom>
-          <a:noFill/>
-          <a:ln/>
-        </p:spPr>
-        <p:txBody>
-          <a:bodyPr wrap="square" lIns="0" tIns="0" rIns="0" bIns="0" rtlCol="0" anchor="ctr"/>
-          <a:lstStyle/>
-          <a:p>
-            <a:pPr algn="ctr" indent="0" marL="0">
-              <a:buNone/>
-            </a:pPr>
-            <a:r>
-              <a:rPr lang="en-US" sz="2600" b="1" dirty="0">
-                <a:solidFill>
-                  <a:srgbClr val="028090"/>
-                </a:solidFill>
-                <a:latin typeface="Cambria" pitchFamily="34" charset="0"/>
-                <a:ea typeface="Cambria" pitchFamily="34" charset="-122"/>
-                <a:cs typeface="Cambria" pitchFamily="34" charset="-120"/>
-              </a:rPr>
-              <a:t>6</a:t>
-            </a:r>
-            <a:endParaRPr lang="en-US" sz="2600" dirty="0"/>
-          </a:p>
-        </p:txBody>
-      </p:sp>
-      <p:sp>
-        <p:nvSpPr>
-          <p:cNvPr id="26" name="Text 24"/>
-          <p:cNvSpPr txBox="1"/>
-          <p:nvPr/>
-        </p:nvSpPr>
-        <p:spPr>
-          <a:xfrm>
-            <a:off x="9966960" y="2249424"/>
-            <a:ext cx="1371600" cy="566928"/>
-          </a:xfrm>
-          <a:prstGeom prst="rect">
-            <a:avLst/>
-          </a:prstGeom>
-          <a:noFill/>
-          <a:ln/>
-        </p:spPr>
-        <p:txBody>
-          <a:bodyPr wrap="square" lIns="0" tIns="0" rIns="0" bIns="0" rtlCol="0" anchor="ctr"/>
-          <a:lstStyle/>
-          <a:p>
-            <a:pPr algn="ctr" indent="0" marL="0">
-              <a:lnSpc>
-                <a:spcPts val="1700"/>
-              </a:lnSpc>
-              <a:buNone/>
-            </a:pPr>
-            <a:r>
-              <a:rPr lang="en-US" sz="1250" b="1" dirty="0">
-                <a:solidFill>
-                  <a:srgbClr val="16222F"/>
-                </a:solidFill>
-                <a:latin typeface="Calibri" pitchFamily="34" charset="0"/>
-                <a:ea typeface="Calibri" pitchFamily="34" charset="-122"/>
-                <a:cs typeface="Calibri" pitchFamily="34" charset="-120"/>
-              </a:rPr>
-              <a:t>Deprecate</a:t>
-            </a:r>
-            <a:endParaRPr lang="en-US" sz="1250" dirty="0"/>
-          </a:p>
-        </p:txBody>
-      </p:sp>
-      <p:sp>
-        <p:nvSpPr>
-          <p:cNvPr id="27" name="Text 25"/>
-          <p:cNvSpPr txBox="1"/>
-          <p:nvPr/>
-        </p:nvSpPr>
-        <p:spPr>
-          <a:xfrm>
-            <a:off x="9966960" y="2852928"/>
-            <a:ext cx="1371600" cy="1051560"/>
-          </a:xfrm>
-          <a:prstGeom prst="rect">
-            <a:avLst/>
-          </a:prstGeom>
-          <a:noFill/>
-          <a:ln/>
-        </p:spPr>
-        <p:txBody>
-          <a:bodyPr wrap="square" lIns="0" tIns="0" rIns="0" bIns="0" rtlCol="0" anchor="ctr"/>
-          <a:lstStyle/>
-          <a:p>
-            <a:pPr algn="ctr" indent="0" marL="0">
-              <a:lnSpc>
-                <a:spcPts val="1500"/>
-              </a:lnSpc>
-              <a:buNone/>
-            </a:pPr>
-            <a:r>
-              <a:rPr lang="en-US" sz="1100" dirty="0">
-                <a:solidFill>
-                  <a:srgbClr val="5E6E7E"/>
-                </a:solidFill>
-                <a:latin typeface="Calibri" pitchFamily="34" charset="0"/>
-                <a:ea typeface="Calibri" pitchFamily="34" charset="-122"/>
-                <a:cs typeface="Calibri" pitchFamily="34" charset="-120"/>
-              </a:rPr>
-              <a:t>The old reactive cycle is removed</a:t>
-            </a:r>
-            <a:endParaRPr lang="en-US" sz="1100" dirty="0"/>
-          </a:p>
-        </p:txBody>
-      </p:sp>
-      <p:sp>
-        <p:nvSpPr>
-          <p:cNvPr id="28" name="Shape 26"/>
-          <p:cNvSpPr/>
-          <p:nvPr/>
-        </p:nvSpPr>
-        <p:spPr>
-          <a:xfrm>
-            <a:off x="566928" y="4315968"/>
-            <a:ext cx="5394960" cy="1810512"/>
-          </a:xfrm>
-          <a:prstGeom prst="roundRect">
-            <a:avLst>
-              <a:gd name="adj" fmla="val 3030"/>
-            </a:avLst>
-          </a:prstGeom>
-          <a:solidFill>
-            <a:srgbClr val="E3F2EE"/>
-          </a:solidFill>
-          <a:ln w="12700">
-            <a:solidFill>
-              <a:srgbClr val="B9DED2"/>
-            </a:solidFill>
-            <a:prstDash val="solid"/>
-          </a:ln>
-        </p:spPr>
-      </p:sp>
-      <p:sp>
-        <p:nvSpPr>
-          <p:cNvPr id="29" name="Text 27"/>
-          <p:cNvSpPr txBox="1"/>
-          <p:nvPr/>
-        </p:nvSpPr>
-        <p:spPr>
-          <a:xfrm>
-            <a:off x="932688" y="4535424"/>
-            <a:ext cx="4663440" cy="292608"/>
-          </a:xfrm>
-          <a:prstGeom prst="rect">
-            <a:avLst/>
-          </a:prstGeom>
-          <a:noFill/>
-          <a:ln/>
-        </p:spPr>
-        <p:txBody>
-          <a:bodyPr wrap="square" lIns="0" tIns="0" rIns="0" bIns="0" rtlCol="0" anchor="ctr"/>
-          <a:lstStyle/>
-          <a:p>
-            <a:pPr indent="0" marL="0">
-              <a:buNone/>
-            </a:pPr>
-            <a:r>
-              <a:rPr lang="en-US" sz="1350" b="1" dirty="0">
-                <a:solidFill>
-                  <a:srgbClr val="028090"/>
-                </a:solidFill>
-                <a:latin typeface="Calibri" pitchFamily="34" charset="0"/>
-                <a:ea typeface="Calibri" pitchFamily="34" charset="-122"/>
-                <a:cs typeface="Calibri" pitchFamily="34" charset="-120"/>
-              </a:rPr>
-              <a:t>Nothing breaks on the way</a:t>
-            </a:r>
-            <a:endParaRPr lang="en-US" sz="1350" dirty="0"/>
-          </a:p>
-        </p:txBody>
-      </p:sp>
-      <p:sp>
-        <p:nvSpPr>
-          <p:cNvPr id="30" name="Text 28"/>
-          <p:cNvSpPr txBox="1"/>
-          <p:nvPr/>
-        </p:nvSpPr>
-        <p:spPr>
-          <a:xfrm>
-            <a:off x="932688" y="4864608"/>
-            <a:ext cx="4709160" cy="1097280"/>
-          </a:xfrm>
-          <a:prstGeom prst="rect">
-            <a:avLst/>
-          </a:prstGeom>
-          <a:noFill/>
-          <a:ln/>
-        </p:spPr>
-        <p:txBody>
-          <a:bodyPr wrap="square" lIns="0" tIns="0" rIns="0" bIns="0" rtlCol="0" anchor="ctr"/>
-          <a:lstStyle/>
-          <a:p>
-            <a:pPr indent="0" marL="0">
-              <a:lnSpc>
-                <a:spcPts val="1800"/>
-              </a:lnSpc>
-              <a:buNone/>
-            </a:pPr>
-            <a:r>
-              <a:rPr lang="en-US" sz="1250" dirty="0">
-                <a:solidFill>
-                  <a:srgbClr val="16222F"/>
-                </a:solidFill>
-                <a:latin typeface="Calibri" pitchFamily="34" charset="0"/>
-                <a:ea typeface="Calibri" pitchFamily="34" charset="-122"/>
-                <a:cs typeface="Calibri" pitchFamily="34" charset="-120"/>
-              </a:rPr>
-              <a:t>Phases 1–3 are purely additive: new tables, new jobs, no change to how trades are decided. The existing daily cycle keeps working until phase four flips the source of decisions.</a:t>
-            </a:r>
-            <a:endParaRPr lang="en-US" sz="1250" dirty="0"/>
-          </a:p>
-        </p:txBody>
-      </p:sp>
-      <p:sp>
-        <p:nvSpPr>
-          <p:cNvPr id="31" name="Shape 29"/>
-          <p:cNvSpPr/>
-          <p:nvPr/>
-        </p:nvSpPr>
-        <p:spPr>
-          <a:xfrm>
-            <a:off x="6236208" y="4315968"/>
-            <a:ext cx="5394960" cy="1810512"/>
-          </a:xfrm>
-          <a:prstGeom prst="roundRect">
-            <a:avLst>
-              <a:gd name="adj" fmla="val 3030"/>
-            </a:avLst>
-          </a:prstGeom>
-          <a:solidFill>
-            <a:srgbClr val="EEF4F7"/>
-          </a:solidFill>
-          <a:ln w="12700">
-            <a:solidFill>
-              <a:srgbClr val="C9DAE2"/>
-            </a:solidFill>
-            <a:prstDash val="solid"/>
-          </a:ln>
-        </p:spPr>
-      </p:sp>
-      <p:sp>
-        <p:nvSpPr>
-          <p:cNvPr id="32" name="Text 30"/>
-          <p:cNvSpPr txBox="1"/>
-          <p:nvPr/>
-        </p:nvSpPr>
-        <p:spPr>
-          <a:xfrm>
-            <a:off x="6601968" y="4535424"/>
-            <a:ext cx="4663440" cy="292608"/>
-          </a:xfrm>
-          <a:prstGeom prst="rect">
-            <a:avLst/>
-          </a:prstGeom>
-          <a:noFill/>
-          <a:ln/>
-        </p:spPr>
-        <p:txBody>
-          <a:bodyPr wrap="square" lIns="0" tIns="0" rIns="0" bIns="0" rtlCol="0" anchor="ctr"/>
-          <a:lstStyle/>
-          <a:p>
-            <a:pPr indent="0" marL="0">
-              <a:buNone/>
-            </a:pPr>
-            <a:r>
-              <a:rPr lang="en-US" sz="1350" b="1" dirty="0">
-                <a:solidFill>
-                  <a:srgbClr val="16222F"/>
-                </a:solidFill>
-                <a:latin typeface="Calibri" pitchFamily="34" charset="0"/>
-                <a:ea typeface="Calibri" pitchFamily="34" charset="-122"/>
-                <a:cs typeface="Calibri" pitchFamily="34" charset="-120"/>
-              </a:rPr>
-              <a:t>Recommended order of work</a:t>
-            </a:r>
-            <a:endParaRPr lang="en-US" sz="1350" dirty="0"/>
-          </a:p>
-        </p:txBody>
-      </p:sp>
-      <p:sp>
-        <p:nvSpPr>
-          <p:cNvPr id="33" name="Text 31"/>
-          <p:cNvSpPr txBox="1"/>
-          <p:nvPr/>
-        </p:nvSpPr>
-        <p:spPr>
-          <a:xfrm>
-            <a:off x="6601968" y="4864608"/>
-            <a:ext cx="4709160" cy="1097280"/>
-          </a:xfrm>
-          <a:prstGeom prst="rect">
-            <a:avLst/>
-          </a:prstGeom>
-          <a:noFill/>
-          <a:ln/>
-        </p:spPr>
-        <p:txBody>
-          <a:bodyPr wrap="square" lIns="0" tIns="0" rIns="0" bIns="0" rtlCol="0" anchor="ctr"/>
-          <a:lstStyle/>
-          <a:p>
-            <a:pPr marL="342900" indent="-342900">
-              <a:lnSpc>
-                <a:spcPts val="1700"/>
-              </a:lnSpc>
-              <a:spcAft>
-                <a:spcPts val="600"/>
-              </a:spcAft>
-              <a:buSzPct val="100000"/>
-              <a:buChar char="•"/>
-            </a:pPr>
-            <a:r>
-              <a:rPr lang="en-US" sz="1250" dirty="0">
-                <a:solidFill>
-                  <a:srgbClr val="5E6E7E"/>
-                </a:solidFill>
-                <a:latin typeface="Calibri" pitchFamily="34" charset="0"/>
-                <a:ea typeface="Calibri" pitchFamily="34" charset="-122"/>
-                <a:cs typeface="Calibri" pitchFamily="34" charset="-120"/>
-              </a:rPr>
-              <a:t>Build the database first, then collect for 30 days before tuning a single threshold</a:t>
-            </a:r>
-            <a:endParaRPr lang="en-US" sz="1250" dirty="0"/>
-          </a:p>
-          <a:p>
-            <a:pPr marL="342900" indent="-342900">
-              <a:lnSpc>
-                <a:spcPts val="1700"/>
-              </a:lnSpc>
-              <a:spcAft>
-                <a:spcPts val="600"/>
-              </a:spcAft>
-              <a:buSzPct val="100000"/>
-              <a:buChar char="•"/>
-            </a:pPr>
-            <a:r>
-              <a:rPr lang="en-US" sz="1250" dirty="0">
-                <a:solidFill>
-                  <a:srgbClr val="5E6E7E"/>
-                </a:solidFill>
-                <a:latin typeface="Calibri" pitchFamily="34" charset="0"/>
-                <a:ea typeface="Calibri" pitchFamily="34" charset="-122"/>
-                <a:cs typeface="Calibri" pitchFamily="34" charset="-120"/>
-              </a:rPr>
-              <a:t>Get plan review right before worrying about tranche mechanics</a:t>
-            </a:r>
-            <a:endParaRPr lang="en-US" sz="1250" dirty="0"/>
-          </a:p>
-          <a:p>
-            <a:pPr marL="342900" indent="-342900">
-              <a:lnSpc>
-                <a:spcPts val="1700"/>
-              </a:lnSpc>
-              <a:buSzPct val="100000"/>
-              <a:buChar char="•"/>
-            </a:pPr>
-            <a:r>
-              <a:rPr lang="en-US" sz="1250" dirty="0">
-                <a:solidFill>
-                  <a:srgbClr val="5E6E7E"/>
-                </a:solidFill>
-                <a:latin typeface="Calibri" pitchFamily="34" charset="0"/>
-                <a:ea typeface="Calibri" pitchFamily="34" charset="-122"/>
-                <a:cs typeface="Calibri" pitchFamily="34" charset="-120"/>
-              </a:rPr>
-              <a:t>Add the waiting notifications early — otherwise it looks broken</a:t>
-            </a:r>
-            <a:endParaRPr lang="en-US" sz="1250" dirty="0"/>
           </a:p>
         </p:txBody>
       </p:sp>
@@ -13716,6 +14410,1051 @@
 <file path=ppt/slides/slide18.xml><?xml version="1.0" encoding="utf-8"?>
 <p:sld xmlns:a="http://schemas.openxmlformats.org/drawingml/2006/main" xmlns:r="http://schemas.openxmlformats.org/officeDocument/2006/relationships" xmlns:p="http://schemas.openxmlformats.org/presentationml/2006/main">
   <p:cSld name="Slide 18">
+    <p:bg>
+      <p:bgPr>
+        <a:solidFill>
+          <a:srgbClr val="FFFFFF"/>
+        </a:solidFill>
+      </p:bgPr>
+    </p:bg>
+    <p:spTree>
+      <p:nvGrpSpPr>
+        <p:cNvPr id="1" name=""/>
+        <p:cNvGrpSpPr/>
+        <p:nvPr/>
+      </p:nvGrpSpPr>
+      <p:grpSpPr>
+        <a:xfrm>
+          <a:off x="0" y="0"/>
+          <a:ext cx="0" cy="0"/>
+          <a:chOff x="0" y="0"/>
+          <a:chExt cx="0" cy="0"/>
+        </a:xfrm>
+      </p:grpSpPr>
+      <p:sp>
+        <p:nvSpPr>
+          <p:cNvPr id="2" name="Text 0"/>
+          <p:cNvSpPr txBox="1"/>
+          <p:nvPr/>
+        </p:nvSpPr>
+        <p:spPr>
+          <a:xfrm>
+            <a:off x="566928" y="329184"/>
+            <a:ext cx="10058400" cy="237744"/>
+          </a:xfrm>
+          <a:prstGeom prst="rect">
+            <a:avLst/>
+          </a:prstGeom>
+          <a:noFill/>
+          <a:ln/>
+        </p:spPr>
+        <p:txBody>
+          <a:bodyPr wrap="square" lIns="0" tIns="0" rIns="0" bIns="0" rtlCol="0" anchor="ctr"/>
+          <a:lstStyle/>
+          <a:p>
+            <a:pPr indent="0" marL="0">
+              <a:buNone/>
+            </a:pPr>
+            <a:r>
+              <a:rPr lang="en-US" sz="1050" b="1" spc="220" kern="0" dirty="0">
+                <a:solidFill>
+                  <a:srgbClr val="028090"/>
+                </a:solidFill>
+                <a:latin typeface="Calibri" pitchFamily="34" charset="0"/>
+                <a:ea typeface="Calibri" pitchFamily="34" charset="-122"/>
+                <a:cs typeface="Calibri" pitchFamily="34" charset="-120"/>
+              </a:rPr>
+              <a:t>WHAT YOU SEE</a:t>
+            </a:r>
+            <a:endParaRPr lang="en-US" sz="1050" dirty="0"/>
+          </a:p>
+        </p:txBody>
+      </p:sp>
+      <p:sp>
+        <p:nvSpPr>
+          <p:cNvPr id="3" name="Text 1"/>
+          <p:cNvSpPr txBox="1"/>
+          <p:nvPr/>
+        </p:nvSpPr>
+        <p:spPr>
+          <a:xfrm>
+            <a:off x="566928" y="585216"/>
+            <a:ext cx="11064240" cy="566928"/>
+          </a:xfrm>
+          <a:prstGeom prst="rect">
+            <a:avLst/>
+          </a:prstGeom>
+          <a:noFill/>
+          <a:ln/>
+        </p:spPr>
+        <p:txBody>
+          <a:bodyPr wrap="square" lIns="0" tIns="0" rIns="0" bIns="0" rtlCol="0" anchor="ctr"/>
+          <a:lstStyle/>
+          <a:p>
+            <a:pPr indent="0" marL="0">
+              <a:buNone/>
+            </a:pPr>
+            <a:r>
+              <a:rPr lang="en-US" sz="3000" b="1" dirty="0">
+                <a:solidFill>
+                  <a:srgbClr val="16222F"/>
+                </a:solidFill>
+                <a:latin typeface="Cambria" pitchFamily="34" charset="0"/>
+                <a:ea typeface="Cambria" pitchFamily="34" charset="-122"/>
+                <a:cs typeface="Cambria" pitchFamily="34" charset="-120"/>
+              </a:rPr>
+              <a:t>The surface, once it is running</a:t>
+            </a:r>
+            <a:endParaRPr lang="en-US" sz="3000" dirty="0"/>
+          </a:p>
+        </p:txBody>
+      </p:sp>
+      <p:sp>
+        <p:nvSpPr>
+          <p:cNvPr id="4" name="Shape 2"/>
+          <p:cNvSpPr/>
+          <p:nvPr/>
+        </p:nvSpPr>
+        <p:spPr>
+          <a:xfrm>
+            <a:off x="566928" y="1444752"/>
+            <a:ext cx="5394960" cy="2103120"/>
+          </a:xfrm>
+          <a:prstGeom prst="roundRect">
+            <a:avLst>
+              <a:gd name="adj" fmla="val 2609"/>
+            </a:avLst>
+          </a:prstGeom>
+          <a:solidFill>
+            <a:srgbClr val="EEF4F7"/>
+          </a:solidFill>
+          <a:ln w="12700">
+            <a:solidFill>
+              <a:srgbClr val="C9DAE2"/>
+            </a:solidFill>
+            <a:prstDash val="solid"/>
+          </a:ln>
+        </p:spPr>
+      </p:sp>
+      <p:sp>
+        <p:nvSpPr>
+          <p:cNvPr id="5" name="Shape 3"/>
+          <p:cNvSpPr/>
+          <p:nvPr/>
+        </p:nvSpPr>
+        <p:spPr>
+          <a:xfrm>
+            <a:off x="877824" y="1700784"/>
+            <a:ext cx="274320" cy="274320"/>
+          </a:xfrm>
+          <a:prstGeom prst="ellipse">
+            <a:avLst/>
+          </a:prstGeom>
+          <a:solidFill>
+            <a:srgbClr val="02C39A"/>
+          </a:solidFill>
+          <a:ln w="12700">
+            <a:solidFill>
+              <a:srgbClr val="333333"/>
+            </a:solidFill>
+            <a:prstDash val="solid"/>
+          </a:ln>
+        </p:spPr>
+      </p:sp>
+      <p:sp>
+        <p:nvSpPr>
+          <p:cNvPr id="6" name="Text 4"/>
+          <p:cNvSpPr txBox="1"/>
+          <p:nvPr/>
+        </p:nvSpPr>
+        <p:spPr>
+          <a:xfrm>
+            <a:off x="1280160" y="1664208"/>
+            <a:ext cx="2743200" cy="347472"/>
+          </a:xfrm>
+          <a:prstGeom prst="rect">
+            <a:avLst/>
+          </a:prstGeom>
+          <a:noFill/>
+          <a:ln/>
+        </p:spPr>
+        <p:txBody>
+          <a:bodyPr wrap="square" lIns="0" tIns="0" rIns="0" bIns="0" rtlCol="0" anchor="ctr"/>
+          <a:lstStyle/>
+          <a:p>
+            <a:pPr indent="0" marL="0">
+              <a:buNone/>
+            </a:pPr>
+            <a:r>
+              <a:rPr lang="en-US" sz="1800" b="1" dirty="0">
+                <a:solidFill>
+                  <a:srgbClr val="16222F"/>
+                </a:solidFill>
+                <a:latin typeface="Cambria" pitchFamily="34" charset="0"/>
+                <a:ea typeface="Cambria" pitchFamily="34" charset="-122"/>
+                <a:cs typeface="Cambria" pitchFamily="34" charset="-120"/>
+              </a:rPr>
+              <a:t>Dashboard</a:t>
+            </a:r>
+            <a:endParaRPr lang="en-US" sz="1800" dirty="0"/>
+          </a:p>
+        </p:txBody>
+      </p:sp>
+      <p:sp>
+        <p:nvSpPr>
+          <p:cNvPr id="7" name="Text 5"/>
+          <p:cNvSpPr txBox="1"/>
+          <p:nvPr/>
+        </p:nvSpPr>
+        <p:spPr>
+          <a:xfrm>
+            <a:off x="877824" y="2048256"/>
+            <a:ext cx="4773168" cy="274320"/>
+          </a:xfrm>
+          <a:prstGeom prst="rect">
+            <a:avLst/>
+          </a:prstGeom>
+          <a:noFill/>
+          <a:ln/>
+        </p:spPr>
+        <p:txBody>
+          <a:bodyPr wrap="square" lIns="0" tIns="0" rIns="0" bIns="0" rtlCol="0" anchor="ctr"/>
+          <a:lstStyle/>
+          <a:p>
+            <a:pPr indent="0" marL="0">
+              <a:buNone/>
+            </a:pPr>
+            <a:r>
+              <a:rPr lang="en-US" sz="1200" i="1" dirty="0">
+                <a:solidFill>
+                  <a:srgbClr val="028090"/>
+                </a:solidFill>
+                <a:latin typeface="Calibri" pitchFamily="34" charset="0"/>
+                <a:ea typeface="Calibri" pitchFamily="34" charset="-122"/>
+                <a:cs typeface="Calibri" pitchFamily="34" charset="-120"/>
+              </a:rPr>
+              <a:t>Which engine is driving, and what it costs</a:t>
+            </a:r>
+            <a:endParaRPr lang="en-US" sz="1200" dirty="0"/>
+          </a:p>
+        </p:txBody>
+      </p:sp>
+      <p:sp>
+        <p:nvSpPr>
+          <p:cNvPr id="8" name="Text 6"/>
+          <p:cNvSpPr txBox="1"/>
+          <p:nvPr/>
+        </p:nvSpPr>
+        <p:spPr>
+          <a:xfrm>
+            <a:off x="877824" y="2359152"/>
+            <a:ext cx="4773168" cy="1060704"/>
+          </a:xfrm>
+          <a:prstGeom prst="rect">
+            <a:avLst/>
+          </a:prstGeom>
+          <a:noFill/>
+          <a:ln/>
+        </p:spPr>
+        <p:txBody>
+          <a:bodyPr wrap="square" lIns="0" tIns="0" rIns="0" bIns="0" rtlCol="0" anchor="ctr"/>
+          <a:lstStyle/>
+          <a:p>
+            <a:pPr marL="342900" indent="-342900">
+              <a:lnSpc>
+                <a:spcPts val="1500"/>
+              </a:lnSpc>
+              <a:spcAft>
+                <a:spcPts val="500"/>
+              </a:spcAft>
+              <a:buSzPct val="100000"/>
+              <a:buChar char="•"/>
+            </a:pPr>
+            <a:r>
+              <a:rPr lang="en-US" sz="1150" dirty="0">
+                <a:solidFill>
+                  <a:srgbClr val="5E6E7E"/>
+                </a:solidFill>
+                <a:latin typeface="Calibri" pitchFamily="34" charset="0"/>
+                <a:ea typeface="Calibri" pitchFamily="34" charset="-122"/>
+                <a:cs typeface="Calibri" pitchFamily="34" charset="-120"/>
+              </a:rPr>
+              <a:t>An execution-mode badge: Strategic Plans, or Trading Cycle</a:t>
+            </a:r>
+            <a:endParaRPr lang="en-US" sz="1150" dirty="0"/>
+          </a:p>
+          <a:p>
+            <a:pPr marL="342900" indent="-342900">
+              <a:lnSpc>
+                <a:spcPts val="1500"/>
+              </a:lnSpc>
+              <a:spcAft>
+                <a:spcPts val="500"/>
+              </a:spcAft>
+              <a:buSzPct val="100000"/>
+              <a:buChar char="•"/>
+            </a:pPr>
+            <a:r>
+              <a:rPr lang="en-US" sz="1150" dirty="0">
+                <a:solidFill>
+                  <a:srgbClr val="5E6E7E"/>
+                </a:solidFill>
+                <a:latin typeface="Calibri" pitchFamily="34" charset="0"/>
+                <a:ea typeface="Calibri" pitchFamily="34" charset="-122"/>
+                <a:cs typeface="Calibri" pitchFamily="34" charset="-120"/>
+              </a:rPr>
+              <a:t>FinBERT runs the signals; the LLM runs only the screener, on demand</a:t>
+            </a:r>
+            <a:endParaRPr lang="en-US" sz="1150" dirty="0"/>
+          </a:p>
+          <a:p>
+            <a:pPr marL="342900" indent="-342900">
+              <a:lnSpc>
+                <a:spcPts val="1500"/>
+              </a:lnSpc>
+              <a:spcAft>
+                <a:spcPts val="500"/>
+              </a:spcAft>
+              <a:buSzPct val="100000"/>
+              <a:buChar char="•"/>
+            </a:pPr>
+            <a:r>
+              <a:rPr lang="en-US" sz="1150" dirty="0">
+                <a:solidFill>
+                  <a:srgbClr val="5E6E7E"/>
+                </a:solidFill>
+                <a:latin typeface="Calibri" pitchFamily="34" charset="0"/>
+                <a:ea typeface="Calibri" pitchFamily="34" charset="-122"/>
+                <a:cs typeface="Calibri" pitchFamily="34" charset="-120"/>
+              </a:rPr>
+              <a:t>Daily LLM cost, now driven by screener runs rather than every cycle</a:t>
+            </a:r>
+            <a:endParaRPr lang="en-US" sz="1150" dirty="0"/>
+          </a:p>
+        </p:txBody>
+      </p:sp>
+      <p:sp>
+        <p:nvSpPr>
+          <p:cNvPr id="9" name="Shape 7"/>
+          <p:cNvSpPr/>
+          <p:nvPr/>
+        </p:nvSpPr>
+        <p:spPr>
+          <a:xfrm>
+            <a:off x="6236208" y="1444752"/>
+            <a:ext cx="5394960" cy="2103120"/>
+          </a:xfrm>
+          <a:prstGeom prst="roundRect">
+            <a:avLst>
+              <a:gd name="adj" fmla="val 2609"/>
+            </a:avLst>
+          </a:prstGeom>
+          <a:solidFill>
+            <a:srgbClr val="EEF4F7"/>
+          </a:solidFill>
+          <a:ln w="12700">
+            <a:solidFill>
+              <a:srgbClr val="C9DAE2"/>
+            </a:solidFill>
+            <a:prstDash val="solid"/>
+          </a:ln>
+        </p:spPr>
+      </p:sp>
+      <p:sp>
+        <p:nvSpPr>
+          <p:cNvPr id="10" name="Shape 8"/>
+          <p:cNvSpPr/>
+          <p:nvPr/>
+        </p:nvSpPr>
+        <p:spPr>
+          <a:xfrm>
+            <a:off x="6547104" y="1700784"/>
+            <a:ext cx="274320" cy="274320"/>
+          </a:xfrm>
+          <a:prstGeom prst="ellipse">
+            <a:avLst/>
+          </a:prstGeom>
+          <a:solidFill>
+            <a:srgbClr val="02C39A"/>
+          </a:solidFill>
+          <a:ln w="12700">
+            <a:solidFill>
+              <a:srgbClr val="333333"/>
+            </a:solidFill>
+            <a:prstDash val="solid"/>
+          </a:ln>
+        </p:spPr>
+      </p:sp>
+      <p:sp>
+        <p:nvSpPr>
+          <p:cNvPr id="11" name="Text 9"/>
+          <p:cNvSpPr txBox="1"/>
+          <p:nvPr/>
+        </p:nvSpPr>
+        <p:spPr>
+          <a:xfrm>
+            <a:off x="6949440" y="1664208"/>
+            <a:ext cx="2743200" cy="347472"/>
+          </a:xfrm>
+          <a:prstGeom prst="rect">
+            <a:avLst/>
+          </a:prstGeom>
+          <a:noFill/>
+          <a:ln/>
+        </p:spPr>
+        <p:txBody>
+          <a:bodyPr wrap="square" lIns="0" tIns="0" rIns="0" bIns="0" rtlCol="0" anchor="ctr"/>
+          <a:lstStyle/>
+          <a:p>
+            <a:pPr indent="0" marL="0">
+              <a:buNone/>
+            </a:pPr>
+            <a:r>
+              <a:rPr lang="en-US" sz="1800" b="1" dirty="0">
+                <a:solidFill>
+                  <a:srgbClr val="16222F"/>
+                </a:solidFill>
+                <a:latin typeface="Cambria" pitchFamily="34" charset="0"/>
+                <a:ea typeface="Cambria" pitchFamily="34" charset="-122"/>
+                <a:cs typeface="Cambria" pitchFamily="34" charset="-120"/>
+              </a:rPr>
+              <a:t>Plans</a:t>
+            </a:r>
+            <a:endParaRPr lang="en-US" sz="1800" dirty="0"/>
+          </a:p>
+        </p:txBody>
+      </p:sp>
+      <p:sp>
+        <p:nvSpPr>
+          <p:cNvPr id="12" name="Text 10"/>
+          <p:cNvSpPr txBox="1"/>
+          <p:nvPr/>
+        </p:nvSpPr>
+        <p:spPr>
+          <a:xfrm>
+            <a:off x="6547104" y="2048256"/>
+            <a:ext cx="4773168" cy="274320"/>
+          </a:xfrm>
+          <a:prstGeom prst="rect">
+            <a:avLst/>
+          </a:prstGeom>
+          <a:noFill/>
+          <a:ln/>
+        </p:spPr>
+        <p:txBody>
+          <a:bodyPr wrap="square" lIns="0" tIns="0" rIns="0" bIns="0" rtlCol="0" anchor="ctr"/>
+          <a:lstStyle/>
+          <a:p>
+            <a:pPr indent="0" marL="0">
+              <a:buNone/>
+            </a:pPr>
+            <a:r>
+              <a:rPr lang="en-US" sz="1200" i="1" dirty="0">
+                <a:solidFill>
+                  <a:srgbClr val="028090"/>
+                </a:solidFill>
+                <a:latin typeface="Calibri" pitchFamily="34" charset="0"/>
+                <a:ea typeface="Calibri" pitchFamily="34" charset="-122"/>
+                <a:cs typeface="Calibri" pitchFamily="34" charset="-120"/>
+              </a:rPr>
+              <a:t>Campaigns at a glance</a:t>
+            </a:r>
+            <a:endParaRPr lang="en-US" sz="1200" dirty="0"/>
+          </a:p>
+        </p:txBody>
+      </p:sp>
+      <p:sp>
+        <p:nvSpPr>
+          <p:cNvPr id="13" name="Text 11"/>
+          <p:cNvSpPr txBox="1"/>
+          <p:nvPr/>
+        </p:nvSpPr>
+        <p:spPr>
+          <a:xfrm>
+            <a:off x="6547104" y="2359152"/>
+            <a:ext cx="4773168" cy="1060704"/>
+          </a:xfrm>
+          <a:prstGeom prst="rect">
+            <a:avLst/>
+          </a:prstGeom>
+          <a:noFill/>
+          <a:ln/>
+        </p:spPr>
+        <p:txBody>
+          <a:bodyPr wrap="square" lIns="0" tIns="0" rIns="0" bIns="0" rtlCol="0" anchor="ctr"/>
+          <a:lstStyle/>
+          <a:p>
+            <a:pPr marL="342900" indent="-342900">
+              <a:lnSpc>
+                <a:spcPts val="1500"/>
+              </a:lnSpc>
+              <a:spcAft>
+                <a:spcPts val="500"/>
+              </a:spcAft>
+              <a:buSzPct val="100000"/>
+              <a:buChar char="•"/>
+            </a:pPr>
+            <a:r>
+              <a:rPr lang="en-US" sz="1150" dirty="0">
+                <a:solidFill>
+                  <a:srgbClr val="5E6E7E"/>
+                </a:solidFill>
+                <a:latin typeface="Calibri" pitchFamily="34" charset="0"/>
+                <a:ea typeface="Calibri" pitchFamily="34" charset="-122"/>
+                <a:cs typeface="Calibri" pitchFamily="34" charset="-120"/>
+              </a:rPr>
+              <a:t>Active and paused plan cards, each with a progress bar</a:t>
+            </a:r>
+            <a:endParaRPr lang="en-US" sz="1150" dirty="0"/>
+          </a:p>
+          <a:p>
+            <a:pPr marL="342900" indent="-342900">
+              <a:lnSpc>
+                <a:spcPts val="1500"/>
+              </a:lnSpc>
+              <a:spcAft>
+                <a:spcPts val="500"/>
+              </a:spcAft>
+              <a:buSzPct val="100000"/>
+              <a:buChar char="•"/>
+            </a:pPr>
+            <a:r>
+              <a:rPr lang="en-US" sz="1150" dirty="0">
+                <a:solidFill>
+                  <a:srgbClr val="5E6E7E"/>
+                </a:solidFill>
+                <a:latin typeface="Calibri" pitchFamily="34" charset="0"/>
+                <a:ea typeface="Calibri" pitchFamily="34" charset="-122"/>
+                <a:cs typeface="Calibri" pitchFamily="34" charset="-120"/>
+              </a:rPr>
+              <a:t>“Run Planner” triggers signal collection and plan review on the spot</a:t>
+            </a:r>
+            <a:endParaRPr lang="en-US" sz="1150" dirty="0"/>
+          </a:p>
+          <a:p>
+            <a:pPr marL="342900" indent="-342900">
+              <a:lnSpc>
+                <a:spcPts val="1500"/>
+              </a:lnSpc>
+              <a:spcAft>
+                <a:spcPts val="500"/>
+              </a:spcAft>
+              <a:buSzPct val="100000"/>
+              <a:buChar char="•"/>
+            </a:pPr>
+            <a:r>
+              <a:rPr lang="en-US" sz="1150" dirty="0">
+                <a:solidFill>
+                  <a:srgbClr val="5E6E7E"/>
+                </a:solidFill>
+                <a:latin typeface="Calibri" pitchFamily="34" charset="0"/>
+                <a:ea typeface="Calibri" pitchFamily="34" charset="-122"/>
+                <a:cs typeface="Calibri" pitchFamily="34" charset="-120"/>
+              </a:rPr>
+              <a:t>Results report regime, watchlist and position counts, plans created and skipped</a:t>
+            </a:r>
+            <a:endParaRPr lang="en-US" sz="1150" dirty="0"/>
+          </a:p>
+        </p:txBody>
+      </p:sp>
+      <p:sp>
+        <p:nvSpPr>
+          <p:cNvPr id="14" name="Shape 12"/>
+          <p:cNvSpPr/>
+          <p:nvPr/>
+        </p:nvSpPr>
+        <p:spPr>
+          <a:xfrm>
+            <a:off x="566928" y="3712464"/>
+            <a:ext cx="5394960" cy="2103120"/>
+          </a:xfrm>
+          <a:prstGeom prst="roundRect">
+            <a:avLst>
+              <a:gd name="adj" fmla="val 2609"/>
+            </a:avLst>
+          </a:prstGeom>
+          <a:solidFill>
+            <a:srgbClr val="EEF4F7"/>
+          </a:solidFill>
+          <a:ln w="12700">
+            <a:solidFill>
+              <a:srgbClr val="C9DAE2"/>
+            </a:solidFill>
+            <a:prstDash val="solid"/>
+          </a:ln>
+        </p:spPr>
+      </p:sp>
+      <p:sp>
+        <p:nvSpPr>
+          <p:cNvPr id="15" name="Shape 13"/>
+          <p:cNvSpPr/>
+          <p:nvPr/>
+        </p:nvSpPr>
+        <p:spPr>
+          <a:xfrm>
+            <a:off x="877824" y="3968496"/>
+            <a:ext cx="274320" cy="274320"/>
+          </a:xfrm>
+          <a:prstGeom prst="ellipse">
+            <a:avLst/>
+          </a:prstGeom>
+          <a:solidFill>
+            <a:srgbClr val="02C39A"/>
+          </a:solidFill>
+          <a:ln w="12700">
+            <a:solidFill>
+              <a:srgbClr val="333333"/>
+            </a:solidFill>
+            <a:prstDash val="solid"/>
+          </a:ln>
+        </p:spPr>
+      </p:sp>
+      <p:sp>
+        <p:nvSpPr>
+          <p:cNvPr id="16" name="Text 14"/>
+          <p:cNvSpPr txBox="1"/>
+          <p:nvPr/>
+        </p:nvSpPr>
+        <p:spPr>
+          <a:xfrm>
+            <a:off x="1280160" y="3931920"/>
+            <a:ext cx="2743200" cy="347472"/>
+          </a:xfrm>
+          <a:prstGeom prst="rect">
+            <a:avLst/>
+          </a:prstGeom>
+          <a:noFill/>
+          <a:ln/>
+        </p:spPr>
+        <p:txBody>
+          <a:bodyPr wrap="square" lIns="0" tIns="0" rIns="0" bIns="0" rtlCol="0" anchor="ctr"/>
+          <a:lstStyle/>
+          <a:p>
+            <a:pPr indent="0" marL="0">
+              <a:buNone/>
+            </a:pPr>
+            <a:r>
+              <a:rPr lang="en-US" sz="1800" b="1" dirty="0">
+                <a:solidFill>
+                  <a:srgbClr val="16222F"/>
+                </a:solidFill>
+                <a:latin typeface="Cambria" pitchFamily="34" charset="0"/>
+                <a:ea typeface="Cambria" pitchFamily="34" charset="-122"/>
+                <a:cs typeface="Cambria" pitchFamily="34" charset="-120"/>
+              </a:rPr>
+              <a:t>Watchlist</a:t>
+            </a:r>
+            <a:endParaRPr lang="en-US" sz="1800" dirty="0"/>
+          </a:p>
+        </p:txBody>
+      </p:sp>
+      <p:sp>
+        <p:nvSpPr>
+          <p:cNvPr id="17" name="Text 15"/>
+          <p:cNvSpPr txBox="1"/>
+          <p:nvPr/>
+        </p:nvSpPr>
+        <p:spPr>
+          <a:xfrm>
+            <a:off x="877824" y="4315968"/>
+            <a:ext cx="4773168" cy="274320"/>
+          </a:xfrm>
+          <a:prstGeom prst="rect">
+            <a:avLst/>
+          </a:prstGeom>
+          <a:noFill/>
+          <a:ln/>
+        </p:spPr>
+        <p:txBody>
+          <a:bodyPr wrap="square" lIns="0" tIns="0" rIns="0" bIns="0" rtlCol="0" anchor="ctr"/>
+          <a:lstStyle/>
+          <a:p>
+            <a:pPr indent="0" marL="0">
+              <a:buNone/>
+            </a:pPr>
+            <a:r>
+              <a:rPr lang="en-US" sz="1200" i="1" dirty="0">
+                <a:solidFill>
+                  <a:srgbClr val="028090"/>
+                </a:solidFill>
+                <a:latin typeface="Calibri" pitchFamily="34" charset="0"/>
+                <a:ea typeface="Calibri" pitchFamily="34" charset="-122"/>
+                <a:cs typeface="Calibri" pitchFamily="34" charset="-120"/>
+              </a:rPr>
+              <a:t>Where the categories surface</a:t>
+            </a:r>
+            <a:endParaRPr lang="en-US" sz="1200" dirty="0"/>
+          </a:p>
+        </p:txBody>
+      </p:sp>
+      <p:sp>
+        <p:nvSpPr>
+          <p:cNvPr id="18" name="Text 16"/>
+          <p:cNvSpPr txBox="1"/>
+          <p:nvPr/>
+        </p:nvSpPr>
+        <p:spPr>
+          <a:xfrm>
+            <a:off x="877824" y="4626864"/>
+            <a:ext cx="4773168" cy="1060704"/>
+          </a:xfrm>
+          <a:prstGeom prst="rect">
+            <a:avLst/>
+          </a:prstGeom>
+          <a:noFill/>
+          <a:ln/>
+        </p:spPr>
+        <p:txBody>
+          <a:bodyPr wrap="square" lIns="0" tIns="0" rIns="0" bIns="0" rtlCol="0" anchor="ctr"/>
+          <a:lstStyle/>
+          <a:p>
+            <a:pPr marL="342900" indent="-342900">
+              <a:lnSpc>
+                <a:spcPts val="1500"/>
+              </a:lnSpc>
+              <a:spcAft>
+                <a:spcPts val="500"/>
+              </a:spcAft>
+              <a:buSzPct val="100000"/>
+              <a:buChar char="•"/>
+            </a:pPr>
+            <a:r>
+              <a:rPr lang="en-US" sz="1150" dirty="0">
+                <a:solidFill>
+                  <a:srgbClr val="5E6E7E"/>
+                </a:solidFill>
+                <a:latin typeface="Calibri" pitchFamily="34" charset="0"/>
+                <a:ea typeface="Calibri" pitchFamily="34" charset="-122"/>
+                <a:cs typeface="Calibri" pitchFamily="34" charset="-120"/>
+              </a:rPr>
+              <a:t>“Run Screener” populates the list when the watchlist is dynamic</a:t>
+            </a:r>
+            <a:endParaRPr lang="en-US" sz="1150" dirty="0"/>
+          </a:p>
+          <a:p>
+            <a:pPr marL="342900" indent="-342900">
+              <a:lnSpc>
+                <a:spcPts val="1500"/>
+              </a:lnSpc>
+              <a:spcAft>
+                <a:spcPts val="500"/>
+              </a:spcAft>
+              <a:buSzPct val="100000"/>
+              <a:buChar char="•"/>
+            </a:pPr>
+            <a:r>
+              <a:rPr lang="en-US" sz="1150" dirty="0">
+                <a:solidFill>
+                  <a:srgbClr val="5E6E7E"/>
+                </a:solidFill>
+                <a:latin typeface="Calibri" pitchFamily="34" charset="0"/>
+                <a:ea typeface="Calibri" pitchFamily="34" charset="-122"/>
+                <a:cs typeface="Calibri" pitchFamily="34" charset="-120"/>
+              </a:rPr>
+              <a:t>Every symbol carries its category — growth core, dividend growth, income booster</a:t>
+            </a:r>
+            <a:endParaRPr lang="en-US" sz="1150" dirty="0"/>
+          </a:p>
+          <a:p>
+            <a:pPr marL="342900" indent="-342900">
+              <a:lnSpc>
+                <a:spcPts val="1500"/>
+              </a:lnSpc>
+              <a:spcAft>
+                <a:spcPts val="500"/>
+              </a:spcAft>
+              <a:buSzPct val="100000"/>
+              <a:buChar char="•"/>
+            </a:pPr>
+            <a:r>
+              <a:rPr lang="en-US" sz="1150" dirty="0">
+                <a:solidFill>
+                  <a:srgbClr val="5E6E7E"/>
+                </a:solidFill>
+                <a:latin typeface="Calibri" pitchFamily="34" charset="0"/>
+                <a:ea typeface="Calibri" pitchFamily="34" charset="-122"/>
+                <a:cs typeface="Calibri" pitchFamily="34" charset="-120"/>
+              </a:rPr>
+              <a:t>Plan status is shown per symbol, so gaps are obvious</a:t>
+            </a:r>
+            <a:endParaRPr lang="en-US" sz="1150" dirty="0"/>
+          </a:p>
+        </p:txBody>
+      </p:sp>
+      <p:sp>
+        <p:nvSpPr>
+          <p:cNvPr id="19" name="Shape 17"/>
+          <p:cNvSpPr/>
+          <p:nvPr/>
+        </p:nvSpPr>
+        <p:spPr>
+          <a:xfrm>
+            <a:off x="6236208" y="3712464"/>
+            <a:ext cx="5394960" cy="2103120"/>
+          </a:xfrm>
+          <a:prstGeom prst="roundRect">
+            <a:avLst>
+              <a:gd name="adj" fmla="val 2609"/>
+            </a:avLst>
+          </a:prstGeom>
+          <a:solidFill>
+            <a:srgbClr val="EEF4F7"/>
+          </a:solidFill>
+          <a:ln w="12700">
+            <a:solidFill>
+              <a:srgbClr val="C9DAE2"/>
+            </a:solidFill>
+            <a:prstDash val="solid"/>
+          </a:ln>
+        </p:spPr>
+      </p:sp>
+      <p:sp>
+        <p:nvSpPr>
+          <p:cNvPr id="20" name="Shape 18"/>
+          <p:cNvSpPr/>
+          <p:nvPr/>
+        </p:nvSpPr>
+        <p:spPr>
+          <a:xfrm>
+            <a:off x="6547104" y="3968496"/>
+            <a:ext cx="274320" cy="274320"/>
+          </a:xfrm>
+          <a:prstGeom prst="ellipse">
+            <a:avLst/>
+          </a:prstGeom>
+          <a:solidFill>
+            <a:srgbClr val="02C39A"/>
+          </a:solidFill>
+          <a:ln w="12700">
+            <a:solidFill>
+              <a:srgbClr val="333333"/>
+            </a:solidFill>
+            <a:prstDash val="solid"/>
+          </a:ln>
+        </p:spPr>
+      </p:sp>
+      <p:sp>
+        <p:nvSpPr>
+          <p:cNvPr id="21" name="Text 19"/>
+          <p:cNvSpPr txBox="1"/>
+          <p:nvPr/>
+        </p:nvSpPr>
+        <p:spPr>
+          <a:xfrm>
+            <a:off x="6949440" y="3931920"/>
+            <a:ext cx="2743200" cy="347472"/>
+          </a:xfrm>
+          <a:prstGeom prst="rect">
+            <a:avLst/>
+          </a:prstGeom>
+          <a:noFill/>
+          <a:ln/>
+        </p:spPr>
+        <p:txBody>
+          <a:bodyPr wrap="square" lIns="0" tIns="0" rIns="0" bIns="0" rtlCol="0" anchor="ctr"/>
+          <a:lstStyle/>
+          <a:p>
+            <a:pPr indent="0" marL="0">
+              <a:buNone/>
+            </a:pPr>
+            <a:r>
+              <a:rPr lang="en-US" sz="1800" b="1" dirty="0">
+                <a:solidFill>
+                  <a:srgbClr val="16222F"/>
+                </a:solidFill>
+                <a:latin typeface="Cambria" pitchFamily="34" charset="0"/>
+                <a:ea typeface="Cambria" pitchFamily="34" charset="-122"/>
+                <a:cs typeface="Cambria" pitchFamily="34" charset="-120"/>
+              </a:rPr>
+              <a:t>Job History</a:t>
+            </a:r>
+            <a:endParaRPr lang="en-US" sz="1800" dirty="0"/>
+          </a:p>
+        </p:txBody>
+      </p:sp>
+      <p:sp>
+        <p:nvSpPr>
+          <p:cNvPr id="22" name="Text 20"/>
+          <p:cNvSpPr txBox="1"/>
+          <p:nvPr/>
+        </p:nvSpPr>
+        <p:spPr>
+          <a:xfrm>
+            <a:off x="6547104" y="4315968"/>
+            <a:ext cx="4773168" cy="274320"/>
+          </a:xfrm>
+          <a:prstGeom prst="rect">
+            <a:avLst/>
+          </a:prstGeom>
+          <a:noFill/>
+          <a:ln/>
+        </p:spPr>
+        <p:txBody>
+          <a:bodyPr wrap="square" lIns="0" tIns="0" rIns="0" bIns="0" rtlCol="0" anchor="ctr"/>
+          <a:lstStyle/>
+          <a:p>
+            <a:pPr indent="0" marL="0">
+              <a:buNone/>
+            </a:pPr>
+            <a:r>
+              <a:rPr lang="en-US" sz="1200" i="1" dirty="0">
+                <a:solidFill>
+                  <a:srgbClr val="028090"/>
+                </a:solidFill>
+                <a:latin typeface="Calibri" pitchFamily="34" charset="0"/>
+                <a:ea typeface="Calibri" pitchFamily="34" charset="-122"/>
+                <a:cs typeface="Calibri" pitchFamily="34" charset="-120"/>
+              </a:rPr>
+              <a:t>Two kinds of run, two kinds of record</a:t>
+            </a:r>
+            <a:endParaRPr lang="en-US" sz="1200" dirty="0"/>
+          </a:p>
+        </p:txBody>
+      </p:sp>
+      <p:sp>
+        <p:nvSpPr>
+          <p:cNvPr id="23" name="Text 21"/>
+          <p:cNvSpPr txBox="1"/>
+          <p:nvPr/>
+        </p:nvSpPr>
+        <p:spPr>
+          <a:xfrm>
+            <a:off x="6547104" y="4626864"/>
+            <a:ext cx="4773168" cy="1060704"/>
+          </a:xfrm>
+          <a:prstGeom prst="rect">
+            <a:avLst/>
+          </a:prstGeom>
+          <a:noFill/>
+          <a:ln/>
+        </p:spPr>
+        <p:txBody>
+          <a:bodyPr wrap="square" lIns="0" tIns="0" rIns="0" bIns="0" rtlCol="0" anchor="ctr"/>
+          <a:lstStyle/>
+          <a:p>
+            <a:pPr marL="342900" indent="-342900">
+              <a:lnSpc>
+                <a:spcPts val="1500"/>
+              </a:lnSpc>
+              <a:spcAft>
+                <a:spcPts val="500"/>
+              </a:spcAft>
+              <a:buSzPct val="100000"/>
+              <a:buChar char="•"/>
+            </a:pPr>
+            <a:r>
+              <a:rPr lang="en-US" sz="1150" dirty="0">
+                <a:solidFill>
+                  <a:srgbClr val="5E6E7E"/>
+                </a:solidFill>
+                <a:latin typeface="Calibri" pitchFamily="34" charset="0"/>
+                <a:ea typeface="Calibri" pitchFamily="34" charset="-122"/>
+                <a:cs typeface="Calibri" pitchFamily="34" charset="-120"/>
+              </a:rPr>
+              <a:t>Strategic jobs show a summary: regime, counts, and every skip reason</a:t>
+            </a:r>
+            <a:endParaRPr lang="en-US" sz="1150" dirty="0"/>
+          </a:p>
+          <a:p>
+            <a:pPr marL="342900" indent="-342900">
+              <a:lnSpc>
+                <a:spcPts val="1500"/>
+              </a:lnSpc>
+              <a:spcAft>
+                <a:spcPts val="500"/>
+              </a:spcAft>
+              <a:buSzPct val="100000"/>
+              <a:buChar char="•"/>
+            </a:pPr>
+            <a:r>
+              <a:rPr lang="en-US" sz="1150" dirty="0">
+                <a:solidFill>
+                  <a:srgbClr val="5E6E7E"/>
+                </a:solidFill>
+                <a:latin typeface="Calibri" pitchFamily="34" charset="0"/>
+                <a:ea typeface="Calibri" pitchFamily="34" charset="-122"/>
+                <a:cs typeface="Calibri" pitchFamily="34" charset="-120"/>
+              </a:rPr>
+              <a:t>Trading-cycle runs keep assessments, decisions, orders and the transcript</a:t>
+            </a:r>
+            <a:endParaRPr lang="en-US" sz="1150" dirty="0"/>
+          </a:p>
+          <a:p>
+            <a:pPr marL="342900" indent="-342900">
+              <a:lnSpc>
+                <a:spcPts val="1500"/>
+              </a:lnSpc>
+              <a:spcAft>
+                <a:spcPts val="500"/>
+              </a:spcAft>
+              <a:buSzPct val="100000"/>
+              <a:buChar char="•"/>
+            </a:pPr>
+            <a:r>
+              <a:rPr lang="en-US" sz="1150" dirty="0">
+                <a:solidFill>
+                  <a:srgbClr val="5E6E7E"/>
+                </a:solidFill>
+                <a:latin typeface="Calibri" pitchFamily="34" charset="0"/>
+                <a:ea typeface="Calibri" pitchFamily="34" charset="-122"/>
+                <a:cs typeface="Calibri" pitchFamily="34" charset="-120"/>
+              </a:rPr>
+              <a:t>The layouts differ because the evidence differs</a:t>
+            </a:r>
+            <a:endParaRPr lang="en-US" sz="1150" dirty="0"/>
+          </a:p>
+        </p:txBody>
+      </p:sp>
+      <p:sp>
+        <p:nvSpPr>
+          <p:cNvPr id="24" name="Text 22"/>
+          <p:cNvSpPr txBox="1"/>
+          <p:nvPr/>
+        </p:nvSpPr>
+        <p:spPr>
+          <a:xfrm>
+            <a:off x="566928" y="6053328"/>
+            <a:ext cx="11055096" cy="292608"/>
+          </a:xfrm>
+          <a:prstGeom prst="rect">
+            <a:avLst/>
+          </a:prstGeom>
+          <a:noFill/>
+          <a:ln/>
+        </p:spPr>
+        <p:txBody>
+          <a:bodyPr wrap="square" lIns="0" tIns="0" rIns="0" bIns="0" rtlCol="0" anchor="ctr"/>
+          <a:lstStyle/>
+          <a:p>
+            <a:pPr indent="0" marL="0">
+              <a:buNone/>
+            </a:pPr>
+            <a:r>
+              <a:rPr lang="en-US" sz="1250" i="1" dirty="0">
+                <a:solidFill>
+                  <a:srgbClr val="5E6E7E"/>
+                </a:solidFill>
+                <a:latin typeface="Cambria" pitchFamily="34" charset="0"/>
+                <a:ea typeface="Cambria" pitchFamily="34" charset="-122"/>
+                <a:cs typeface="Cambria" pitchFamily="34" charset="-120"/>
+              </a:rPr>
+              <a:t>Everything the system decided on its own has to be visible somewhere — otherwise patience is indistinguishable from a bug.</a:t>
+            </a:r>
+            <a:endParaRPr lang="en-US" sz="1250" dirty="0"/>
+          </a:p>
+        </p:txBody>
+      </p:sp>
+    </p:spTree>
+  </p:cSld>
+  <p:clrMapOvr>
+    <a:masterClrMapping/>
+  </p:clrMapOvr>
+</p:sld>
+</file>
+
+<file path=ppt/slides/slide19.xml><?xml version="1.0" encoding="utf-8"?>
+<p:sld xmlns:a="http://schemas.openxmlformats.org/drawingml/2006/main" xmlns:r="http://schemas.openxmlformats.org/officeDocument/2006/relationships" xmlns:p="http://schemas.openxmlformats.org/presentationml/2006/main">
+  <p:cSld name="Slide 19">
     <p:bg>
       <p:bgPr>
         <a:solidFill>
@@ -13745,7 +15484,7 @@
         </p:nvSpPr>
         <p:spPr>
           <a:xfrm>
-            <a:off x="9966960" y="4023360"/>
+            <a:off x="9966960" y="4206240"/>
             <a:ext cx="3840480" cy="3840480"/>
           </a:xfrm>
           <a:prstGeom prst="ellipse">
@@ -13795,7 +15534,7 @@
                 <a:ea typeface="Calibri" pitchFamily="34" charset="-122"/>
                 <a:cs typeface="Calibri" pitchFamily="34" charset="-120"/>
               </a:rPr>
-              <a:t>DONE LOOKS LIKE</a:t>
+              <a:t>WHERE THIS STANDS</a:t>
             </a:r>
             <a:endParaRPr lang="en-US" sz="1050" dirty="0"/>
           </a:p>
@@ -13834,7 +15573,7 @@
                 <a:ea typeface="Cambria" pitchFamily="34" charset="-122"/>
                 <a:cs typeface="Cambria" pitchFamily="34" charset="-120"/>
               </a:rPr>
-              <a:t>What we will hold this to</a:t>
+              <a:t>Every criterion, met</a:t>
             </a:r>
             <a:endParaRPr lang="en-US" sz="3000" dirty="0"/>
           </a:p>
@@ -13848,7 +15587,7 @@
         </p:nvSpPr>
         <p:spPr>
           <a:xfrm>
-            <a:off x="566928" y="1536192"/>
+            <a:off x="566928" y="1472184"/>
             <a:ext cx="256032" cy="256032"/>
           </a:xfrm>
           <a:prstGeom prst="roundRect">
@@ -13857,9 +15596,9 @@
             </a:avLst>
           </a:prstGeom>
           <a:solidFill>
-            <a:srgbClr val="0F1B2D"/>
+            <a:srgbClr val="02C39A"/>
           </a:solidFill>
-          <a:ln w="15875">
+          <a:ln w="12700">
             <a:solidFill>
               <a:srgbClr val="02C39A"/>
             </a:solidFill>
@@ -13875,8 +15614,47 @@
         </p:nvSpPr>
         <p:spPr>
           <a:xfrm>
-            <a:off x="1005840" y="1481328"/>
-            <a:ext cx="4937760" cy="384048"/>
+            <a:off x="566928" y="1472184"/>
+            <a:ext cx="256032" cy="256032"/>
+          </a:xfrm>
+          <a:prstGeom prst="rect">
+            <a:avLst/>
+          </a:prstGeom>
+          <a:noFill/>
+          <a:ln/>
+        </p:spPr>
+        <p:txBody>
+          <a:bodyPr wrap="square" lIns="0" tIns="0" rIns="0" bIns="0" rtlCol="0" anchor="ctr"/>
+          <a:lstStyle/>
+          <a:p>
+            <a:pPr algn="ctr" indent="0" marL="0">
+              <a:buNone/>
+            </a:pPr>
+            <a:r>
+              <a:rPr lang="en-US" sz="1100" b="1" dirty="0">
+                <a:solidFill>
+                  <a:srgbClr val="0F1B2D"/>
+                </a:solidFill>
+                <a:latin typeface="Calibri" pitchFamily="34" charset="0"/>
+                <a:ea typeface="Calibri" pitchFamily="34" charset="-122"/>
+                <a:cs typeface="Calibri" pitchFamily="34" charset="-120"/>
+              </a:rPr>
+              <a:t>✓</a:t>
+            </a:r>
+            <a:endParaRPr lang="en-US" sz="1100" dirty="0"/>
+          </a:p>
+        </p:txBody>
+      </p:sp>
+      <p:sp>
+        <p:nvSpPr>
+          <p:cNvPr id="7" name="Text 5"/>
+          <p:cNvSpPr txBox="1"/>
+          <p:nvPr/>
+        </p:nvSpPr>
+        <p:spPr>
+          <a:xfrm>
+            <a:off x="1005840" y="1426464"/>
+            <a:ext cx="4937760" cy="365760"/>
           </a:xfrm>
           <a:prstGeom prst="rect">
             <a:avLst/>
@@ -13890,12 +15668,12 @@
           <a:p>
             <a:pPr indent="0" marL="0">
               <a:lnSpc>
-                <a:spcPts val="1800"/>
+                <a:spcPts val="1700"/>
               </a:lnSpc>
               <a:buNone/>
             </a:pPr>
             <a:r>
-              <a:rPr lang="en-US" sz="1300" dirty="0">
+              <a:rPr lang="en-US" sz="1250" dirty="0">
                 <a:solidFill>
                   <a:srgbClr val="CADCFC"/>
                 </a:solidFill>
@@ -13905,19 +15683,19 @@
               </a:rPr>
               <a:t>The system can go weeks without trading, and that reads as correct</a:t>
             </a:r>
-            <a:endParaRPr lang="en-US" sz="1300" dirty="0"/>
-          </a:p>
-        </p:txBody>
-      </p:sp>
-      <p:sp>
-        <p:nvSpPr>
-          <p:cNvPr id="7" name="Shape 5"/>
+            <a:endParaRPr lang="en-US" sz="1250" dirty="0"/>
+          </a:p>
+        </p:txBody>
+      </p:sp>
+      <p:sp>
+        <p:nvSpPr>
+          <p:cNvPr id="8" name="Shape 6"/>
           <p:cNvSpPr/>
           <p:nvPr/>
         </p:nvSpPr>
         <p:spPr>
           <a:xfrm>
-            <a:off x="6099048" y="1536192"/>
+            <a:off x="6099048" y="1472184"/>
             <a:ext cx="256032" cy="256032"/>
           </a:xfrm>
           <a:prstGeom prst="roundRect">
@@ -13926,9 +15704,9 @@
             </a:avLst>
           </a:prstGeom>
           <a:solidFill>
-            <a:srgbClr val="0F1B2D"/>
+            <a:srgbClr val="02C39A"/>
           </a:solidFill>
-          <a:ln w="15875">
+          <a:ln w="12700">
             <a:solidFill>
               <a:srgbClr val="02C39A"/>
             </a:solidFill>
@@ -13938,14 +15716,53 @@
       </p:sp>
       <p:sp>
         <p:nvSpPr>
-          <p:cNvPr id="8" name="Text 6"/>
-          <p:cNvSpPr txBox="1"/>
-          <p:nvPr/>
-        </p:nvSpPr>
-        <p:spPr>
-          <a:xfrm>
-            <a:off x="6537960" y="1481328"/>
-            <a:ext cx="4937760" cy="384048"/>
+          <p:cNvPr id="9" name="Text 7"/>
+          <p:cNvSpPr txBox="1"/>
+          <p:nvPr/>
+        </p:nvSpPr>
+        <p:spPr>
+          <a:xfrm>
+            <a:off x="6099048" y="1472184"/>
+            <a:ext cx="256032" cy="256032"/>
+          </a:xfrm>
+          <a:prstGeom prst="rect">
+            <a:avLst/>
+          </a:prstGeom>
+          <a:noFill/>
+          <a:ln/>
+        </p:spPr>
+        <p:txBody>
+          <a:bodyPr wrap="square" lIns="0" tIns="0" rIns="0" bIns="0" rtlCol="0" anchor="ctr"/>
+          <a:lstStyle/>
+          <a:p>
+            <a:pPr algn="ctr" indent="0" marL="0">
+              <a:buNone/>
+            </a:pPr>
+            <a:r>
+              <a:rPr lang="en-US" sz="1100" b="1" dirty="0">
+                <a:solidFill>
+                  <a:srgbClr val="0F1B2D"/>
+                </a:solidFill>
+                <a:latin typeface="Calibri" pitchFamily="34" charset="0"/>
+                <a:ea typeface="Calibri" pitchFamily="34" charset="-122"/>
+                <a:cs typeface="Calibri" pitchFamily="34" charset="-120"/>
+              </a:rPr>
+              <a:t>✓</a:t>
+            </a:r>
+            <a:endParaRPr lang="en-US" sz="1100" dirty="0"/>
+          </a:p>
+        </p:txBody>
+      </p:sp>
+      <p:sp>
+        <p:nvSpPr>
+          <p:cNvPr id="10" name="Text 8"/>
+          <p:cNvSpPr txBox="1"/>
+          <p:nvPr/>
+        </p:nvSpPr>
+        <p:spPr>
+          <a:xfrm>
+            <a:off x="6537960" y="1426464"/>
+            <a:ext cx="4937760" cy="365760"/>
           </a:xfrm>
           <a:prstGeom prst="rect">
             <a:avLst/>
@@ -13959,12 +15776,12 @@
           <a:p>
             <a:pPr indent="0" marL="0">
               <a:lnSpc>
-                <a:spcPts val="1800"/>
+                <a:spcPts val="1700"/>
               </a:lnSpc>
               <a:buNone/>
             </a:pPr>
             <a:r>
-              <a:rPr lang="en-US" sz="1300" dirty="0">
+              <a:rPr lang="en-US" sz="1250" dirty="0">
                 <a:solidFill>
                   <a:srgbClr val="CADCFC"/>
                 </a:solidFill>
@@ -13974,19 +15791,19 @@
               </a:rPr>
               <a:t>Trades fire only when conviction and regime agree</a:t>
             </a:r>
-            <a:endParaRPr lang="en-US" sz="1300" dirty="0"/>
-          </a:p>
-        </p:txBody>
-      </p:sp>
-      <p:sp>
-        <p:nvSpPr>
-          <p:cNvPr id="9" name="Shape 7"/>
+            <a:endParaRPr lang="en-US" sz="1250" dirty="0"/>
+          </a:p>
+        </p:txBody>
+      </p:sp>
+      <p:sp>
+        <p:nvSpPr>
+          <p:cNvPr id="11" name="Shape 9"/>
           <p:cNvSpPr/>
           <p:nvPr/>
         </p:nvSpPr>
         <p:spPr>
           <a:xfrm>
-            <a:off x="566928" y="2194560"/>
+            <a:off x="566928" y="2039112"/>
             <a:ext cx="256032" cy="256032"/>
           </a:xfrm>
           <a:prstGeom prst="roundRect">
@@ -13995,9 +15812,9 @@
             </a:avLst>
           </a:prstGeom>
           <a:solidFill>
-            <a:srgbClr val="0F1B2D"/>
+            <a:srgbClr val="02C39A"/>
           </a:solidFill>
-          <a:ln w="15875">
+          <a:ln w="12700">
             <a:solidFill>
               <a:srgbClr val="02C39A"/>
             </a:solidFill>
@@ -14007,14 +15824,53 @@
       </p:sp>
       <p:sp>
         <p:nvSpPr>
-          <p:cNvPr id="10" name="Text 8"/>
-          <p:cNvSpPr txBox="1"/>
-          <p:nvPr/>
-        </p:nvSpPr>
-        <p:spPr>
-          <a:xfrm>
-            <a:off x="1005840" y="2139696"/>
-            <a:ext cx="4937760" cy="384048"/>
+          <p:cNvPr id="12" name="Text 10"/>
+          <p:cNvSpPr txBox="1"/>
+          <p:nvPr/>
+        </p:nvSpPr>
+        <p:spPr>
+          <a:xfrm>
+            <a:off x="566928" y="2039112"/>
+            <a:ext cx="256032" cy="256032"/>
+          </a:xfrm>
+          <a:prstGeom prst="rect">
+            <a:avLst/>
+          </a:prstGeom>
+          <a:noFill/>
+          <a:ln/>
+        </p:spPr>
+        <p:txBody>
+          <a:bodyPr wrap="square" lIns="0" tIns="0" rIns="0" bIns="0" rtlCol="0" anchor="ctr"/>
+          <a:lstStyle/>
+          <a:p>
+            <a:pPr algn="ctr" indent="0" marL="0">
+              <a:buNone/>
+            </a:pPr>
+            <a:r>
+              <a:rPr lang="en-US" sz="1100" b="1" dirty="0">
+                <a:solidFill>
+                  <a:srgbClr val="0F1B2D"/>
+                </a:solidFill>
+                <a:latin typeface="Calibri" pitchFamily="34" charset="0"/>
+                <a:ea typeface="Calibri" pitchFamily="34" charset="-122"/>
+                <a:cs typeface="Calibri" pitchFamily="34" charset="-120"/>
+              </a:rPr>
+              <a:t>✓</a:t>
+            </a:r>
+            <a:endParaRPr lang="en-US" sz="1100" dirty="0"/>
+          </a:p>
+        </p:txBody>
+      </p:sp>
+      <p:sp>
+        <p:nvSpPr>
+          <p:cNvPr id="13" name="Text 11"/>
+          <p:cNvSpPr txBox="1"/>
+          <p:nvPr/>
+        </p:nvSpPr>
+        <p:spPr>
+          <a:xfrm>
+            <a:off x="1005840" y="1993392"/>
+            <a:ext cx="4937760" cy="365760"/>
           </a:xfrm>
           <a:prstGeom prst="rect">
             <a:avLst/>
@@ -14028,12 +15884,12 @@
           <a:p>
             <a:pPr indent="0" marL="0">
               <a:lnSpc>
-                <a:spcPts val="1800"/>
+                <a:spcPts val="1700"/>
               </a:lnSpc>
               <a:buNone/>
             </a:pPr>
             <a:r>
-              <a:rPr lang="en-US" sz="1300" dirty="0">
+              <a:rPr lang="en-US" sz="1250" dirty="0">
                 <a:solidFill>
                   <a:srgbClr val="CADCFC"/>
                 </a:solidFill>
@@ -14043,19 +15899,19 @@
               </a:rPr>
               <a:t>Any day is explainable: why we did or didn't trade</a:t>
             </a:r>
-            <a:endParaRPr lang="en-US" sz="1300" dirty="0"/>
-          </a:p>
-        </p:txBody>
-      </p:sp>
-      <p:sp>
-        <p:nvSpPr>
-          <p:cNvPr id="11" name="Shape 9"/>
+            <a:endParaRPr lang="en-US" sz="1250" dirty="0"/>
+          </a:p>
+        </p:txBody>
+      </p:sp>
+      <p:sp>
+        <p:nvSpPr>
+          <p:cNvPr id="14" name="Shape 12"/>
           <p:cNvSpPr/>
           <p:nvPr/>
         </p:nvSpPr>
         <p:spPr>
           <a:xfrm>
-            <a:off x="6099048" y="2194560"/>
+            <a:off x="6099048" y="2039112"/>
             <a:ext cx="256032" cy="256032"/>
           </a:xfrm>
           <a:prstGeom prst="roundRect">
@@ -14064,9 +15920,9 @@
             </a:avLst>
           </a:prstGeom>
           <a:solidFill>
-            <a:srgbClr val="0F1B2D"/>
+            <a:srgbClr val="02C39A"/>
           </a:solidFill>
-          <a:ln w="15875">
+          <a:ln w="12700">
             <a:solidFill>
               <a:srgbClr val="02C39A"/>
             </a:solidFill>
@@ -14076,14 +15932,53 @@
       </p:sp>
       <p:sp>
         <p:nvSpPr>
-          <p:cNvPr id="12" name="Text 10"/>
-          <p:cNvSpPr txBox="1"/>
-          <p:nvPr/>
-        </p:nvSpPr>
-        <p:spPr>
-          <a:xfrm>
-            <a:off x="6537960" y="2139696"/>
-            <a:ext cx="4937760" cy="384048"/>
+          <p:cNvPr id="15" name="Text 13"/>
+          <p:cNvSpPr txBox="1"/>
+          <p:nvPr/>
+        </p:nvSpPr>
+        <p:spPr>
+          <a:xfrm>
+            <a:off x="6099048" y="2039112"/>
+            <a:ext cx="256032" cy="256032"/>
+          </a:xfrm>
+          <a:prstGeom prst="rect">
+            <a:avLst/>
+          </a:prstGeom>
+          <a:noFill/>
+          <a:ln/>
+        </p:spPr>
+        <p:txBody>
+          <a:bodyPr wrap="square" lIns="0" tIns="0" rIns="0" bIns="0" rtlCol="0" anchor="ctr"/>
+          <a:lstStyle/>
+          <a:p>
+            <a:pPr algn="ctr" indent="0" marL="0">
+              <a:buNone/>
+            </a:pPr>
+            <a:r>
+              <a:rPr lang="en-US" sz="1100" b="1" dirty="0">
+                <a:solidFill>
+                  <a:srgbClr val="0F1B2D"/>
+                </a:solidFill>
+                <a:latin typeface="Calibri" pitchFamily="34" charset="0"/>
+                <a:ea typeface="Calibri" pitchFamily="34" charset="-122"/>
+                <a:cs typeface="Calibri" pitchFamily="34" charset="-120"/>
+              </a:rPr>
+              <a:t>✓</a:t>
+            </a:r>
+            <a:endParaRPr lang="en-US" sz="1100" dirty="0"/>
+          </a:p>
+        </p:txBody>
+      </p:sp>
+      <p:sp>
+        <p:nvSpPr>
+          <p:cNvPr id="16" name="Text 14"/>
+          <p:cNvSpPr txBox="1"/>
+          <p:nvPr/>
+        </p:nvSpPr>
+        <p:spPr>
+          <a:xfrm>
+            <a:off x="6537960" y="1993392"/>
+            <a:ext cx="4937760" cy="365760"/>
           </a:xfrm>
           <a:prstGeom prst="rect">
             <a:avLst/>
@@ -14097,12 +15992,12 @@
           <a:p>
             <a:pPr indent="0" marL="0">
               <a:lnSpc>
-                <a:spcPts val="1800"/>
+                <a:spcPts val="1700"/>
               </a:lnSpc>
               <a:buNone/>
             </a:pPr>
             <a:r>
-              <a:rPr lang="en-US" sz="1300" dirty="0">
+              <a:rPr lang="en-US" sz="1250" dirty="0">
                 <a:solidFill>
                   <a:srgbClr val="CADCFC"/>
                 </a:solidFill>
@@ -14112,19 +16007,19 @@
               </a:rPr>
               <a:t>Hedging happens automatically when the regime turns</a:t>
             </a:r>
-            <a:endParaRPr lang="en-US" sz="1300" dirty="0"/>
-          </a:p>
-        </p:txBody>
-      </p:sp>
-      <p:sp>
-        <p:nvSpPr>
-          <p:cNvPr id="13" name="Shape 11"/>
+            <a:endParaRPr lang="en-US" sz="1250" dirty="0"/>
+          </a:p>
+        </p:txBody>
+      </p:sp>
+      <p:sp>
+        <p:nvSpPr>
+          <p:cNvPr id="17" name="Shape 15"/>
           <p:cNvSpPr/>
           <p:nvPr/>
         </p:nvSpPr>
         <p:spPr>
           <a:xfrm>
-            <a:off x="566928" y="2852928"/>
+            <a:off x="566928" y="2606040"/>
             <a:ext cx="256032" cy="256032"/>
           </a:xfrm>
           <a:prstGeom prst="roundRect">
@@ -14133,9 +16028,9 @@
             </a:avLst>
           </a:prstGeom>
           <a:solidFill>
-            <a:srgbClr val="0F1B2D"/>
+            <a:srgbClr val="02C39A"/>
           </a:solidFill>
-          <a:ln w="15875">
+          <a:ln w="12700">
             <a:solidFill>
               <a:srgbClr val="02C39A"/>
             </a:solidFill>
@@ -14145,14 +16040,53 @@
       </p:sp>
       <p:sp>
         <p:nvSpPr>
-          <p:cNvPr id="14" name="Text 12"/>
-          <p:cNvSpPr txBox="1"/>
-          <p:nvPr/>
-        </p:nvSpPr>
-        <p:spPr>
-          <a:xfrm>
-            <a:off x="1005840" y="2798064"/>
-            <a:ext cx="4937760" cy="384048"/>
+          <p:cNvPr id="18" name="Text 16"/>
+          <p:cNvSpPr txBox="1"/>
+          <p:nvPr/>
+        </p:nvSpPr>
+        <p:spPr>
+          <a:xfrm>
+            <a:off x="566928" y="2606040"/>
+            <a:ext cx="256032" cy="256032"/>
+          </a:xfrm>
+          <a:prstGeom prst="rect">
+            <a:avLst/>
+          </a:prstGeom>
+          <a:noFill/>
+          <a:ln/>
+        </p:spPr>
+        <p:txBody>
+          <a:bodyPr wrap="square" lIns="0" tIns="0" rIns="0" bIns="0" rtlCol="0" anchor="ctr"/>
+          <a:lstStyle/>
+          <a:p>
+            <a:pPr algn="ctr" indent="0" marL="0">
+              <a:buNone/>
+            </a:pPr>
+            <a:r>
+              <a:rPr lang="en-US" sz="1100" b="1" dirty="0">
+                <a:solidFill>
+                  <a:srgbClr val="0F1B2D"/>
+                </a:solidFill>
+                <a:latin typeface="Calibri" pitchFamily="34" charset="0"/>
+                <a:ea typeface="Calibri" pitchFamily="34" charset="-122"/>
+                <a:cs typeface="Calibri" pitchFamily="34" charset="-120"/>
+              </a:rPr>
+              <a:t>✓</a:t>
+            </a:r>
+            <a:endParaRPr lang="en-US" sz="1100" dirty="0"/>
+          </a:p>
+        </p:txBody>
+      </p:sp>
+      <p:sp>
+        <p:nvSpPr>
+          <p:cNvPr id="19" name="Text 17"/>
+          <p:cNvSpPr txBox="1"/>
+          <p:nvPr/>
+        </p:nvSpPr>
+        <p:spPr>
+          <a:xfrm>
+            <a:off x="1005840" y="2560320"/>
+            <a:ext cx="4937760" cy="365760"/>
           </a:xfrm>
           <a:prstGeom prst="rect">
             <a:avLst/>
@@ -14166,12 +16100,12 @@
           <a:p>
             <a:pPr indent="0" marL="0">
               <a:lnSpc>
-                <a:spcPts val="1800"/>
+                <a:spcPts val="1700"/>
               </a:lnSpc>
               <a:buNone/>
             </a:pPr>
             <a:r>
-              <a:rPr lang="en-US" sz="1300" dirty="0">
+              <a:rPr lang="en-US" sz="1250" dirty="0">
                 <a:solidFill>
                   <a:srgbClr val="CADCFC"/>
                 </a:solidFill>
@@ -14181,19 +16115,19 @@
               </a:rPr>
               <a:t>Watchlist changes are rare, deliberate and self-classifying</a:t>
             </a:r>
-            <a:endParaRPr lang="en-US" sz="1300" dirty="0"/>
-          </a:p>
-        </p:txBody>
-      </p:sp>
-      <p:sp>
-        <p:nvSpPr>
-          <p:cNvPr id="15" name="Shape 13"/>
+            <a:endParaRPr lang="en-US" sz="1250" dirty="0"/>
+          </a:p>
+        </p:txBody>
+      </p:sp>
+      <p:sp>
+        <p:nvSpPr>
+          <p:cNvPr id="20" name="Shape 18"/>
           <p:cNvSpPr/>
           <p:nvPr/>
         </p:nvSpPr>
         <p:spPr>
           <a:xfrm>
-            <a:off x="6099048" y="2852928"/>
+            <a:off x="6099048" y="2606040"/>
             <a:ext cx="256032" cy="256032"/>
           </a:xfrm>
           <a:prstGeom prst="roundRect">
@@ -14202,9 +16136,9 @@
             </a:avLst>
           </a:prstGeom>
           <a:solidFill>
-            <a:srgbClr val="0F1B2D"/>
+            <a:srgbClr val="02C39A"/>
           </a:solidFill>
-          <a:ln w="15875">
+          <a:ln w="12700">
             <a:solidFill>
               <a:srgbClr val="02C39A"/>
             </a:solidFill>
@@ -14214,14 +16148,53 @@
       </p:sp>
       <p:sp>
         <p:nvSpPr>
-          <p:cNvPr id="16" name="Text 14"/>
-          <p:cNvSpPr txBox="1"/>
-          <p:nvPr/>
-        </p:nvSpPr>
-        <p:spPr>
-          <a:xfrm>
-            <a:off x="6537960" y="2798064"/>
-            <a:ext cx="4937760" cy="384048"/>
+          <p:cNvPr id="21" name="Text 19"/>
+          <p:cNvSpPr txBox="1"/>
+          <p:nvPr/>
+        </p:nvSpPr>
+        <p:spPr>
+          <a:xfrm>
+            <a:off x="6099048" y="2606040"/>
+            <a:ext cx="256032" cy="256032"/>
+          </a:xfrm>
+          <a:prstGeom prst="rect">
+            <a:avLst/>
+          </a:prstGeom>
+          <a:noFill/>
+          <a:ln/>
+        </p:spPr>
+        <p:txBody>
+          <a:bodyPr wrap="square" lIns="0" tIns="0" rIns="0" bIns="0" rtlCol="0" anchor="ctr"/>
+          <a:lstStyle/>
+          <a:p>
+            <a:pPr algn="ctr" indent="0" marL="0">
+              <a:buNone/>
+            </a:pPr>
+            <a:r>
+              <a:rPr lang="en-US" sz="1100" b="1" dirty="0">
+                <a:solidFill>
+                  <a:srgbClr val="0F1B2D"/>
+                </a:solidFill>
+                <a:latin typeface="Calibri" pitchFamily="34" charset="0"/>
+                <a:ea typeface="Calibri" pitchFamily="34" charset="-122"/>
+                <a:cs typeface="Calibri" pitchFamily="34" charset="-120"/>
+              </a:rPr>
+              <a:t>✓</a:t>
+            </a:r>
+            <a:endParaRPr lang="en-US" sz="1100" dirty="0"/>
+          </a:p>
+        </p:txBody>
+      </p:sp>
+      <p:sp>
+        <p:nvSpPr>
+          <p:cNvPr id="22" name="Text 20"/>
+          <p:cNvSpPr txBox="1"/>
+          <p:nvPr/>
+        </p:nvSpPr>
+        <p:spPr>
+          <a:xfrm>
+            <a:off x="6537960" y="2560320"/>
+            <a:ext cx="4937760" cy="365760"/>
           </a:xfrm>
           <a:prstGeom prst="rect">
             <a:avLst/>
@@ -14235,12 +16208,12 @@
           <a:p>
             <a:pPr indent="0" marL="0">
               <a:lnSpc>
-                <a:spcPts val="1800"/>
+                <a:spcPts val="1700"/>
               </a:lnSpc>
               <a:buNone/>
             </a:pPr>
             <a:r>
-              <a:rPr lang="en-US" sz="1300" dirty="0">
+              <a:rPr lang="en-US" sz="1250" dirty="0">
                 <a:solidFill>
                   <a:srgbClr val="CADCFC"/>
                 </a:solidFill>
@@ -14250,19 +16223,19 @@
               </a:rPr>
               <a:t>Signal history is deep enough to backtest against</a:t>
             </a:r>
-            <a:endParaRPr lang="en-US" sz="1300" dirty="0"/>
-          </a:p>
-        </p:txBody>
-      </p:sp>
-      <p:sp>
-        <p:nvSpPr>
-          <p:cNvPr id="17" name="Shape 15"/>
+            <a:endParaRPr lang="en-US" sz="1250" dirty="0"/>
+          </a:p>
+        </p:txBody>
+      </p:sp>
+      <p:sp>
+        <p:nvSpPr>
+          <p:cNvPr id="23" name="Shape 21"/>
           <p:cNvSpPr/>
           <p:nvPr/>
         </p:nvSpPr>
         <p:spPr>
           <a:xfrm>
-            <a:off x="566928" y="3511296"/>
+            <a:off x="566928" y="3172968"/>
             <a:ext cx="256032" cy="256032"/>
           </a:xfrm>
           <a:prstGeom prst="roundRect">
@@ -14271,9 +16244,9 @@
             </a:avLst>
           </a:prstGeom>
           <a:solidFill>
-            <a:srgbClr val="0F1B2D"/>
+            <a:srgbClr val="02C39A"/>
           </a:solidFill>
-          <a:ln w="15875">
+          <a:ln w="12700">
             <a:solidFill>
               <a:srgbClr val="02C39A"/>
             </a:solidFill>
@@ -14283,14 +16256,53 @@
       </p:sp>
       <p:sp>
         <p:nvSpPr>
-          <p:cNvPr id="18" name="Text 16"/>
-          <p:cNvSpPr txBox="1"/>
-          <p:nvPr/>
-        </p:nvSpPr>
-        <p:spPr>
-          <a:xfrm>
-            <a:off x="1005840" y="3456432"/>
-            <a:ext cx="4937760" cy="384048"/>
+          <p:cNvPr id="24" name="Text 22"/>
+          <p:cNvSpPr txBox="1"/>
+          <p:nvPr/>
+        </p:nvSpPr>
+        <p:spPr>
+          <a:xfrm>
+            <a:off x="566928" y="3172968"/>
+            <a:ext cx="256032" cy="256032"/>
+          </a:xfrm>
+          <a:prstGeom prst="rect">
+            <a:avLst/>
+          </a:prstGeom>
+          <a:noFill/>
+          <a:ln/>
+        </p:spPr>
+        <p:txBody>
+          <a:bodyPr wrap="square" lIns="0" tIns="0" rIns="0" bIns="0" rtlCol="0" anchor="ctr"/>
+          <a:lstStyle/>
+          <a:p>
+            <a:pPr algn="ctr" indent="0" marL="0">
+              <a:buNone/>
+            </a:pPr>
+            <a:r>
+              <a:rPr lang="en-US" sz="1100" b="1" dirty="0">
+                <a:solidFill>
+                  <a:srgbClr val="0F1B2D"/>
+                </a:solidFill>
+                <a:latin typeface="Calibri" pitchFamily="34" charset="0"/>
+                <a:ea typeface="Calibri" pitchFamily="34" charset="-122"/>
+                <a:cs typeface="Calibri" pitchFamily="34" charset="-120"/>
+              </a:rPr>
+              <a:t>✓</a:t>
+            </a:r>
+            <a:endParaRPr lang="en-US" sz="1100" dirty="0"/>
+          </a:p>
+        </p:txBody>
+      </p:sp>
+      <p:sp>
+        <p:nvSpPr>
+          <p:cNvPr id="25" name="Text 23"/>
+          <p:cNvSpPr txBox="1"/>
+          <p:nvPr/>
+        </p:nvSpPr>
+        <p:spPr>
+          <a:xfrm>
+            <a:off x="1005840" y="3127248"/>
+            <a:ext cx="4937760" cy="365760"/>
           </a:xfrm>
           <a:prstGeom prst="rect">
             <a:avLst/>
@@ -14304,12 +16316,12 @@
           <a:p>
             <a:pPr indent="0" marL="0">
               <a:lnSpc>
-                <a:spcPts val="1800"/>
+                <a:spcPts val="1700"/>
               </a:lnSpc>
               <a:buNone/>
             </a:pPr>
             <a:r>
-              <a:rPr lang="en-US" sz="1300" dirty="0">
+              <a:rPr lang="en-US" sz="1250" dirty="0">
                 <a:solidFill>
                   <a:srgbClr val="CADCFC"/>
                 </a:solidFill>
@@ -14319,19 +16331,19 @@
               </a:rPr>
               <a:t>No sector exceeds 30% of the portfolio</a:t>
             </a:r>
-            <a:endParaRPr lang="en-US" sz="1300" dirty="0"/>
-          </a:p>
-        </p:txBody>
-      </p:sp>
-      <p:sp>
-        <p:nvSpPr>
-          <p:cNvPr id="19" name="Shape 17"/>
+            <a:endParaRPr lang="en-US" sz="1250" dirty="0"/>
+          </a:p>
+        </p:txBody>
+      </p:sp>
+      <p:sp>
+        <p:nvSpPr>
+          <p:cNvPr id="26" name="Shape 24"/>
           <p:cNvSpPr/>
           <p:nvPr/>
         </p:nvSpPr>
         <p:spPr>
           <a:xfrm>
-            <a:off x="6099048" y="3511296"/>
+            <a:off x="6099048" y="3172968"/>
             <a:ext cx="256032" cy="256032"/>
           </a:xfrm>
           <a:prstGeom prst="roundRect">
@@ -14340,9 +16352,9 @@
             </a:avLst>
           </a:prstGeom>
           <a:solidFill>
-            <a:srgbClr val="0F1B2D"/>
+            <a:srgbClr val="02C39A"/>
           </a:solidFill>
-          <a:ln w="15875">
+          <a:ln w="12700">
             <a:solidFill>
               <a:srgbClr val="02C39A"/>
             </a:solidFill>
@@ -14352,14 +16364,53 @@
       </p:sp>
       <p:sp>
         <p:nvSpPr>
-          <p:cNvPr id="20" name="Text 18"/>
-          <p:cNvSpPr txBox="1"/>
-          <p:nvPr/>
-        </p:nvSpPr>
-        <p:spPr>
-          <a:xfrm>
-            <a:off x="6537960" y="3456432"/>
-            <a:ext cx="4937760" cy="384048"/>
+          <p:cNvPr id="27" name="Text 25"/>
+          <p:cNvSpPr txBox="1"/>
+          <p:nvPr/>
+        </p:nvSpPr>
+        <p:spPr>
+          <a:xfrm>
+            <a:off x="6099048" y="3172968"/>
+            <a:ext cx="256032" cy="256032"/>
+          </a:xfrm>
+          <a:prstGeom prst="rect">
+            <a:avLst/>
+          </a:prstGeom>
+          <a:noFill/>
+          <a:ln/>
+        </p:spPr>
+        <p:txBody>
+          <a:bodyPr wrap="square" lIns="0" tIns="0" rIns="0" bIns="0" rtlCol="0" anchor="ctr"/>
+          <a:lstStyle/>
+          <a:p>
+            <a:pPr algn="ctr" indent="0" marL="0">
+              <a:buNone/>
+            </a:pPr>
+            <a:r>
+              <a:rPr lang="en-US" sz="1100" b="1" dirty="0">
+                <a:solidFill>
+                  <a:srgbClr val="0F1B2D"/>
+                </a:solidFill>
+                <a:latin typeface="Calibri" pitchFamily="34" charset="0"/>
+                <a:ea typeface="Calibri" pitchFamily="34" charset="-122"/>
+                <a:cs typeface="Calibri" pitchFamily="34" charset="-120"/>
+              </a:rPr>
+              <a:t>✓</a:t>
+            </a:r>
+            <a:endParaRPr lang="en-US" sz="1100" dirty="0"/>
+          </a:p>
+        </p:txBody>
+      </p:sp>
+      <p:sp>
+        <p:nvSpPr>
+          <p:cNvPr id="28" name="Text 26"/>
+          <p:cNvSpPr txBox="1"/>
+          <p:nvPr/>
+        </p:nvSpPr>
+        <p:spPr>
+          <a:xfrm>
+            <a:off x="6537960" y="3127248"/>
+            <a:ext cx="4937760" cy="365760"/>
           </a:xfrm>
           <a:prstGeom prst="rect">
             <a:avLst/>
@@ -14373,12 +16424,12 @@
           <a:p>
             <a:pPr indent="0" marL="0">
               <a:lnSpc>
-                <a:spcPts val="1800"/>
+                <a:spcPts val="1700"/>
               </a:lnSpc>
               <a:buNone/>
             </a:pPr>
             <a:r>
-              <a:rPr lang="en-US" sz="1300" dirty="0">
+              <a:rPr lang="en-US" sz="1250" dirty="0">
                 <a:solidFill>
                   <a:srgbClr val="CADCFC"/>
                 </a:solidFill>
@@ -14388,24 +16439,240 @@
               </a:rPr>
               <a:t>Smoothing keeps single-day noise from moving money</a:t>
             </a:r>
-            <a:endParaRPr lang="en-US" sz="1300" dirty="0"/>
-          </a:p>
-        </p:txBody>
-      </p:sp>
-      <p:sp>
-        <p:nvSpPr>
-          <p:cNvPr id="21" name="Shape 19"/>
+            <a:endParaRPr lang="en-US" sz="1250" dirty="0"/>
+          </a:p>
+        </p:txBody>
+      </p:sp>
+      <p:sp>
+        <p:nvSpPr>
+          <p:cNvPr id="29" name="Shape 27"/>
           <p:cNvSpPr/>
           <p:nvPr/>
         </p:nvSpPr>
         <p:spPr>
           <a:xfrm>
-            <a:off x="566928" y="4315968"/>
-            <a:ext cx="11055096" cy="1234440"/>
+            <a:off x="566928" y="3739896"/>
+            <a:ext cx="256032" cy="256032"/>
           </a:xfrm>
           <a:prstGeom prst="roundRect">
             <a:avLst>
-              <a:gd name="adj" fmla="val 4444"/>
+              <a:gd name="adj" fmla="val 14286"/>
+            </a:avLst>
+          </a:prstGeom>
+          <a:solidFill>
+            <a:srgbClr val="02C39A"/>
+          </a:solidFill>
+          <a:ln w="12700">
+            <a:solidFill>
+              <a:srgbClr val="02C39A"/>
+            </a:solidFill>
+            <a:prstDash val="solid"/>
+          </a:ln>
+        </p:spPr>
+      </p:sp>
+      <p:sp>
+        <p:nvSpPr>
+          <p:cNvPr id="30" name="Text 28"/>
+          <p:cNvSpPr txBox="1"/>
+          <p:nvPr/>
+        </p:nvSpPr>
+        <p:spPr>
+          <a:xfrm>
+            <a:off x="566928" y="3739896"/>
+            <a:ext cx="256032" cy="256032"/>
+          </a:xfrm>
+          <a:prstGeom prst="rect">
+            <a:avLst/>
+          </a:prstGeom>
+          <a:noFill/>
+          <a:ln/>
+        </p:spPr>
+        <p:txBody>
+          <a:bodyPr wrap="square" lIns="0" tIns="0" rIns="0" bIns="0" rtlCol="0" anchor="ctr"/>
+          <a:lstStyle/>
+          <a:p>
+            <a:pPr algn="ctr" indent="0" marL="0">
+              <a:buNone/>
+            </a:pPr>
+            <a:r>
+              <a:rPr lang="en-US" sz="1100" b="1" dirty="0">
+                <a:solidFill>
+                  <a:srgbClr val="0F1B2D"/>
+                </a:solidFill>
+                <a:latin typeface="Calibri" pitchFamily="34" charset="0"/>
+                <a:ea typeface="Calibri" pitchFamily="34" charset="-122"/>
+                <a:cs typeface="Calibri" pitchFamily="34" charset="-120"/>
+              </a:rPr>
+              <a:t>✓</a:t>
+            </a:r>
+            <a:endParaRPr lang="en-US" sz="1100" dirty="0"/>
+          </a:p>
+        </p:txBody>
+      </p:sp>
+      <p:sp>
+        <p:nvSpPr>
+          <p:cNvPr id="31" name="Text 29"/>
+          <p:cNvSpPr txBox="1"/>
+          <p:nvPr/>
+        </p:nvSpPr>
+        <p:spPr>
+          <a:xfrm>
+            <a:off x="1005840" y="3694176"/>
+            <a:ext cx="4937760" cy="365760"/>
+          </a:xfrm>
+          <a:prstGeom prst="rect">
+            <a:avLst/>
+          </a:prstGeom>
+          <a:noFill/>
+          <a:ln/>
+        </p:spPr>
+        <p:txBody>
+          <a:bodyPr wrap="square" lIns="0" tIns="0" rIns="0" bIns="0" rtlCol="0" anchor="ctr"/>
+          <a:lstStyle/>
+          <a:p>
+            <a:pPr indent="0" marL="0">
+              <a:lnSpc>
+                <a:spcPts val="1700"/>
+              </a:lnSpc>
+              <a:buNone/>
+            </a:pPr>
+            <a:r>
+              <a:rPr lang="en-US" sz="1250" dirty="0">
+                <a:solidFill>
+                  <a:srgbClr val="CADCFC"/>
+                </a:solidFill>
+                <a:latin typeface="Calibri" pitchFamily="34" charset="0"/>
+                <a:ea typeface="Calibri" pitchFamily="34" charset="-122"/>
+                <a:cs typeface="Calibri" pitchFamily="34" charset="-120"/>
+              </a:rPr>
+              <a:t>Positions are monitored for TRIM signals, not only the watchlist</a:t>
+            </a:r>
+            <a:endParaRPr lang="en-US" sz="1250" dirty="0"/>
+          </a:p>
+        </p:txBody>
+      </p:sp>
+      <p:sp>
+        <p:nvSpPr>
+          <p:cNvPr id="32" name="Shape 30"/>
+          <p:cNvSpPr/>
+          <p:nvPr/>
+        </p:nvSpPr>
+        <p:spPr>
+          <a:xfrm>
+            <a:off x="6099048" y="3739896"/>
+            <a:ext cx="256032" cy="256032"/>
+          </a:xfrm>
+          <a:prstGeom prst="roundRect">
+            <a:avLst>
+              <a:gd name="adj" fmla="val 14286"/>
+            </a:avLst>
+          </a:prstGeom>
+          <a:solidFill>
+            <a:srgbClr val="02C39A"/>
+          </a:solidFill>
+          <a:ln w="12700">
+            <a:solidFill>
+              <a:srgbClr val="02C39A"/>
+            </a:solidFill>
+            <a:prstDash val="solid"/>
+          </a:ln>
+        </p:spPr>
+      </p:sp>
+      <p:sp>
+        <p:nvSpPr>
+          <p:cNvPr id="33" name="Text 31"/>
+          <p:cNvSpPr txBox="1"/>
+          <p:nvPr/>
+        </p:nvSpPr>
+        <p:spPr>
+          <a:xfrm>
+            <a:off x="6099048" y="3739896"/>
+            <a:ext cx="256032" cy="256032"/>
+          </a:xfrm>
+          <a:prstGeom prst="rect">
+            <a:avLst/>
+          </a:prstGeom>
+          <a:noFill/>
+          <a:ln/>
+        </p:spPr>
+        <p:txBody>
+          <a:bodyPr wrap="square" lIns="0" tIns="0" rIns="0" bIns="0" rtlCol="0" anchor="ctr"/>
+          <a:lstStyle/>
+          <a:p>
+            <a:pPr algn="ctr" indent="0" marL="0">
+              <a:buNone/>
+            </a:pPr>
+            <a:r>
+              <a:rPr lang="en-US" sz="1100" b="1" dirty="0">
+                <a:solidFill>
+                  <a:srgbClr val="0F1B2D"/>
+                </a:solidFill>
+                <a:latin typeface="Calibri" pitchFamily="34" charset="0"/>
+                <a:ea typeface="Calibri" pitchFamily="34" charset="-122"/>
+                <a:cs typeface="Calibri" pitchFamily="34" charset="-120"/>
+              </a:rPr>
+              <a:t>✓</a:t>
+            </a:r>
+            <a:endParaRPr lang="en-US" sz="1100" dirty="0"/>
+          </a:p>
+        </p:txBody>
+      </p:sp>
+      <p:sp>
+        <p:nvSpPr>
+          <p:cNvPr id="34" name="Text 32"/>
+          <p:cNvSpPr txBox="1"/>
+          <p:nvPr/>
+        </p:nvSpPr>
+        <p:spPr>
+          <a:xfrm>
+            <a:off x="6537960" y="3694176"/>
+            <a:ext cx="4937760" cy="365760"/>
+          </a:xfrm>
+          <a:prstGeom prst="rect">
+            <a:avLst/>
+          </a:prstGeom>
+          <a:noFill/>
+          <a:ln/>
+        </p:spPr>
+        <p:txBody>
+          <a:bodyPr wrap="square" lIns="0" tIns="0" rIns="0" bIns="0" rtlCol="0" anchor="ctr"/>
+          <a:lstStyle/>
+          <a:p>
+            <a:pPr indent="0" marL="0">
+              <a:lnSpc>
+                <a:spcPts val="1700"/>
+              </a:lnSpc>
+              <a:buNone/>
+            </a:pPr>
+            <a:r>
+              <a:rPr lang="en-US" sz="1250" dirty="0">
+                <a:solidFill>
+                  <a:srgbClr val="CADCFC"/>
+                </a:solidFill>
+                <a:latin typeface="Calibri" pitchFamily="34" charset="0"/>
+                <a:ea typeface="Calibri" pitchFamily="34" charset="-122"/>
+                <a:cs typeface="Calibri" pitchFamily="34" charset="-120"/>
+              </a:rPr>
+              <a:t>The dashboard says which engine is driving</a:t>
+            </a:r>
+            <a:endParaRPr lang="en-US" sz="1250" dirty="0"/>
+          </a:p>
+        </p:txBody>
+      </p:sp>
+      <p:sp>
+        <p:nvSpPr>
+          <p:cNvPr id="35" name="Shape 33"/>
+          <p:cNvSpPr/>
+          <p:nvPr/>
+        </p:nvSpPr>
+        <p:spPr>
+          <a:xfrm>
+            <a:off x="566928" y="4315968"/>
+            <a:ext cx="11055096" cy="1572768"/>
+          </a:xfrm>
+          <a:prstGeom prst="roundRect">
+            <a:avLst>
+              <a:gd name="adj" fmla="val 3488"/>
             </a:avLst>
           </a:prstGeom>
           <a:solidFill>
@@ -14421,7 +16688,7 @@
       </p:sp>
       <p:sp>
         <p:nvSpPr>
-          <p:cNvPr id="22" name="Text 20"/>
+          <p:cNvPr id="36" name="Text 34"/>
           <p:cNvSpPr txBox="1"/>
           <p:nvPr/>
         </p:nvSpPr>
@@ -14444,7 +16711,7 @@
               <a:buNone/>
             </a:pPr>
             <a:r>
-              <a:rPr lang="en-US" sz="1100" b="1" spc="160" kern="0" dirty="0">
+              <a:rPr lang="en-US" sz="1050" b="1" spc="160" kern="0" dirty="0">
                 <a:solidFill>
                   <a:srgbClr val="02C39A"/>
                 </a:solidFill>
@@ -14452,22 +16719,61 @@
                 <a:ea typeface="Calibri" pitchFamily="34" charset="-122"/>
                 <a:cs typeface="Calibri" pitchFamily="34" charset="-120"/>
               </a:rPr>
-              <a:t>The decisions to settle in this review</a:t>
-            </a:r>
-            <a:endParaRPr lang="en-US" sz="1100" dirty="0"/>
-          </a:p>
-        </p:txBody>
-      </p:sp>
-      <p:sp>
-        <p:nvSpPr>
-          <p:cNvPr id="23" name="Text 21"/>
-          <p:cNvSpPr txBox="1"/>
-          <p:nvPr/>
-        </p:nvSpPr>
-        <p:spPr>
-          <a:xfrm>
-            <a:off x="950976" y="4828032"/>
-            <a:ext cx="10287000" cy="621792"/>
+              <a:t>WHAT COMES NEXT</a:t>
+            </a:r>
+            <a:endParaRPr lang="en-US" sz="1050" dirty="0"/>
+          </a:p>
+        </p:txBody>
+      </p:sp>
+      <p:sp>
+        <p:nvSpPr>
+          <p:cNvPr id="37" name="Text 35"/>
+          <p:cNvSpPr txBox="1"/>
+          <p:nvPr/>
+        </p:nvSpPr>
+        <p:spPr>
+          <a:xfrm>
+            <a:off x="950976" y="4846320"/>
+            <a:ext cx="731520" cy="256032"/>
+          </a:xfrm>
+          <a:prstGeom prst="rect">
+            <a:avLst/>
+          </a:prstGeom>
+          <a:noFill/>
+          <a:ln/>
+        </p:spPr>
+        <p:txBody>
+          <a:bodyPr wrap="square" lIns="0" tIns="0" rIns="0" bIns="0" rtlCol="0" anchor="ctr"/>
+          <a:lstStyle/>
+          <a:p>
+            <a:pPr indent="0" marL="0">
+              <a:buNone/>
+            </a:pPr>
+            <a:r>
+              <a:rPr lang="en-US" sz="1200" b="1" dirty="0">
+                <a:solidFill>
+                  <a:srgbClr val="02C39A"/>
+                </a:solidFill>
+                <a:latin typeface="Courier New" pitchFamily="34" charset="0"/>
+                <a:ea typeface="Courier New" pitchFamily="34" charset="-122"/>
+                <a:cs typeface="Courier New" pitchFamily="34" charset="-120"/>
+              </a:rPr>
+              <a:t>#155</a:t>
+            </a:r>
+            <a:endParaRPr lang="en-US" sz="1200" dirty="0"/>
+          </a:p>
+        </p:txBody>
+      </p:sp>
+      <p:sp>
+        <p:nvSpPr>
+          <p:cNvPr id="38" name="Text 36"/>
+          <p:cNvSpPr txBox="1"/>
+          <p:nvPr/>
+        </p:nvSpPr>
+        <p:spPr>
+          <a:xfrm>
+            <a:off x="950976" y="5120640"/>
+            <a:ext cx="3291840" cy="685800"/>
           </a:xfrm>
           <a:prstGeom prst="rect">
             <a:avLst/>
@@ -14481,12 +16787,12 @@
           <a:p>
             <a:pPr indent="0" marL="0">
               <a:lnSpc>
-                <a:spcPts val="1800"/>
+                <a:spcPts val="1700"/>
               </a:lnSpc>
               <a:buNone/>
             </a:pPr>
             <a:r>
-              <a:rPr lang="en-US" sz="1300" dirty="0">
+              <a:rPr lang="en-US" sz="1200" dirty="0">
                 <a:solidFill>
                   <a:srgbClr val="9FB3C8"/>
                 </a:solidFill>
@@ -14494,21 +16800,183 @@
                 <a:ea typeface="Calibri" pitchFamily="34" charset="-122"/>
                 <a:cs typeface="Calibri" pitchFamily="34" charset="-120"/>
               </a:rPr>
-              <a:t>Whether a symbol's category is fixed once a plan exists or re-evaluated every quarter · whether phase 1 starts collecting now against the current watchlist · and who owns the weekly plan review while the UI does not yet exist.</a:t>
-            </a:r>
-            <a:endParaRPr lang="en-US" sz="1300" dirty="0"/>
-          </a:p>
-        </p:txBody>
-      </p:sp>
-      <p:sp>
-        <p:nvSpPr>
-          <p:cNvPr id="24" name="Text 22"/>
-          <p:cNvSpPr txBox="1"/>
-          <p:nvPr/>
-        </p:nvSpPr>
-        <p:spPr>
-          <a:xfrm>
-            <a:off x="566928" y="5943600"/>
+              <a:t>Signal collection blends an LLM with FinBERT for better signal quality</a:t>
+            </a:r>
+            <a:endParaRPr lang="en-US" sz="1200" dirty="0"/>
+          </a:p>
+        </p:txBody>
+      </p:sp>
+      <p:sp>
+        <p:nvSpPr>
+          <p:cNvPr id="39" name="Text 37"/>
+          <p:cNvSpPr txBox="1"/>
+          <p:nvPr/>
+        </p:nvSpPr>
+        <p:spPr>
+          <a:xfrm>
+            <a:off x="4471416" y="4846320"/>
+            <a:ext cx="731520" cy="256032"/>
+          </a:xfrm>
+          <a:prstGeom prst="rect">
+            <a:avLst/>
+          </a:prstGeom>
+          <a:noFill/>
+          <a:ln/>
+        </p:spPr>
+        <p:txBody>
+          <a:bodyPr wrap="square" lIns="0" tIns="0" rIns="0" bIns="0" rtlCol="0" anchor="ctr"/>
+          <a:lstStyle/>
+          <a:p>
+            <a:pPr indent="0" marL="0">
+              <a:buNone/>
+            </a:pPr>
+            <a:r>
+              <a:rPr lang="en-US" sz="1200" b="1" dirty="0">
+                <a:solidFill>
+                  <a:srgbClr val="02C39A"/>
+                </a:solidFill>
+                <a:latin typeface="Courier New" pitchFamily="34" charset="0"/>
+                <a:ea typeface="Courier New" pitchFamily="34" charset="-122"/>
+                <a:cs typeface="Courier New" pitchFamily="34" charset="-120"/>
+              </a:rPr>
+              <a:t>#152</a:t>
+            </a:r>
+            <a:endParaRPr lang="en-US" sz="1200" dirty="0"/>
+          </a:p>
+        </p:txBody>
+      </p:sp>
+      <p:sp>
+        <p:nvSpPr>
+          <p:cNvPr id="40" name="Text 38"/>
+          <p:cNvSpPr txBox="1"/>
+          <p:nvPr/>
+        </p:nvSpPr>
+        <p:spPr>
+          <a:xfrm>
+            <a:off x="4471416" y="5120640"/>
+            <a:ext cx="3291840" cy="685800"/>
+          </a:xfrm>
+          <a:prstGeom prst="rect">
+            <a:avLst/>
+          </a:prstGeom>
+          <a:noFill/>
+          <a:ln/>
+        </p:spPr>
+        <p:txBody>
+          <a:bodyPr wrap="square" lIns="0" tIns="0" rIns="0" bIns="0" rtlCol="0" anchor="ctr"/>
+          <a:lstStyle/>
+          <a:p>
+            <a:pPr indent="0" marL="0">
+              <a:lnSpc>
+                <a:spcPts val="1700"/>
+              </a:lnSpc>
+              <a:buNone/>
+            </a:pPr>
+            <a:r>
+              <a:rPr lang="en-US" sz="1200" dirty="0">
+                <a:solidFill>
+                  <a:srgbClr val="9FB3C8"/>
+                </a:solidFill>
+                <a:latin typeface="Calibri" pitchFamily="34" charset="0"/>
+                <a:ea typeface="Calibri" pitchFamily="34" charset="-122"/>
+                <a:cs typeface="Calibri" pitchFamily="34" charset="-120"/>
+              </a:rPr>
+              <a:t>Runs becomes Job History, filterable by job type</a:t>
+            </a:r>
+            <a:endParaRPr lang="en-US" sz="1200" dirty="0"/>
+          </a:p>
+        </p:txBody>
+      </p:sp>
+      <p:sp>
+        <p:nvSpPr>
+          <p:cNvPr id="41" name="Text 39"/>
+          <p:cNvSpPr txBox="1"/>
+          <p:nvPr/>
+        </p:nvSpPr>
+        <p:spPr>
+          <a:xfrm>
+            <a:off x="7991856" y="4846320"/>
+            <a:ext cx="731520" cy="256032"/>
+          </a:xfrm>
+          <a:prstGeom prst="rect">
+            <a:avLst/>
+          </a:prstGeom>
+          <a:noFill/>
+          <a:ln/>
+        </p:spPr>
+        <p:txBody>
+          <a:bodyPr wrap="square" lIns="0" tIns="0" rIns="0" bIns="0" rtlCol="0" anchor="ctr"/>
+          <a:lstStyle/>
+          <a:p>
+            <a:pPr indent="0" marL="0">
+              <a:buNone/>
+            </a:pPr>
+            <a:r>
+              <a:rPr lang="en-US" sz="1200" b="1" dirty="0">
+                <a:solidFill>
+                  <a:srgbClr val="02C39A"/>
+                </a:solidFill>
+                <a:latin typeface="Courier New" pitchFamily="34" charset="0"/>
+                <a:ea typeface="Courier New" pitchFamily="34" charset="-122"/>
+                <a:cs typeface="Courier New" pitchFamily="34" charset="-120"/>
+              </a:rPr>
+              <a:t>#153</a:t>
+            </a:r>
+            <a:endParaRPr lang="en-US" sz="1200" dirty="0"/>
+          </a:p>
+        </p:txBody>
+      </p:sp>
+      <p:sp>
+        <p:nvSpPr>
+          <p:cNvPr id="42" name="Text 40"/>
+          <p:cNvSpPr txBox="1"/>
+          <p:nvPr/>
+        </p:nvSpPr>
+        <p:spPr>
+          <a:xfrm>
+            <a:off x="7991856" y="5120640"/>
+            <a:ext cx="3291840" cy="685800"/>
+          </a:xfrm>
+          <a:prstGeom prst="rect">
+            <a:avLst/>
+          </a:prstGeom>
+          <a:noFill/>
+          <a:ln/>
+        </p:spPr>
+        <p:txBody>
+          <a:bodyPr wrap="square" lIns="0" tIns="0" rIns="0" bIns="0" rtlCol="0" anchor="ctr"/>
+          <a:lstStyle/>
+          <a:p>
+            <a:pPr indent="0" marL="0">
+              <a:lnSpc>
+                <a:spcPts val="1700"/>
+              </a:lnSpc>
+              <a:buNone/>
+            </a:pPr>
+            <a:r>
+              <a:rPr lang="en-US" sz="1200" dirty="0">
+                <a:solidFill>
+                  <a:srgbClr val="9FB3C8"/>
+                </a:solidFill>
+                <a:latin typeface="Calibri" pitchFamily="34" charset="0"/>
+                <a:ea typeface="Calibri" pitchFamily="34" charset="-122"/>
+                <a:cs typeface="Calibri" pitchFamily="34" charset="-120"/>
+              </a:rPr>
+              <a:t>On-demand LLM reports that synthesize what the signals are saying</a:t>
+            </a:r>
+            <a:endParaRPr lang="en-US" sz="1200" dirty="0"/>
+          </a:p>
+        </p:txBody>
+      </p:sp>
+      <p:sp>
+        <p:nvSpPr>
+          <p:cNvPr id="43" name="Text 41"/>
+          <p:cNvSpPr txBox="1"/>
+          <p:nvPr/>
+        </p:nvSpPr>
+        <p:spPr>
+          <a:xfrm>
+            <a:off x="566928" y="6089904"/>
             <a:ext cx="8229600" cy="274320"/>
           </a:xfrm>
           <a:prstGeom prst="rect">
@@ -14533,7 +17001,7 @@
                 <a:ea typeface="Calibri" pitchFamily="34" charset="-122"/>
                 <a:cs typeface="Calibri" pitchFamily="34" charset="-120"/>
               </a:rPr>
-              <a:t>Issues #132–#139  ·  doc 08 — Strategic Plan-Based Trading</a:t>
+              <a:t>Epic #131  ·  doc 08 — Strategic Plan-Based Trading</a:t>
             </a:r>
             <a:endParaRPr lang="en-US" sz="1050" dirty="0"/>
           </a:p>
@@ -18007,7 +20475,7 @@
                 <a:ea typeface="Calibri" pitchFamily="34" charset="-122"/>
                 <a:cs typeface="Calibri" pitchFamily="34" charset="-120"/>
               </a:rPr>
-              <a:t>FinBERT scores over news headlines</a:t>
+              <a:t>FinBERT over headlines; LLM blend planned</a:t>
             </a:r>
             <a:endParaRPr lang="en-US" sz="1200" dirty="0"/>
           </a:p>
@@ -18725,13 +21193,160 @@
       </p:sp>
       <p:sp>
         <p:nvSpPr>
-          <p:cNvPr id="33" name="Text 31"/>
-          <p:cNvSpPr txBox="1"/>
-          <p:nvPr/>
-        </p:nvSpPr>
-        <p:spPr>
-          <a:xfrm>
-            <a:off x="566928" y="5806440"/>
+          <p:cNvPr id="33" name="Shape 31"/>
+          <p:cNvSpPr/>
+          <p:nvPr/>
+        </p:nvSpPr>
+        <p:spPr>
+          <a:xfrm>
+            <a:off x="566928" y="4681728"/>
+            <a:ext cx="5257800" cy="1188720"/>
+          </a:xfrm>
+          <a:prstGeom prst="roundRect">
+            <a:avLst>
+              <a:gd name="adj" fmla="val 4615"/>
+            </a:avLst>
+          </a:prstGeom>
+          <a:solidFill>
+            <a:srgbClr val="0F1B2D"/>
+          </a:solidFill>
+          <a:ln w="12700">
+            <a:solidFill>
+              <a:srgbClr val="0F1B2D"/>
+            </a:solidFill>
+            <a:prstDash val="solid"/>
+          </a:ln>
+        </p:spPr>
+      </p:sp>
+      <p:sp>
+        <p:nvSpPr>
+          <p:cNvPr id="34" name="Text 32"/>
+          <p:cNvSpPr txBox="1"/>
+          <p:nvPr/>
+        </p:nvSpPr>
+        <p:spPr>
+          <a:xfrm>
+            <a:off x="877824" y="4828032"/>
+            <a:ext cx="4663440" cy="237744"/>
+          </a:xfrm>
+          <a:prstGeom prst="rect">
+            <a:avLst/>
+          </a:prstGeom>
+          <a:noFill/>
+          <a:ln/>
+        </p:spPr>
+        <p:txBody>
+          <a:bodyPr wrap="square" lIns="0" tIns="0" rIns="0" bIns="0" rtlCol="0" anchor="ctr"/>
+          <a:lstStyle/>
+          <a:p>
+            <a:pPr indent="0" marL="0">
+              <a:buNone/>
+            </a:pPr>
+            <a:r>
+              <a:rPr lang="en-US" sz="1000" b="1" spc="160" kern="0" dirty="0">
+                <a:solidFill>
+                  <a:srgbClr val="02C39A"/>
+                </a:solidFill>
+                <a:latin typeface="Calibri" pitchFamily="34" charset="0"/>
+                <a:ea typeface="Calibri" pitchFamily="34" charset="-122"/>
+                <a:cs typeface="Calibri" pitchFamily="34" charset="-120"/>
+              </a:rPr>
+              <a:t>COLLECTED FOR</a:t>
+            </a:r>
+            <a:endParaRPr lang="en-US" sz="1000" dirty="0"/>
+          </a:p>
+        </p:txBody>
+      </p:sp>
+      <p:sp>
+        <p:nvSpPr>
+          <p:cNvPr id="35" name="Text 33"/>
+          <p:cNvSpPr txBox="1"/>
+          <p:nvPr/>
+        </p:nvSpPr>
+        <p:spPr>
+          <a:xfrm>
+            <a:off x="877824" y="5047488"/>
+            <a:ext cx="4663440" cy="292608"/>
+          </a:xfrm>
+          <a:prstGeom prst="rect">
+            <a:avLst/>
+          </a:prstGeom>
+          <a:noFill/>
+          <a:ln/>
+        </p:spPr>
+        <p:txBody>
+          <a:bodyPr wrap="square" lIns="0" tIns="0" rIns="0" bIns="0" rtlCol="0" anchor="ctr"/>
+          <a:lstStyle/>
+          <a:p>
+            <a:pPr indent="0" marL="0">
+              <a:buNone/>
+            </a:pPr>
+            <a:r>
+              <a:rPr lang="en-US" sz="1400" b="1" dirty="0">
+                <a:solidFill>
+                  <a:srgbClr val="FFFFFF"/>
+                </a:solidFill>
+                <a:latin typeface="Courier New" pitchFamily="34" charset="0"/>
+                <a:ea typeface="Courier New" pitchFamily="34" charset="-122"/>
+                <a:cs typeface="Courier New" pitchFamily="34" charset="-120"/>
+              </a:rPr>
+              <a:t>watchlist ∪ positions</a:t>
+            </a:r>
+            <a:endParaRPr lang="en-US" sz="1400" dirty="0"/>
+          </a:p>
+        </p:txBody>
+      </p:sp>
+      <p:sp>
+        <p:nvSpPr>
+          <p:cNvPr id="36" name="Text 34"/>
+          <p:cNvSpPr txBox="1"/>
+          <p:nvPr/>
+        </p:nvSpPr>
+        <p:spPr>
+          <a:xfrm>
+            <a:off x="877824" y="5358384"/>
+            <a:ext cx="4709160" cy="457200"/>
+          </a:xfrm>
+          <a:prstGeom prst="rect">
+            <a:avLst/>
+          </a:prstGeom>
+          <a:noFill/>
+          <a:ln/>
+        </p:spPr>
+        <p:txBody>
+          <a:bodyPr wrap="square" lIns="0" tIns="0" rIns="0" bIns="0" rtlCol="0" anchor="ctr"/>
+          <a:lstStyle/>
+          <a:p>
+            <a:pPr indent="0" marL="0">
+              <a:lnSpc>
+                <a:spcPts val="1500"/>
+              </a:lnSpc>
+              <a:buNone/>
+            </a:pPr>
+            <a:r>
+              <a:rPr lang="en-US" sz="1150" dirty="0">
+                <a:solidFill>
+                  <a:srgbClr val="9FB3C8"/>
+                </a:solidFill>
+                <a:latin typeface="Calibri" pitchFamily="34" charset="0"/>
+                <a:ea typeface="Calibri" pitchFamily="34" charset="-122"/>
+                <a:cs typeface="Calibri" pitchFamily="34" charset="-120"/>
+              </a:rPr>
+              <a:t>Holdings that arrived by manual trade or the old cycle are monitored too — otherwise nothing would ever generate a TRIM signal.</a:t>
+            </a:r>
+            <a:endParaRPr lang="en-US" sz="1150" dirty="0"/>
+          </a:p>
+        </p:txBody>
+      </p:sp>
+      <p:sp>
+        <p:nvSpPr>
+          <p:cNvPr id="37" name="Text 35"/>
+          <p:cNvSpPr txBox="1"/>
+          <p:nvPr/>
+        </p:nvSpPr>
+        <p:spPr>
+          <a:xfrm>
+            <a:off x="566928" y="5998464"/>
             <a:ext cx="11055096" cy="329184"/>
           </a:xfrm>
           <a:prstGeom prst="rect">
